--- a/docs/proposal/slides.pptx
+++ b/docs/proposal/slides.pptx
@@ -27,6 +27,10 @@
     <p:sldId id="272" r:id="rId23"/>
     <p:sldId id="273" r:id="rId24"/>
     <p:sldId id="274" r:id="rId25"/>
+    <p:sldId id="275" r:id="rId26"/>
+    <p:sldId id="276" r:id="rId27"/>
+    <p:sldId id="277" r:id="rId28"/>
+    <p:sldId id="278" r:id="rId29"/>
   </p:sldIdLst>
   <p:sldSz cy="6858000" cx="9144000"/>
   <p:notesSz cx="7315200" cy="9601200"/>
@@ -1085,7 +1089,7 @@
   <p:cSld>
     <p:spTree>
       <p:nvGrpSpPr>
-        <p:cNvPr id="149" name="Shape 149"/>
+        <p:cNvPr id="151" name="Shape 151"/>
         <p:cNvGrpSpPr/>
         <p:nvPr/>
       </p:nvGrpSpPr>
@@ -1099,7 +1103,7 @@
       </p:grpSpPr>
       <p:sp>
         <p:nvSpPr>
-          <p:cNvPr id="150" name="Google Shape;150;g3f9fbfbdbe5_5_54:notes"/>
+          <p:cNvPr id="152" name="Google Shape;152;g3fa1e6576f6_0_190:notes"/>
           <p:cNvSpPr txBox="1"/>
           <p:nvPr>
             <p:ph idx="1" type="body"/>
@@ -1146,7 +1150,7 @@
       </p:sp>
       <p:sp>
         <p:nvSpPr>
-          <p:cNvPr id="151" name="Google Shape;151;g3f9fbfbdbe5_5_54:notes"/>
+          <p:cNvPr id="153" name="Google Shape;153;g3fa1e6576f6_0_190:notes"/>
           <p:cNvSpPr/>
           <p:nvPr>
             <p:ph idx="2" type="sldImg"/>
@@ -1202,7 +1206,7 @@
   <p:cSld>
     <p:spTree>
       <p:nvGrpSpPr>
-        <p:cNvPr id="155" name="Shape 155"/>
+        <p:cNvPr id="160" name="Shape 160"/>
         <p:cNvGrpSpPr/>
         <p:nvPr/>
       </p:nvGrpSpPr>
@@ -1216,7 +1220,7 @@
       </p:grpSpPr>
       <p:sp>
         <p:nvSpPr>
-          <p:cNvPr id="156" name="Google Shape;156;p10:notes"/>
+          <p:cNvPr id="161" name="Google Shape;161;p10:notes"/>
           <p:cNvSpPr txBox="1"/>
           <p:nvPr>
             <p:ph idx="1" type="body"/>
@@ -1263,7 +1267,7 @@
       </p:sp>
       <p:sp>
         <p:nvSpPr>
-          <p:cNvPr id="157" name="Google Shape;157;p10:notes"/>
+          <p:cNvPr id="162" name="Google Shape;162;p10:notes"/>
           <p:cNvSpPr/>
           <p:nvPr>
             <p:ph idx="2" type="sldImg"/>
@@ -1319,7 +1323,7 @@
   <p:cSld>
     <p:spTree>
       <p:nvGrpSpPr>
-        <p:cNvPr id="161" name="Shape 161"/>
+        <p:cNvPr id="166" name="Shape 166"/>
         <p:cNvGrpSpPr/>
         <p:nvPr/>
       </p:nvGrpSpPr>
@@ -1333,7 +1337,7 @@
       </p:grpSpPr>
       <p:sp>
         <p:nvSpPr>
-          <p:cNvPr id="162" name="Google Shape;162;p11:notes"/>
+          <p:cNvPr id="167" name="Google Shape;167;p11:notes"/>
           <p:cNvSpPr txBox="1"/>
           <p:nvPr>
             <p:ph idx="1" type="body"/>
@@ -1380,7 +1384,7 @@
       </p:sp>
       <p:sp>
         <p:nvSpPr>
-          <p:cNvPr id="163" name="Google Shape;163;p11:notes"/>
+          <p:cNvPr id="168" name="Google Shape;168;p11:notes"/>
           <p:cNvSpPr/>
           <p:nvPr>
             <p:ph idx="2" type="sldImg"/>
@@ -1436,7 +1440,7 @@
   <p:cSld>
     <p:spTree>
       <p:nvGrpSpPr>
-        <p:cNvPr id="167" name="Shape 167"/>
+        <p:cNvPr id="172" name="Shape 172"/>
         <p:cNvGrpSpPr/>
         <p:nvPr/>
       </p:nvGrpSpPr>
@@ -1450,7 +1454,7 @@
       </p:grpSpPr>
       <p:sp>
         <p:nvSpPr>
-          <p:cNvPr id="168" name="Google Shape;168;p12:notes"/>
+          <p:cNvPr id="173" name="Google Shape;173;p12:notes"/>
           <p:cNvSpPr txBox="1"/>
           <p:nvPr>
             <p:ph idx="1" type="body"/>
@@ -1497,7 +1501,7 @@
       </p:sp>
       <p:sp>
         <p:nvSpPr>
-          <p:cNvPr id="169" name="Google Shape;169;p12:notes"/>
+          <p:cNvPr id="174" name="Google Shape;174;p12:notes"/>
           <p:cNvSpPr/>
           <p:nvPr>
             <p:ph idx="2" type="sldImg"/>
@@ -1553,7 +1557,7 @@
   <p:cSld>
     <p:spTree>
       <p:nvGrpSpPr>
-        <p:cNvPr id="173" name="Shape 173"/>
+        <p:cNvPr id="178" name="Shape 178"/>
         <p:cNvGrpSpPr/>
         <p:nvPr/>
       </p:nvGrpSpPr>
@@ -1567,7 +1571,7 @@
       </p:grpSpPr>
       <p:sp>
         <p:nvSpPr>
-          <p:cNvPr id="174" name="Google Shape;174;p13:notes"/>
+          <p:cNvPr id="179" name="Google Shape;179;p15:notes"/>
           <p:cNvSpPr txBox="1"/>
           <p:nvPr>
             <p:ph idx="1" type="body"/>
@@ -1614,7 +1618,7 @@
       </p:sp>
       <p:sp>
         <p:nvSpPr>
-          <p:cNvPr id="175" name="Google Shape;175;p13:notes"/>
+          <p:cNvPr id="180" name="Google Shape;180;p15:notes"/>
           <p:cNvSpPr/>
           <p:nvPr>
             <p:ph idx="2" type="sldImg"/>
@@ -1670,7 +1674,7 @@
   <p:cSld>
     <p:spTree>
       <p:nvGrpSpPr>
-        <p:cNvPr id="179" name="Shape 179"/>
+        <p:cNvPr id="187" name="Shape 187"/>
         <p:cNvGrpSpPr/>
         <p:nvPr/>
       </p:nvGrpSpPr>
@@ -1684,7 +1688,7 @@
       </p:grpSpPr>
       <p:sp>
         <p:nvSpPr>
-          <p:cNvPr id="180" name="Google Shape;180;p14:notes"/>
+          <p:cNvPr id="188" name="Google Shape;188;p13:notes"/>
           <p:cNvSpPr txBox="1"/>
           <p:nvPr>
             <p:ph idx="1" type="body"/>
@@ -1731,7 +1735,7 @@
       </p:sp>
       <p:sp>
         <p:nvSpPr>
-          <p:cNvPr id="181" name="Google Shape;181;p14:notes"/>
+          <p:cNvPr id="189" name="Google Shape;189;p13:notes"/>
           <p:cNvSpPr/>
           <p:nvPr>
             <p:ph idx="2" type="sldImg"/>
@@ -1787,7 +1791,7 @@
   <p:cSld>
     <p:spTree>
       <p:nvGrpSpPr>
-        <p:cNvPr id="185" name="Shape 185"/>
+        <p:cNvPr id="238" name="Shape 238"/>
         <p:cNvGrpSpPr/>
         <p:nvPr/>
       </p:nvGrpSpPr>
@@ -1801,7 +1805,7 @@
       </p:grpSpPr>
       <p:sp>
         <p:nvSpPr>
-          <p:cNvPr id="186" name="Google Shape;186;p15:notes"/>
+          <p:cNvPr id="239" name="Google Shape;239;p14:notes"/>
           <p:cNvSpPr txBox="1"/>
           <p:nvPr>
             <p:ph idx="1" type="body"/>
@@ -1848,7 +1852,7 @@
       </p:sp>
       <p:sp>
         <p:nvSpPr>
-          <p:cNvPr id="187" name="Google Shape;187;p15:notes"/>
+          <p:cNvPr id="240" name="Google Shape;240;p14:notes"/>
           <p:cNvSpPr/>
           <p:nvPr>
             <p:ph idx="2" type="sldImg"/>
@@ -1904,7 +1908,7 @@
   <p:cSld>
     <p:spTree>
       <p:nvGrpSpPr>
-        <p:cNvPr id="191" name="Shape 191"/>
+        <p:cNvPr id="244" name="Shape 244"/>
         <p:cNvGrpSpPr/>
         <p:nvPr/>
       </p:nvGrpSpPr>
@@ -1918,7 +1922,7 @@
       </p:grpSpPr>
       <p:sp>
         <p:nvSpPr>
-          <p:cNvPr id="192" name="Google Shape;192;p16:notes"/>
+          <p:cNvPr id="245" name="Google Shape;245;g3fa1e6576f6_0_95:notes"/>
           <p:cNvSpPr txBox="1"/>
           <p:nvPr>
             <p:ph idx="1" type="body"/>
@@ -1927,7 +1931,7 @@
         <p:spPr>
           <a:xfrm>
             <a:off x="731500" y="4560550"/>
-            <a:ext cx="5852150" cy="4320525"/>
+            <a:ext cx="5852100" cy="4320600"/>
           </a:xfrm>
           <a:prstGeom prst="rect">
             <a:avLst/>
@@ -1965,7 +1969,7 @@
       </p:sp>
       <p:sp>
         <p:nvSpPr>
-          <p:cNvPr id="193" name="Google Shape;193;p16:notes"/>
+          <p:cNvPr id="246" name="Google Shape;246;g3fa1e6576f6_0_95:notes"/>
           <p:cNvSpPr/>
           <p:nvPr>
             <p:ph idx="2" type="sldImg"/>
@@ -1973,8 +1977,8 @@
         </p:nvSpPr>
         <p:spPr>
           <a:xfrm>
-            <a:off x="1257300" y="720725"/>
-            <a:ext cx="4800600" cy="3600450"/>
+            <a:off x="1219425" y="720075"/>
+            <a:ext cx="4877100" cy="3600600"/>
           </a:xfrm>
           <a:custGeom>
             <a:rect b="b" l="l" r="r" t="t"/>
@@ -2021,7 +2025,7 @@
   <p:cSld>
     <p:spTree>
       <p:nvGrpSpPr>
-        <p:cNvPr id="197" name="Shape 197"/>
+        <p:cNvPr id="250" name="Shape 250"/>
         <p:cNvGrpSpPr/>
         <p:nvPr/>
       </p:nvGrpSpPr>
@@ -2035,7 +2039,7 @@
       </p:grpSpPr>
       <p:sp>
         <p:nvSpPr>
-          <p:cNvPr id="198" name="Google Shape;198;p17:notes"/>
+          <p:cNvPr id="251" name="Google Shape;251;g3fa1e6576f6_0_156:notes"/>
           <p:cNvSpPr txBox="1"/>
           <p:nvPr>
             <p:ph idx="1" type="body"/>
@@ -2044,7 +2048,7 @@
         <p:spPr>
           <a:xfrm>
             <a:off x="731500" y="4560550"/>
-            <a:ext cx="5852150" cy="4320525"/>
+            <a:ext cx="5852100" cy="4320600"/>
           </a:xfrm>
           <a:prstGeom prst="rect">
             <a:avLst/>
@@ -2082,7 +2086,7 @@
       </p:sp>
       <p:sp>
         <p:nvSpPr>
-          <p:cNvPr id="199" name="Google Shape;199;p17:notes"/>
+          <p:cNvPr id="252" name="Google Shape;252;g3fa1e6576f6_0_156:notes"/>
           <p:cNvSpPr/>
           <p:nvPr>
             <p:ph idx="2" type="sldImg"/>
@@ -2091,7 +2095,7 @@
         <p:spPr>
           <a:xfrm>
             <a:off x="1257300" y="720725"/>
-            <a:ext cx="4800600" cy="3600450"/>
+            <a:ext cx="4800600" cy="3600600"/>
           </a:xfrm>
           <a:custGeom>
             <a:rect b="b" l="l" r="r" t="t"/>
@@ -2209,6 +2213,474 @@
           <a:xfrm>
             <a:off x="1219425" y="720075"/>
             <a:ext cx="4877025" cy="3600450"/>
+          </a:xfrm>
+          <a:custGeom>
+            <a:rect b="b" l="l" r="r" t="t"/>
+            <a:pathLst>
+              <a:path extrusionOk="0" h="120000" w="120000">
+                <a:moveTo>
+                  <a:pt x="0" y="0"/>
+                </a:moveTo>
+                <a:lnTo>
+                  <a:pt x="120000" y="0"/>
+                </a:lnTo>
+                <a:lnTo>
+                  <a:pt x="120000" y="120000"/>
+                </a:lnTo>
+                <a:lnTo>
+                  <a:pt x="0" y="120000"/>
+                </a:lnTo>
+                <a:close/>
+              </a:path>
+            </a:pathLst>
+          </a:custGeom>
+          <a:noFill/>
+          <a:ln cap="flat" cmpd="sng" w="9525">
+            <a:solidFill>
+              <a:srgbClr val="000000"/>
+            </a:solidFill>
+            <a:prstDash val="solid"/>
+            <a:round/>
+            <a:headEnd len="sm" w="sm" type="none"/>
+            <a:tailEnd len="sm" w="sm" type="none"/>
+          </a:ln>
+        </p:spPr>
+      </p:sp>
+    </p:spTree>
+  </p:cSld>
+  <p:clrMapOvr>
+    <a:masterClrMapping/>
+  </p:clrMapOvr>
+</p:notes>
+</file>
+
+<file path=ppt/notesSlides/notesSlide20.xml><?xml version="1.0" encoding="utf-8"?>
+<p:notes xmlns:a="http://schemas.openxmlformats.org/drawingml/2006/main" xmlns:r="http://schemas.openxmlformats.org/officeDocument/2006/relationships" xmlns:mc="http://schemas.openxmlformats.org/markup-compatibility/2006" xmlns:mv="urn:schemas-microsoft-com:mac:vml" xmlns:p="http://schemas.openxmlformats.org/presentationml/2006/main" xmlns:c="http://schemas.openxmlformats.org/drawingml/2006/chart" xmlns:dgm="http://schemas.openxmlformats.org/drawingml/2006/diagram" xmlns:o="urn:schemas-microsoft-com:office:office" xmlns:v="urn:schemas-microsoft-com:vml" xmlns:pvml="urn:schemas-microsoft-com:office:powerpoint" xmlns:com="http://schemas.openxmlformats.org/drawingml/2006/compatibility" xmlns:p14="http://schemas.microsoft.com/office/powerpoint/2010/main" xmlns:p15="http://schemas.microsoft.com/office/powerpoint/2012/main" xmlns:ahyp="http://schemas.microsoft.com/office/drawing/2018/hyperlinkcolor" showMasterPhAnim="0" showMasterSp="0">
+  <p:cSld>
+    <p:spTree>
+      <p:nvGrpSpPr>
+        <p:cNvPr id="256" name="Shape 256"/>
+        <p:cNvGrpSpPr/>
+        <p:nvPr/>
+      </p:nvGrpSpPr>
+      <p:grpSpPr>
+        <a:xfrm>
+          <a:off x="0" y="0"/>
+          <a:ext cx="0" cy="0"/>
+          <a:chOff x="0" y="0"/>
+          <a:chExt cx="0" cy="0"/>
+        </a:xfrm>
+      </p:grpSpPr>
+      <p:sp>
+        <p:nvSpPr>
+          <p:cNvPr id="257" name="Google Shape;257;p17:notes"/>
+          <p:cNvSpPr txBox="1"/>
+          <p:nvPr>
+            <p:ph idx="1" type="body"/>
+          </p:nvPr>
+        </p:nvSpPr>
+        <p:spPr>
+          <a:xfrm>
+            <a:off x="731500" y="4560550"/>
+            <a:ext cx="5852150" cy="4320525"/>
+          </a:xfrm>
+          <a:prstGeom prst="rect">
+            <a:avLst/>
+          </a:prstGeom>
+          <a:noFill/>
+          <a:ln>
+            <a:noFill/>
+          </a:ln>
+        </p:spPr>
+        <p:txBody>
+          <a:bodyPr anchorCtr="0" anchor="t" bIns="91425" lIns="91425" spcFirstLastPara="1" rIns="91425" wrap="square" tIns="91425">
+            <a:noAutofit/>
+          </a:bodyPr>
+          <a:lstStyle/>
+          <a:p>
+            <a:pPr indent="0" lvl="0" marL="0" rtl="0" algn="l">
+              <a:lnSpc>
+                <a:spcPct val="100000"/>
+              </a:lnSpc>
+              <a:spcBef>
+                <a:spcPts val="0"/>
+              </a:spcBef>
+              <a:spcAft>
+                <a:spcPts val="0"/>
+              </a:spcAft>
+              <a:buSzPts val="1100"/>
+              <a:buNone/>
+            </a:pPr>
+            <a:r>
+              <a:t/>
+            </a:r>
+            <a:endParaRPr/>
+          </a:p>
+        </p:txBody>
+      </p:sp>
+      <p:sp>
+        <p:nvSpPr>
+          <p:cNvPr id="258" name="Google Shape;258;p17:notes"/>
+          <p:cNvSpPr/>
+          <p:nvPr>
+            <p:ph idx="2" type="sldImg"/>
+          </p:nvPr>
+        </p:nvSpPr>
+        <p:spPr>
+          <a:xfrm>
+            <a:off x="1257300" y="720725"/>
+            <a:ext cx="4800600" cy="3600450"/>
+          </a:xfrm>
+          <a:custGeom>
+            <a:rect b="b" l="l" r="r" t="t"/>
+            <a:pathLst>
+              <a:path extrusionOk="0" h="120000" w="120000">
+                <a:moveTo>
+                  <a:pt x="0" y="0"/>
+                </a:moveTo>
+                <a:lnTo>
+                  <a:pt x="120000" y="0"/>
+                </a:lnTo>
+                <a:lnTo>
+                  <a:pt x="120000" y="120000"/>
+                </a:lnTo>
+                <a:lnTo>
+                  <a:pt x="0" y="120000"/>
+                </a:lnTo>
+                <a:close/>
+              </a:path>
+            </a:pathLst>
+          </a:custGeom>
+          <a:noFill/>
+          <a:ln cap="flat" cmpd="sng" w="9525">
+            <a:solidFill>
+              <a:srgbClr val="000000"/>
+            </a:solidFill>
+            <a:prstDash val="solid"/>
+            <a:round/>
+            <a:headEnd len="sm" w="sm" type="none"/>
+            <a:tailEnd len="sm" w="sm" type="none"/>
+          </a:ln>
+        </p:spPr>
+      </p:sp>
+    </p:spTree>
+  </p:cSld>
+  <p:clrMapOvr>
+    <a:masterClrMapping/>
+  </p:clrMapOvr>
+</p:notes>
+</file>
+
+<file path=ppt/notesSlides/notesSlide21.xml><?xml version="1.0" encoding="utf-8"?>
+<p:notes xmlns:a="http://schemas.openxmlformats.org/drawingml/2006/main" xmlns:r="http://schemas.openxmlformats.org/officeDocument/2006/relationships" xmlns:mc="http://schemas.openxmlformats.org/markup-compatibility/2006" xmlns:mv="urn:schemas-microsoft-com:mac:vml" xmlns:p="http://schemas.openxmlformats.org/presentationml/2006/main" xmlns:c="http://schemas.openxmlformats.org/drawingml/2006/chart" xmlns:dgm="http://schemas.openxmlformats.org/drawingml/2006/diagram" xmlns:o="urn:schemas-microsoft-com:office:office" xmlns:v="urn:schemas-microsoft-com:vml" xmlns:pvml="urn:schemas-microsoft-com:office:powerpoint" xmlns:com="http://schemas.openxmlformats.org/drawingml/2006/compatibility" xmlns:p14="http://schemas.microsoft.com/office/powerpoint/2010/main" xmlns:p15="http://schemas.microsoft.com/office/powerpoint/2012/main" xmlns:ahyp="http://schemas.microsoft.com/office/drawing/2018/hyperlinkcolor" showMasterPhAnim="0" showMasterSp="0">
+  <p:cSld>
+    <p:spTree>
+      <p:nvGrpSpPr>
+        <p:cNvPr id="262" name="Shape 262"/>
+        <p:cNvGrpSpPr/>
+        <p:nvPr/>
+      </p:nvGrpSpPr>
+      <p:grpSpPr>
+        <a:xfrm>
+          <a:off x="0" y="0"/>
+          <a:ext cx="0" cy="0"/>
+          <a:chOff x="0" y="0"/>
+          <a:chExt cx="0" cy="0"/>
+        </a:xfrm>
+      </p:grpSpPr>
+      <p:sp>
+        <p:nvSpPr>
+          <p:cNvPr id="263" name="Google Shape;263;g3fa1e6576f6_0_163:notes"/>
+          <p:cNvSpPr txBox="1"/>
+          <p:nvPr>
+            <p:ph idx="1" type="body"/>
+          </p:nvPr>
+        </p:nvSpPr>
+        <p:spPr>
+          <a:xfrm>
+            <a:off x="731500" y="4560550"/>
+            <a:ext cx="5852100" cy="4320600"/>
+          </a:xfrm>
+          <a:prstGeom prst="rect">
+            <a:avLst/>
+          </a:prstGeom>
+          <a:noFill/>
+          <a:ln>
+            <a:noFill/>
+          </a:ln>
+        </p:spPr>
+        <p:txBody>
+          <a:bodyPr anchorCtr="0" anchor="t" bIns="91425" lIns="91425" spcFirstLastPara="1" rIns="91425" wrap="square" tIns="91425">
+            <a:noAutofit/>
+          </a:bodyPr>
+          <a:lstStyle/>
+          <a:p>
+            <a:pPr indent="0" lvl="0" marL="0" rtl="0" algn="l">
+              <a:lnSpc>
+                <a:spcPct val="100000"/>
+              </a:lnSpc>
+              <a:spcBef>
+                <a:spcPts val="0"/>
+              </a:spcBef>
+              <a:spcAft>
+                <a:spcPts val="0"/>
+              </a:spcAft>
+              <a:buSzPts val="1100"/>
+              <a:buNone/>
+            </a:pPr>
+            <a:r>
+              <a:t/>
+            </a:r>
+            <a:endParaRPr/>
+          </a:p>
+        </p:txBody>
+      </p:sp>
+      <p:sp>
+        <p:nvSpPr>
+          <p:cNvPr id="264" name="Google Shape;264;g3fa1e6576f6_0_163:notes"/>
+          <p:cNvSpPr/>
+          <p:nvPr>
+            <p:ph idx="2" type="sldImg"/>
+          </p:nvPr>
+        </p:nvSpPr>
+        <p:spPr>
+          <a:xfrm>
+            <a:off x="1257300" y="720725"/>
+            <a:ext cx="4800600" cy="3600600"/>
+          </a:xfrm>
+          <a:custGeom>
+            <a:rect b="b" l="l" r="r" t="t"/>
+            <a:pathLst>
+              <a:path extrusionOk="0" h="120000" w="120000">
+                <a:moveTo>
+                  <a:pt x="0" y="0"/>
+                </a:moveTo>
+                <a:lnTo>
+                  <a:pt x="120000" y="0"/>
+                </a:lnTo>
+                <a:lnTo>
+                  <a:pt x="120000" y="120000"/>
+                </a:lnTo>
+                <a:lnTo>
+                  <a:pt x="0" y="120000"/>
+                </a:lnTo>
+                <a:close/>
+              </a:path>
+            </a:pathLst>
+          </a:custGeom>
+          <a:noFill/>
+          <a:ln cap="flat" cmpd="sng" w="9525">
+            <a:solidFill>
+              <a:srgbClr val="000000"/>
+            </a:solidFill>
+            <a:prstDash val="solid"/>
+            <a:round/>
+            <a:headEnd len="sm" w="sm" type="none"/>
+            <a:tailEnd len="sm" w="sm" type="none"/>
+          </a:ln>
+        </p:spPr>
+      </p:sp>
+    </p:spTree>
+  </p:cSld>
+  <p:clrMapOvr>
+    <a:masterClrMapping/>
+  </p:clrMapOvr>
+</p:notes>
+</file>
+
+<file path=ppt/notesSlides/notesSlide22.xml><?xml version="1.0" encoding="utf-8"?>
+<p:notes xmlns:a="http://schemas.openxmlformats.org/drawingml/2006/main" xmlns:r="http://schemas.openxmlformats.org/officeDocument/2006/relationships" xmlns:mc="http://schemas.openxmlformats.org/markup-compatibility/2006" xmlns:mv="urn:schemas-microsoft-com:mac:vml" xmlns:p="http://schemas.openxmlformats.org/presentationml/2006/main" xmlns:c="http://schemas.openxmlformats.org/drawingml/2006/chart" xmlns:dgm="http://schemas.openxmlformats.org/drawingml/2006/diagram" xmlns:o="urn:schemas-microsoft-com:office:office" xmlns:v="urn:schemas-microsoft-com:vml" xmlns:pvml="urn:schemas-microsoft-com:office:powerpoint" xmlns:com="http://schemas.openxmlformats.org/drawingml/2006/compatibility" xmlns:p14="http://schemas.microsoft.com/office/powerpoint/2010/main" xmlns:p15="http://schemas.microsoft.com/office/powerpoint/2012/main" xmlns:ahyp="http://schemas.microsoft.com/office/drawing/2018/hyperlinkcolor" showMasterPhAnim="0" showMasterSp="0">
+  <p:cSld>
+    <p:spTree>
+      <p:nvGrpSpPr>
+        <p:cNvPr id="268" name="Shape 268"/>
+        <p:cNvGrpSpPr/>
+        <p:nvPr/>
+      </p:nvGrpSpPr>
+      <p:grpSpPr>
+        <a:xfrm>
+          <a:off x="0" y="0"/>
+          <a:ext cx="0" cy="0"/>
+          <a:chOff x="0" y="0"/>
+          <a:chExt cx="0" cy="0"/>
+        </a:xfrm>
+      </p:grpSpPr>
+      <p:sp>
+        <p:nvSpPr>
+          <p:cNvPr id="269" name="Google Shape;269;p16:notes"/>
+          <p:cNvSpPr txBox="1"/>
+          <p:nvPr>
+            <p:ph idx="1" type="body"/>
+          </p:nvPr>
+        </p:nvSpPr>
+        <p:spPr>
+          <a:xfrm>
+            <a:off x="731500" y="4560550"/>
+            <a:ext cx="5852150" cy="4320525"/>
+          </a:xfrm>
+          <a:prstGeom prst="rect">
+            <a:avLst/>
+          </a:prstGeom>
+          <a:noFill/>
+          <a:ln>
+            <a:noFill/>
+          </a:ln>
+        </p:spPr>
+        <p:txBody>
+          <a:bodyPr anchorCtr="0" anchor="t" bIns="91425" lIns="91425" spcFirstLastPara="1" rIns="91425" wrap="square" tIns="91425">
+            <a:noAutofit/>
+          </a:bodyPr>
+          <a:lstStyle/>
+          <a:p>
+            <a:pPr indent="0" lvl="0" marL="0" rtl="0" algn="l">
+              <a:lnSpc>
+                <a:spcPct val="100000"/>
+              </a:lnSpc>
+              <a:spcBef>
+                <a:spcPts val="0"/>
+              </a:spcBef>
+              <a:spcAft>
+                <a:spcPts val="0"/>
+              </a:spcAft>
+              <a:buSzPts val="1100"/>
+              <a:buNone/>
+            </a:pPr>
+            <a:r>
+              <a:t/>
+            </a:r>
+            <a:endParaRPr/>
+          </a:p>
+        </p:txBody>
+      </p:sp>
+      <p:sp>
+        <p:nvSpPr>
+          <p:cNvPr id="270" name="Google Shape;270;p16:notes"/>
+          <p:cNvSpPr/>
+          <p:nvPr>
+            <p:ph idx="2" type="sldImg"/>
+          </p:nvPr>
+        </p:nvSpPr>
+        <p:spPr>
+          <a:xfrm>
+            <a:off x="1257300" y="720725"/>
+            <a:ext cx="4800600" cy="3600450"/>
+          </a:xfrm>
+          <a:custGeom>
+            <a:rect b="b" l="l" r="r" t="t"/>
+            <a:pathLst>
+              <a:path extrusionOk="0" h="120000" w="120000">
+                <a:moveTo>
+                  <a:pt x="0" y="0"/>
+                </a:moveTo>
+                <a:lnTo>
+                  <a:pt x="120000" y="0"/>
+                </a:lnTo>
+                <a:lnTo>
+                  <a:pt x="120000" y="120000"/>
+                </a:lnTo>
+                <a:lnTo>
+                  <a:pt x="0" y="120000"/>
+                </a:lnTo>
+                <a:close/>
+              </a:path>
+            </a:pathLst>
+          </a:custGeom>
+          <a:noFill/>
+          <a:ln cap="flat" cmpd="sng" w="9525">
+            <a:solidFill>
+              <a:srgbClr val="000000"/>
+            </a:solidFill>
+            <a:prstDash val="solid"/>
+            <a:round/>
+            <a:headEnd len="sm" w="sm" type="none"/>
+            <a:tailEnd len="sm" w="sm" type="none"/>
+          </a:ln>
+        </p:spPr>
+      </p:sp>
+    </p:spTree>
+  </p:cSld>
+  <p:clrMapOvr>
+    <a:masterClrMapping/>
+  </p:clrMapOvr>
+</p:notes>
+</file>
+
+<file path=ppt/notesSlides/notesSlide23.xml><?xml version="1.0" encoding="utf-8"?>
+<p:notes xmlns:a="http://schemas.openxmlformats.org/drawingml/2006/main" xmlns:r="http://schemas.openxmlformats.org/officeDocument/2006/relationships" xmlns:mc="http://schemas.openxmlformats.org/markup-compatibility/2006" xmlns:mv="urn:schemas-microsoft-com:mac:vml" xmlns:p="http://schemas.openxmlformats.org/presentationml/2006/main" xmlns:c="http://schemas.openxmlformats.org/drawingml/2006/chart" xmlns:dgm="http://schemas.openxmlformats.org/drawingml/2006/diagram" xmlns:o="urn:schemas-microsoft-com:office:office" xmlns:v="urn:schemas-microsoft-com:vml" xmlns:pvml="urn:schemas-microsoft-com:office:powerpoint" xmlns:com="http://schemas.openxmlformats.org/drawingml/2006/compatibility" xmlns:p14="http://schemas.microsoft.com/office/powerpoint/2010/main" xmlns:p15="http://schemas.microsoft.com/office/powerpoint/2012/main" xmlns:ahyp="http://schemas.microsoft.com/office/drawing/2018/hyperlinkcolor" showMasterPhAnim="0" showMasterSp="0">
+  <p:cSld>
+    <p:spTree>
+      <p:nvGrpSpPr>
+        <p:cNvPr id="274" name="Shape 274"/>
+        <p:cNvGrpSpPr/>
+        <p:nvPr/>
+      </p:nvGrpSpPr>
+      <p:grpSpPr>
+        <a:xfrm>
+          <a:off x="0" y="0"/>
+          <a:ext cx="0" cy="0"/>
+          <a:chOff x="0" y="0"/>
+          <a:chExt cx="0" cy="0"/>
+        </a:xfrm>
+      </p:grpSpPr>
+      <p:sp>
+        <p:nvSpPr>
+          <p:cNvPr id="275" name="Google Shape;275;g3fa1e6576f6_0_107:notes"/>
+          <p:cNvSpPr txBox="1"/>
+          <p:nvPr>
+            <p:ph idx="1" type="body"/>
+          </p:nvPr>
+        </p:nvSpPr>
+        <p:spPr>
+          <a:xfrm>
+            <a:off x="731500" y="4560550"/>
+            <a:ext cx="5852100" cy="4320600"/>
+          </a:xfrm>
+          <a:prstGeom prst="rect">
+            <a:avLst/>
+          </a:prstGeom>
+          <a:noFill/>
+          <a:ln>
+            <a:noFill/>
+          </a:ln>
+        </p:spPr>
+        <p:txBody>
+          <a:bodyPr anchorCtr="0" anchor="t" bIns="91425" lIns="91425" spcFirstLastPara="1" rIns="91425" wrap="square" tIns="91425">
+            <a:noAutofit/>
+          </a:bodyPr>
+          <a:lstStyle/>
+          <a:p>
+            <a:pPr indent="0" lvl="0" marL="0" rtl="0" algn="l">
+              <a:lnSpc>
+                <a:spcPct val="100000"/>
+              </a:lnSpc>
+              <a:spcBef>
+                <a:spcPts val="0"/>
+              </a:spcBef>
+              <a:spcAft>
+                <a:spcPts val="0"/>
+              </a:spcAft>
+              <a:buSzPts val="1100"/>
+              <a:buNone/>
+            </a:pPr>
+            <a:r>
+              <a:t/>
+            </a:r>
+            <a:endParaRPr/>
+          </a:p>
+        </p:txBody>
+      </p:sp>
+      <p:sp>
+        <p:nvSpPr>
+          <p:cNvPr id="276" name="Google Shape;276;g3fa1e6576f6_0_107:notes"/>
+          <p:cNvSpPr/>
+          <p:nvPr>
+            <p:ph idx="2" type="sldImg"/>
+          </p:nvPr>
+        </p:nvSpPr>
+        <p:spPr>
+          <a:xfrm>
+            <a:off x="1257300" y="720725"/>
+            <a:ext cx="4800600" cy="3600600"/>
           </a:xfrm>
           <a:custGeom>
             <a:rect b="b" l="l" r="r" t="t"/>
@@ -15441,6 +15913,9 @@
     <p:sldLayoutId id="2147483657" r:id="rId11"/>
     <p:sldLayoutId id="2147483658" r:id="rId12"/>
   </p:sldLayoutIdLst>
+  <p:transition spd="med">
+    <p:fade/>
+  </p:transition>
   <p:hf dt="0" ftr="0" hdr="0" sldNum="0"/>
   <p:txStyles>
     <p:titleStyle>
@@ -16204,10 +16679,18 @@
               <a:buNone/>
             </a:pPr>
             <a:r>
-              <a:rPr lang="en-US"/>
+              <a:rPr lang="en-US">
+                <a:solidFill>
+                  <a:srgbClr val="0B3D59"/>
+                </a:solidFill>
+              </a:rPr>
               <a:t>Final Year Project Proposal</a:t>
             </a:r>
-            <a:endParaRPr/>
+            <a:endParaRPr>
+              <a:solidFill>
+                <a:srgbClr val="0B3D59"/>
+              </a:solidFill>
+            </a:endParaRPr>
           </a:p>
         </p:txBody>
       </p:sp>
@@ -16381,10 +16864,18 @@
               <a:buNone/>
             </a:pPr>
             <a:r>
-              <a:rPr b="1" lang="en-US" sz="4000"/>
+              <a:rPr b="1" lang="en-US" sz="4000">
+                <a:solidFill>
+                  <a:srgbClr val="0B3D59"/>
+                </a:solidFill>
+              </a:rPr>
               <a:t>Gap Analysis</a:t>
             </a:r>
-            <a:endParaRPr b="1" sz="4000"/>
+            <a:endParaRPr b="1" sz="4000">
+              <a:solidFill>
+                <a:srgbClr val="0B3D59"/>
+              </a:solidFill>
+            </a:endParaRPr>
           </a:p>
         </p:txBody>
       </p:sp>
@@ -16398,8 +16889,8 @@
         </p:nvSpPr>
         <p:spPr>
           <a:xfrm>
-            <a:off x="457200" y="1600200"/>
-            <a:ext cx="8229600" cy="4526100"/>
+            <a:off x="457200" y="1470530"/>
+            <a:ext cx="8229600" cy="1402500"/>
           </a:xfrm>
           <a:prstGeom prst="rect">
             <a:avLst/>
@@ -16417,7 +16908,7 @@
           <a:p>
             <a:pPr indent="0" lvl="0" marL="0" rtl="0" algn="l">
               <a:lnSpc>
-                <a:spcPct val="100000"/>
+                <a:spcPct val="150000"/>
               </a:lnSpc>
               <a:spcBef>
                 <a:spcPts val="0"/>
@@ -16432,19 +16923,19 @@
               <a:buNone/>
             </a:pPr>
             <a:r>
-              <a:rPr b="1" lang="en-US" sz="2000"/>
+              <a:rPr b="1" lang="en-US" sz="2100"/>
               <a:t>1. Single-surface tools dominate the field.</a:t>
             </a:r>
             <a:r>
-              <a:rPr lang="en-US" sz="2000"/>
+              <a:rPr lang="en-US" sz="2100"/>
               <a:t> Conjunctival pallor detection, nail-based anemia/clubbing classifiers, and oral cavity OSCC screeners each work on one body surface only. None combine surfaces.</a:t>
             </a:r>
-            <a:endParaRPr sz="2000"/>
+            <a:endParaRPr sz="2100"/>
           </a:p>
           <a:p>
-            <a:pPr indent="0" lvl="0" marL="0" rtl="0" algn="l">
-              <a:lnSpc>
-                <a:spcPct val="100000"/>
+            <a:pPr indent="-139700" lvl="0" marL="342900" rtl="0" algn="l">
+              <a:lnSpc>
+                <a:spcPct val="150000"/>
               </a:lnSpc>
               <a:spcBef>
                 <a:spcPts val="0"/>
@@ -16461,89 +16952,167 @@
             <a:r>
               <a:t/>
             </a:r>
-            <a:endParaRPr sz="2000"/>
-          </a:p>
-          <a:p>
-            <a:pPr indent="0" lvl="0" marL="0" rtl="0" algn="l">
-              <a:lnSpc>
-                <a:spcPct val="115000"/>
-              </a:lnSpc>
-              <a:spcBef>
-                <a:spcPts val="0"/>
-              </a:spcBef>
-              <a:spcAft>
-                <a:spcPts val="0"/>
-              </a:spcAft>
-              <a:buClr>
-                <a:schemeClr val="dk1"/>
-              </a:buClr>
-              <a:buSzPts val="1100"/>
-              <a:buFont typeface="Arial"/>
-              <a:buNone/>
-            </a:pPr>
-            <a:r>
-              <a:rPr b="1" lang="en-US" sz="2000"/>
-              <a:t>2. No cross-surface fusion.</a:t>
-            </a:r>
-            <a:r>
-              <a:rPr lang="en-US" sz="2000"/>
-              <a:t> Asare et al. (2023) collected fingernail, palm, and conjunctiva images from the same patients but only compared them, never fused them into one model.</a:t>
-            </a:r>
-            <a:endParaRPr sz="2000"/>
-          </a:p>
-          <a:p>
-            <a:pPr indent="0" lvl="0" marL="0" rtl="0" algn="l">
-              <a:lnSpc>
-                <a:spcPct val="115000"/>
-              </a:lnSpc>
-              <a:spcBef>
-                <a:spcPts val="1200"/>
-              </a:spcBef>
-              <a:spcAft>
-                <a:spcPts val="0"/>
-              </a:spcAft>
-              <a:buClr>
-                <a:schemeClr val="dk1"/>
-              </a:buClr>
-              <a:buSzPts val="1100"/>
-              <a:buFont typeface="Arial"/>
-              <a:buNone/>
-            </a:pPr>
-            <a:r>
-              <a:rPr b="1" lang="en-US" sz="2000"/>
-              <a:t>3. Fusion exists, but needs dedicated hardware.</a:t>
-            </a:r>
-            <a:r>
-              <a:rPr lang="en-US" sz="2000"/>
-              <a:t> iMES (Ye et al., 2026) fuses face, tongue, and pulse for 9 diseases at 92%+ accuracy, but requires a purpose-built capture device, not a smartphone.</a:t>
-            </a:r>
-            <a:endParaRPr sz="2000"/>
-          </a:p>
-          <a:p>
-            <a:pPr indent="-139700" lvl="0" marL="342900" rtl="0" algn="l">
-              <a:lnSpc>
-                <a:spcPct val="100000"/>
-              </a:lnSpc>
-              <a:spcBef>
-                <a:spcPts val="1200"/>
-              </a:spcBef>
-              <a:spcAft>
-                <a:spcPts val="0"/>
-              </a:spcAft>
-              <a:buClr>
-                <a:schemeClr val="dk1"/>
-              </a:buClr>
-              <a:buSzPts val="3200"/>
-              <a:buNone/>
-            </a:pPr>
-            <a:r>
-              <a:t/>
-            </a:r>
-            <a:endParaRPr sz="1100">
+            <a:endParaRPr sz="1200">
               <a:latin typeface="Arial"/>
               <a:ea typeface="Arial"/>
               <a:cs typeface="Arial"/>
               <a:sym typeface="Arial"/>
+            </a:endParaRPr>
+          </a:p>
+        </p:txBody>
+      </p:sp>
+      <p:sp>
+        <p:nvSpPr>
+          <p:cNvPr id="149" name="Google Shape;149;p22"/>
+          <p:cNvSpPr txBox="1"/>
+          <p:nvPr/>
+        </p:nvSpPr>
+        <p:spPr>
+          <a:xfrm>
+            <a:off x="478325" y="2944900"/>
+            <a:ext cx="8208600" cy="1383000"/>
+          </a:xfrm>
+          <a:prstGeom prst="rect">
+            <a:avLst/>
+          </a:prstGeom>
+          <a:noFill/>
+          <a:ln>
+            <a:noFill/>
+          </a:ln>
+        </p:spPr>
+        <p:txBody>
+          <a:bodyPr anchorCtr="0" anchor="t" bIns="91425" lIns="91425" spcFirstLastPara="1" rIns="91425" wrap="square" tIns="91425">
+            <a:noAutofit/>
+          </a:bodyPr>
+          <a:lstStyle/>
+          <a:p>
+            <a:pPr indent="0" lvl="0" marL="0" rtl="0" algn="l">
+              <a:lnSpc>
+                <a:spcPct val="150000"/>
+              </a:lnSpc>
+              <a:spcBef>
+                <a:spcPts val="0"/>
+              </a:spcBef>
+              <a:spcAft>
+                <a:spcPts val="1200"/>
+              </a:spcAft>
+              <a:buClr>
+                <a:schemeClr val="dk1"/>
+              </a:buClr>
+              <a:buSzPts val="1100"/>
+              <a:buFont typeface="Arial"/>
+              <a:buNone/>
+            </a:pPr>
+            <a:r>
+              <a:rPr b="1" lang="en-US" sz="2100">
+                <a:solidFill>
+                  <a:schemeClr val="dk1"/>
+                </a:solidFill>
+                <a:latin typeface="Calibri"/>
+                <a:ea typeface="Calibri"/>
+                <a:cs typeface="Calibri"/>
+                <a:sym typeface="Calibri"/>
+              </a:rPr>
+              <a:t>2. No cross-surface fusion.</a:t>
+            </a:r>
+            <a:r>
+              <a:rPr lang="en-US" sz="2100">
+                <a:solidFill>
+                  <a:schemeClr val="dk1"/>
+                </a:solidFill>
+                <a:latin typeface="Calibri"/>
+                <a:ea typeface="Calibri"/>
+                <a:cs typeface="Calibri"/>
+                <a:sym typeface="Calibri"/>
+              </a:rPr>
+              <a:t> Asare et al. (2023) collected fingernail, palm, and conjunctiva images from the same patients but only compared them, never fused them into one model.</a:t>
+            </a:r>
+            <a:endParaRPr sz="3200">
+              <a:solidFill>
+                <a:schemeClr val="dk1"/>
+              </a:solidFill>
+              <a:latin typeface="Calibri"/>
+              <a:ea typeface="Calibri"/>
+              <a:cs typeface="Calibri"/>
+              <a:sym typeface="Calibri"/>
+            </a:endParaRPr>
+          </a:p>
+        </p:txBody>
+      </p:sp>
+      <p:sp>
+        <p:nvSpPr>
+          <p:cNvPr id="150" name="Google Shape;150;p22"/>
+          <p:cNvSpPr txBox="1"/>
+          <p:nvPr/>
+        </p:nvSpPr>
+        <p:spPr>
+          <a:xfrm>
+            <a:off x="492750" y="4428875"/>
+            <a:ext cx="8229600" cy="1311000"/>
+          </a:xfrm>
+          <a:prstGeom prst="rect">
+            <a:avLst/>
+          </a:prstGeom>
+          <a:noFill/>
+          <a:ln>
+            <a:noFill/>
+          </a:ln>
+        </p:spPr>
+        <p:txBody>
+          <a:bodyPr anchorCtr="0" anchor="t" bIns="91425" lIns="91425" spcFirstLastPara="1" rIns="91425" wrap="square" tIns="91425">
+            <a:noAutofit/>
+          </a:bodyPr>
+          <a:lstStyle/>
+          <a:p>
+            <a:pPr indent="0" lvl="0" marL="0" rtl="0" algn="l">
+              <a:lnSpc>
+                <a:spcPct val="150000"/>
+              </a:lnSpc>
+              <a:spcBef>
+                <a:spcPts val="0"/>
+              </a:spcBef>
+              <a:spcAft>
+                <a:spcPts val="1200"/>
+              </a:spcAft>
+              <a:buClr>
+                <a:schemeClr val="dk1"/>
+              </a:buClr>
+              <a:buSzPts val="1100"/>
+              <a:buFont typeface="Arial"/>
+              <a:buNone/>
+            </a:pPr>
+            <a:r>
+              <a:rPr b="1" lang="en-US" sz="2100">
+                <a:solidFill>
+                  <a:schemeClr val="dk1"/>
+                </a:solidFill>
+                <a:latin typeface="Calibri"/>
+                <a:ea typeface="Calibri"/>
+                <a:cs typeface="Calibri"/>
+                <a:sym typeface="Calibri"/>
+              </a:rPr>
+              <a:t>3. Fusion exists, but needs dedicated hardware.</a:t>
+            </a:r>
+            <a:r>
+              <a:rPr lang="en-US" sz="2100">
+                <a:solidFill>
+                  <a:schemeClr val="dk1"/>
+                </a:solidFill>
+                <a:latin typeface="Calibri"/>
+                <a:ea typeface="Calibri"/>
+                <a:cs typeface="Calibri"/>
+                <a:sym typeface="Calibri"/>
+              </a:rPr>
+              <a:t> iMES (Ye et al., 2026) fuses face, tongue, and pulse for 9 diseases at 92%+ accuracy, but requires a purpose-built capture device, not a smartphone.</a:t>
+            </a:r>
+            <a:endParaRPr sz="3200">
+              <a:solidFill>
+                <a:schemeClr val="dk1"/>
+              </a:solidFill>
+              <a:latin typeface="Calibri"/>
+              <a:ea typeface="Calibri"/>
+              <a:cs typeface="Calibri"/>
+              <a:sym typeface="Calibri"/>
             </a:endParaRPr>
           </a:p>
         </p:txBody>
@@ -16553,6 +17122,195 @@
   <p:clrMapOvr>
     <a:masterClrMapping/>
   </p:clrMapOvr>
+  <p:timing>
+    <p:tnLst>
+      <p:par>
+        <p:cTn dur="indefinite" nodeType="tmRoot" restart="never">
+          <p:childTnLst>
+            <p:seq concurrent="1" nextAc="seek">
+              <p:cTn dur="indefinite" id="2" nodeType="mainSeq">
+                <p:childTnLst>
+                  <p:par>
+                    <p:cTn fill="hold">
+                      <p:stCondLst>
+                        <p:cond delay="indefinite"/>
+                      </p:stCondLst>
+                      <p:childTnLst>
+                        <p:par>
+                          <p:cTn fill="hold">
+                            <p:stCondLst>
+                              <p:cond delay="0"/>
+                            </p:stCondLst>
+                            <p:childTnLst>
+                              <p:par>
+                                <p:cTn fill="hold" nodeType="clickEffect" presetClass="entr" presetID="10" presetSubtype="0">
+                                  <p:stCondLst>
+                                    <p:cond delay="0"/>
+                                  </p:stCondLst>
+                                  <p:childTnLst>
+                                    <p:set>
+                                      <p:cBhvr>
+                                        <p:cTn dur="1" fill="hold">
+                                          <p:stCondLst>
+                                            <p:cond delay="0"/>
+                                          </p:stCondLst>
+                                        </p:cTn>
+                                        <p:tgtEl>
+                                          <p:spTgt spid="148"/>
+                                        </p:tgtEl>
+                                        <p:attrNameLst>
+                                          <p:attrName>style.visibility</p:attrName>
+                                        </p:attrNameLst>
+                                      </p:cBhvr>
+                                      <p:to>
+                                        <p:strVal val="visible"/>
+                                      </p:to>
+                                    </p:set>
+                                    <p:animEffect filter="fade" transition="in">
+                                      <p:cBhvr>
+                                        <p:cTn dur="1000"/>
+                                        <p:tgtEl>
+                                          <p:spTgt spid="148"/>
+                                        </p:tgtEl>
+                                      </p:cBhvr>
+                                    </p:animEffect>
+                                  </p:childTnLst>
+                                </p:cTn>
+                              </p:par>
+                            </p:childTnLst>
+                          </p:cTn>
+                        </p:par>
+                      </p:childTnLst>
+                    </p:cTn>
+                  </p:par>
+                  <p:par>
+                    <p:cTn fill="hold">
+                      <p:stCondLst>
+                        <p:cond delay="indefinite"/>
+                      </p:stCondLst>
+                      <p:childTnLst>
+                        <p:par>
+                          <p:cTn fill="hold">
+                            <p:stCondLst>
+                              <p:cond delay="0"/>
+                            </p:stCondLst>
+                            <p:childTnLst>
+                              <p:par>
+                                <p:cTn fill="hold" nodeType="clickEffect" presetClass="entr" presetID="10" presetSubtype="0">
+                                  <p:stCondLst>
+                                    <p:cond delay="0"/>
+                                  </p:stCondLst>
+                                  <p:childTnLst>
+                                    <p:set>
+                                      <p:cBhvr>
+                                        <p:cTn dur="1" fill="hold">
+                                          <p:stCondLst>
+                                            <p:cond delay="0"/>
+                                          </p:stCondLst>
+                                        </p:cTn>
+                                        <p:tgtEl>
+                                          <p:spTgt spid="149"/>
+                                        </p:tgtEl>
+                                        <p:attrNameLst>
+                                          <p:attrName>style.visibility</p:attrName>
+                                        </p:attrNameLst>
+                                      </p:cBhvr>
+                                      <p:to>
+                                        <p:strVal val="visible"/>
+                                      </p:to>
+                                    </p:set>
+                                    <p:animEffect filter="fade" transition="in">
+                                      <p:cBhvr>
+                                        <p:cTn dur="1000"/>
+                                        <p:tgtEl>
+                                          <p:spTgt spid="149"/>
+                                        </p:tgtEl>
+                                      </p:cBhvr>
+                                    </p:animEffect>
+                                  </p:childTnLst>
+                                </p:cTn>
+                              </p:par>
+                            </p:childTnLst>
+                          </p:cTn>
+                        </p:par>
+                      </p:childTnLst>
+                    </p:cTn>
+                  </p:par>
+                  <p:par>
+                    <p:cTn fill="hold">
+                      <p:stCondLst>
+                        <p:cond delay="indefinite"/>
+                      </p:stCondLst>
+                      <p:childTnLst>
+                        <p:par>
+                          <p:cTn fill="hold">
+                            <p:stCondLst>
+                              <p:cond delay="0"/>
+                            </p:stCondLst>
+                            <p:childTnLst>
+                              <p:par>
+                                <p:cTn fill="hold" nodeType="clickEffect" presetClass="entr" presetID="10" presetSubtype="0">
+                                  <p:stCondLst>
+                                    <p:cond delay="0"/>
+                                  </p:stCondLst>
+                                  <p:childTnLst>
+                                    <p:set>
+                                      <p:cBhvr>
+                                        <p:cTn dur="1" fill="hold">
+                                          <p:stCondLst>
+                                            <p:cond delay="0"/>
+                                          </p:stCondLst>
+                                        </p:cTn>
+                                        <p:tgtEl>
+                                          <p:spTgt spid="150"/>
+                                        </p:tgtEl>
+                                        <p:attrNameLst>
+                                          <p:attrName>style.visibility</p:attrName>
+                                        </p:attrNameLst>
+                                      </p:cBhvr>
+                                      <p:to>
+                                        <p:strVal val="visible"/>
+                                      </p:to>
+                                    </p:set>
+                                    <p:animEffect filter="fade" transition="in">
+                                      <p:cBhvr>
+                                        <p:cTn dur="1000"/>
+                                        <p:tgtEl>
+                                          <p:spTgt spid="150"/>
+                                        </p:tgtEl>
+                                      </p:cBhvr>
+                                    </p:animEffect>
+                                  </p:childTnLst>
+                                </p:cTn>
+                              </p:par>
+                            </p:childTnLst>
+                          </p:cTn>
+                        </p:par>
+                      </p:childTnLst>
+                    </p:cTn>
+                  </p:par>
+                </p:childTnLst>
+              </p:cTn>
+              <p:prevCondLst>
+                <p:cond evt="onPrev">
+                  <p:tgtEl>
+                    <p:sldTgt/>
+                  </p:tgtEl>
+                </p:cond>
+              </p:prevCondLst>
+              <p:nextCondLst>
+                <p:cond evt="onNext">
+                  <p:tgtEl>
+                    <p:sldTgt/>
+                  </p:tgtEl>
+                </p:cond>
+              </p:nextCondLst>
+            </p:seq>
+          </p:childTnLst>
+        </p:cTn>
+      </p:par>
+    </p:tnLst>
+  </p:timing>
 </p:sld>
 </file>
 
@@ -16561,7 +17319,7 @@
   <p:cSld>
     <p:spTree>
       <p:nvGrpSpPr>
-        <p:cNvPr id="152" name="Shape 152"/>
+        <p:cNvPr id="154" name="Shape 154"/>
         <p:cNvGrpSpPr/>
         <p:nvPr/>
       </p:nvGrpSpPr>
@@ -16575,7 +17333,7 @@
       </p:grpSpPr>
       <p:sp>
         <p:nvSpPr>
-          <p:cNvPr id="153" name="Google Shape;153;p23"/>
+          <p:cNvPr id="155" name="Google Shape;155;p23"/>
           <p:cNvSpPr txBox="1"/>
           <p:nvPr>
             <p:ph type="title"/>
@@ -16601,6 +17359,9 @@
           <a:lstStyle/>
           <a:p>
             <a:pPr indent="0" lvl="0" marL="0" rtl="0" algn="ctr">
+              <a:lnSpc>
+                <a:spcPct val="150000"/>
+              </a:lnSpc>
               <a:spcBef>
                 <a:spcPts val="0"/>
               </a:spcBef>
@@ -16611,16 +17372,24 @@
               <a:buNone/>
             </a:pPr>
             <a:r>
-              <a:rPr b="1" lang="en-US" sz="4000"/>
+              <a:rPr b="1" lang="en-US" sz="4000">
+                <a:solidFill>
+                  <a:srgbClr val="0B3D59"/>
+                </a:solidFill>
+              </a:rPr>
               <a:t>Gap Analysis</a:t>
             </a:r>
-            <a:endParaRPr/>
+            <a:endParaRPr b="1" sz="4000">
+              <a:solidFill>
+                <a:srgbClr val="0B3D59"/>
+              </a:solidFill>
+            </a:endParaRPr>
           </a:p>
         </p:txBody>
       </p:sp>
       <p:sp>
         <p:nvSpPr>
-          <p:cNvPr id="154" name="Google Shape;154;p23"/>
+          <p:cNvPr id="156" name="Google Shape;156;p23"/>
           <p:cNvSpPr txBox="1"/>
           <p:nvPr>
             <p:ph idx="1" type="body"/>
@@ -16628,8 +17397,8 @@
         </p:nvSpPr>
         <p:spPr>
           <a:xfrm>
-            <a:off x="457200" y="1600200"/>
-            <a:ext cx="8229600" cy="4526100"/>
+            <a:off x="457200" y="1470527"/>
+            <a:ext cx="8229600" cy="890400"/>
           </a:xfrm>
           <a:prstGeom prst="rect">
             <a:avLst/>
@@ -16647,7 +17416,7 @@
           <a:p>
             <a:pPr indent="0" lvl="0" marL="0" rtl="0" algn="l">
               <a:lnSpc>
-                <a:spcPct val="115000"/>
+                <a:spcPct val="150000"/>
               </a:lnSpc>
               <a:spcBef>
                 <a:spcPts val="1200"/>
@@ -16663,76 +17432,271 @@
             </a:pPr>
             <a:r>
               <a:rPr b="1" lang="en-US" sz="2000"/>
-              <a:t>4</a:t>
-            </a:r>
-            <a:r>
-              <a:rPr b="1" lang="en-US" sz="2000"/>
-              <a:t>. No uncertainty output.</a:t>
+              <a:t>4. No uncertainty output.</a:t>
             </a:r>
             <a:r>
               <a:rPr lang="en-US" sz="2000"/>
               <a:t> iMES's CCA-based fusion and Asare et al.'s classifiers all return a bare label or SHAP heatmap, never a confidence score.</a:t>
             </a:r>
-            <a:endParaRPr sz="2000"/>
+            <a:endParaRPr b="1" sz="2100"/>
+          </a:p>
+          <a:p>
+            <a:pPr indent="-139700" lvl="0" marL="342900" rtl="0" algn="l">
+              <a:lnSpc>
+                <a:spcPct val="150000"/>
+              </a:lnSpc>
+              <a:spcBef>
+                <a:spcPts val="1200"/>
+              </a:spcBef>
+              <a:spcAft>
+                <a:spcPts val="0"/>
+              </a:spcAft>
+              <a:buClr>
+                <a:schemeClr val="dk1"/>
+              </a:buClr>
+              <a:buSzPts val="3200"/>
+              <a:buNone/>
+            </a:pPr>
+            <a:r>
+              <a:t/>
+            </a:r>
+            <a:endParaRPr sz="1200">
+              <a:latin typeface="Arial"/>
+              <a:ea typeface="Arial"/>
+              <a:cs typeface="Arial"/>
+              <a:sym typeface="Arial"/>
+            </a:endParaRPr>
+          </a:p>
+        </p:txBody>
+      </p:sp>
+      <p:sp>
+        <p:nvSpPr>
+          <p:cNvPr id="157" name="Google Shape;157;p23"/>
+          <p:cNvSpPr txBox="1"/>
+          <p:nvPr/>
+        </p:nvSpPr>
+        <p:spPr>
+          <a:xfrm>
+            <a:off x="478325" y="2329774"/>
+            <a:ext cx="8208600" cy="1383000"/>
+          </a:xfrm>
+          <a:prstGeom prst="rect">
+            <a:avLst/>
+          </a:prstGeom>
+          <a:noFill/>
+          <a:ln>
+            <a:noFill/>
+          </a:ln>
+        </p:spPr>
+        <p:txBody>
+          <a:bodyPr anchorCtr="0" anchor="t" bIns="91425" lIns="91425" spcFirstLastPara="1" rIns="91425" wrap="square" tIns="91425">
+            <a:noAutofit/>
+          </a:bodyPr>
+          <a:lstStyle/>
+          <a:p>
+            <a:pPr indent="0" lvl="0" marL="0" rtl="0" algn="l">
+              <a:lnSpc>
+                <a:spcPct val="150000"/>
+              </a:lnSpc>
+              <a:spcBef>
+                <a:spcPts val="1200"/>
+              </a:spcBef>
+              <a:spcAft>
+                <a:spcPts val="0"/>
+              </a:spcAft>
+              <a:buNone/>
+            </a:pPr>
+            <a:r>
+              <a:rPr b="1" lang="en-US" sz="2000">
+                <a:solidFill>
+                  <a:schemeClr val="dk1"/>
+                </a:solidFill>
+                <a:latin typeface="Calibri"/>
+                <a:ea typeface="Calibri"/>
+                <a:cs typeface="Calibri"/>
+                <a:sym typeface="Calibri"/>
+              </a:rPr>
+              <a:t>5. Severe class imbalance, unaddressed.</a:t>
+            </a:r>
+            <a:r>
+              <a:rPr lang="en-US" sz="2000">
+                <a:solidFill>
+                  <a:schemeClr val="dk1"/>
+                </a:solidFill>
+                <a:latin typeface="Calibri"/>
+                <a:ea typeface="Calibri"/>
+                <a:cs typeface="Calibri"/>
+                <a:sym typeface="Calibri"/>
+              </a:rPr>
+              <a:t> Rabinovici-Cohen et al. (2024) report OSCC accuracy on datasets where positive samples (129) are dwarfed by negatives (700 to 1,400), with no stated imbalance strategy.</a:t>
+            </a:r>
+            <a:endParaRPr sz="2000">
+              <a:solidFill>
+                <a:schemeClr val="dk1"/>
+              </a:solidFill>
+              <a:latin typeface="Calibri"/>
+              <a:ea typeface="Calibri"/>
+              <a:cs typeface="Calibri"/>
+              <a:sym typeface="Calibri"/>
+            </a:endParaRPr>
           </a:p>
           <a:p>
             <a:pPr indent="0" lvl="0" marL="0" rtl="0" algn="l">
               <a:lnSpc>
-                <a:spcPct val="115000"/>
+                <a:spcPct val="150000"/>
               </a:lnSpc>
               <a:spcBef>
                 <a:spcPts val="1200"/>
               </a:spcBef>
               <a:spcAft>
-                <a:spcPts val="0"/>
-              </a:spcAft>
-              <a:buClr>
-                <a:schemeClr val="dk1"/>
-              </a:buClr>
-              <a:buSzPts val="1100"/>
+                <a:spcPts val="1200"/>
+              </a:spcAft>
               <a:buNone/>
             </a:pPr>
             <a:r>
-              <a:rPr b="1" lang="en-US" sz="2000"/>
-              <a:t>5. Severe class imbalance, unaddressed.</a:t>
+              <a:t/>
+            </a:r>
+            <a:endParaRPr b="1" sz="2100">
+              <a:solidFill>
+                <a:schemeClr val="dk1"/>
+              </a:solidFill>
+              <a:latin typeface="Calibri"/>
+              <a:ea typeface="Calibri"/>
+              <a:cs typeface="Calibri"/>
+              <a:sym typeface="Calibri"/>
+            </a:endParaRPr>
+          </a:p>
+        </p:txBody>
+      </p:sp>
+      <p:sp>
+        <p:nvSpPr>
+          <p:cNvPr id="158" name="Google Shape;158;p23"/>
+          <p:cNvSpPr txBox="1"/>
+          <p:nvPr/>
+        </p:nvSpPr>
+        <p:spPr>
+          <a:xfrm>
+            <a:off x="479662" y="3695959"/>
+            <a:ext cx="8229600" cy="1311000"/>
+          </a:xfrm>
+          <a:prstGeom prst="rect">
+            <a:avLst/>
+          </a:prstGeom>
+          <a:noFill/>
+          <a:ln>
+            <a:noFill/>
+          </a:ln>
+        </p:spPr>
+        <p:txBody>
+          <a:bodyPr anchorCtr="0" anchor="t" bIns="91425" lIns="91425" spcFirstLastPara="1" rIns="91425" wrap="square" tIns="91425">
+            <a:noAutofit/>
+          </a:bodyPr>
+          <a:lstStyle/>
+          <a:p>
+            <a:pPr indent="0" lvl="0" marL="0" rtl="0" algn="l">
+              <a:lnSpc>
+                <a:spcPct val="150000"/>
+              </a:lnSpc>
+              <a:spcBef>
+                <a:spcPts val="1200"/>
+              </a:spcBef>
+              <a:spcAft>
+                <a:spcPts val="0"/>
+              </a:spcAft>
+              <a:buNone/>
+            </a:pPr>
+            <a:r>
+              <a:rPr b="1" lang="en-US" sz="2000">
+                <a:solidFill>
+                  <a:schemeClr val="dk1"/>
+                </a:solidFill>
+                <a:latin typeface="Calibri"/>
+                <a:ea typeface="Calibri"/>
+                <a:cs typeface="Calibri"/>
+                <a:sym typeface="Calibri"/>
+              </a:rPr>
+              <a:t>6. No missing-modality robustness.</a:t>
             </a:r>
             <a:r>
-              <a:rPr lang="en-US" sz="2000"/>
-              <a:t> Rabinovici-Cohen et al. (2024) report OSCC accuracy on datasets where positive samples (129) are dwarfed by negatives (700 to 1,400), with no stated imbalance strategy.</a:t>
+              <a:rPr lang="en-US" sz="2000">
+                <a:solidFill>
+                  <a:schemeClr val="dk1"/>
+                </a:solidFill>
+                <a:latin typeface="Calibri"/>
+                <a:ea typeface="Calibri"/>
+                <a:cs typeface="Calibri"/>
+                <a:sym typeface="Calibri"/>
+              </a:rPr>
+              <a:t> Every reviewed system (Asare et al., iMES, single-surface classifiers) assumes all inputs are always present and well-captured.</a:t>
             </a:r>
-            <a:endParaRPr sz="2000"/>
+            <a:endParaRPr sz="2000">
+              <a:solidFill>
+                <a:schemeClr val="dk1"/>
+              </a:solidFill>
+              <a:latin typeface="Calibri"/>
+              <a:ea typeface="Calibri"/>
+              <a:cs typeface="Calibri"/>
+              <a:sym typeface="Calibri"/>
+            </a:endParaRPr>
           </a:p>
           <a:p>
             <a:pPr indent="0" lvl="0" marL="0" rtl="0" algn="l">
               <a:lnSpc>
-                <a:spcPct val="115000"/>
+                <a:spcPct val="150000"/>
               </a:lnSpc>
               <a:spcBef>
                 <a:spcPts val="1200"/>
               </a:spcBef>
               <a:spcAft>
-                <a:spcPts val="0"/>
-              </a:spcAft>
-              <a:buClr>
-                <a:schemeClr val="dk1"/>
-              </a:buClr>
-              <a:buSzPts val="1100"/>
+                <a:spcPts val="1200"/>
+              </a:spcAft>
               <a:buNone/>
             </a:pPr>
             <a:r>
-              <a:rPr b="1" lang="en-US" sz="2000"/>
-              <a:t>6. No missing-modality robustness.</a:t>
+              <a:t/>
             </a:r>
-            <a:r>
-              <a:rPr lang="en-US" sz="2000"/>
-              <a:t> Every reviewed system (Asare et al., iMES, single-surface classifiers) assumes all inputs are always present and well-captured.</a:t>
-            </a:r>
-            <a:endParaRPr sz="2000"/>
+            <a:endParaRPr b="1" sz="2100">
+              <a:solidFill>
+                <a:schemeClr val="dk1"/>
+              </a:solidFill>
+              <a:latin typeface="Calibri"/>
+              <a:ea typeface="Calibri"/>
+              <a:cs typeface="Calibri"/>
+              <a:sym typeface="Calibri"/>
+            </a:endParaRPr>
           </a:p>
+        </p:txBody>
+      </p:sp>
+      <p:sp>
+        <p:nvSpPr>
+          <p:cNvPr id="159" name="Google Shape;159;p23"/>
+          <p:cNvSpPr txBox="1"/>
+          <p:nvPr>
+            <p:ph idx="1" type="body"/>
+          </p:nvPr>
+        </p:nvSpPr>
+        <p:spPr>
+          <a:xfrm>
+            <a:off x="457200" y="5055376"/>
+            <a:ext cx="8229600" cy="941400"/>
+          </a:xfrm>
+          <a:prstGeom prst="rect">
+            <a:avLst/>
+          </a:prstGeom>
+          <a:noFill/>
+          <a:ln>
+            <a:noFill/>
+          </a:ln>
+        </p:spPr>
+        <p:txBody>
+          <a:bodyPr anchorCtr="0" anchor="t" bIns="45700" lIns="91425" spcFirstLastPara="1" rIns="91425" wrap="square" tIns="45700">
+            <a:noAutofit/>
+          </a:bodyPr>
+          <a:lstStyle/>
           <a:p>
             <a:pPr indent="0" lvl="0" marL="0" rtl="0" algn="l">
               <a:lnSpc>
-                <a:spcPct val="115000"/>
+                <a:spcPct val="150000"/>
               </a:lnSpc>
               <a:spcBef>
                 <a:spcPts val="1200"/>
@@ -16759,7 +17723,7 @@
           <a:p>
             <a:pPr indent="-139700" lvl="0" marL="342900" rtl="0" algn="l">
               <a:lnSpc>
-                <a:spcPct val="100000"/>
+                <a:spcPct val="150000"/>
               </a:lnSpc>
               <a:spcBef>
                 <a:spcPts val="1200"/>
@@ -16785,6 +17749,248 @@
   <p:clrMapOvr>
     <a:masterClrMapping/>
   </p:clrMapOvr>
+  <p:timing>
+    <p:tnLst>
+      <p:par>
+        <p:cTn dur="indefinite" nodeType="tmRoot" restart="never">
+          <p:childTnLst>
+            <p:seq concurrent="1" nextAc="seek">
+              <p:cTn dur="indefinite" id="2" nodeType="mainSeq">
+                <p:childTnLst>
+                  <p:par>
+                    <p:cTn fill="hold">
+                      <p:stCondLst>
+                        <p:cond delay="indefinite"/>
+                      </p:stCondLst>
+                      <p:childTnLst>
+                        <p:par>
+                          <p:cTn fill="hold">
+                            <p:stCondLst>
+                              <p:cond delay="0"/>
+                            </p:stCondLst>
+                            <p:childTnLst>
+                              <p:par>
+                                <p:cTn fill="hold" nodeType="clickEffect" presetClass="entr" presetID="10" presetSubtype="0">
+                                  <p:stCondLst>
+                                    <p:cond delay="0"/>
+                                  </p:stCondLst>
+                                  <p:childTnLst>
+                                    <p:set>
+                                      <p:cBhvr>
+                                        <p:cTn dur="1" fill="hold">
+                                          <p:stCondLst>
+                                            <p:cond delay="0"/>
+                                          </p:stCondLst>
+                                        </p:cTn>
+                                        <p:tgtEl>
+                                          <p:spTgt spid="156"/>
+                                        </p:tgtEl>
+                                        <p:attrNameLst>
+                                          <p:attrName>style.visibility</p:attrName>
+                                        </p:attrNameLst>
+                                      </p:cBhvr>
+                                      <p:to>
+                                        <p:strVal val="visible"/>
+                                      </p:to>
+                                    </p:set>
+                                    <p:animEffect filter="fade" transition="in">
+                                      <p:cBhvr>
+                                        <p:cTn dur="1000"/>
+                                        <p:tgtEl>
+                                          <p:spTgt spid="156"/>
+                                        </p:tgtEl>
+                                      </p:cBhvr>
+                                    </p:animEffect>
+                                  </p:childTnLst>
+                                </p:cTn>
+                              </p:par>
+                            </p:childTnLst>
+                          </p:cTn>
+                        </p:par>
+                      </p:childTnLst>
+                    </p:cTn>
+                  </p:par>
+                  <p:par>
+                    <p:cTn fill="hold">
+                      <p:stCondLst>
+                        <p:cond delay="indefinite"/>
+                      </p:stCondLst>
+                      <p:childTnLst>
+                        <p:par>
+                          <p:cTn fill="hold">
+                            <p:stCondLst>
+                              <p:cond delay="0"/>
+                            </p:stCondLst>
+                            <p:childTnLst>
+                              <p:par>
+                                <p:cTn fill="hold" nodeType="clickEffect" presetClass="entr" presetID="10" presetSubtype="0">
+                                  <p:stCondLst>
+                                    <p:cond delay="0"/>
+                                  </p:stCondLst>
+                                  <p:childTnLst>
+                                    <p:set>
+                                      <p:cBhvr>
+                                        <p:cTn dur="1" fill="hold">
+                                          <p:stCondLst>
+                                            <p:cond delay="0"/>
+                                          </p:stCondLst>
+                                        </p:cTn>
+                                        <p:tgtEl>
+                                          <p:spTgt spid="157"/>
+                                        </p:tgtEl>
+                                        <p:attrNameLst>
+                                          <p:attrName>style.visibility</p:attrName>
+                                        </p:attrNameLst>
+                                      </p:cBhvr>
+                                      <p:to>
+                                        <p:strVal val="visible"/>
+                                      </p:to>
+                                    </p:set>
+                                    <p:animEffect filter="fade" transition="in">
+                                      <p:cBhvr>
+                                        <p:cTn dur="1000"/>
+                                        <p:tgtEl>
+                                          <p:spTgt spid="157"/>
+                                        </p:tgtEl>
+                                      </p:cBhvr>
+                                    </p:animEffect>
+                                  </p:childTnLst>
+                                </p:cTn>
+                              </p:par>
+                            </p:childTnLst>
+                          </p:cTn>
+                        </p:par>
+                      </p:childTnLst>
+                    </p:cTn>
+                  </p:par>
+                  <p:par>
+                    <p:cTn fill="hold">
+                      <p:stCondLst>
+                        <p:cond delay="indefinite"/>
+                      </p:stCondLst>
+                      <p:childTnLst>
+                        <p:par>
+                          <p:cTn fill="hold">
+                            <p:stCondLst>
+                              <p:cond delay="0"/>
+                            </p:stCondLst>
+                            <p:childTnLst>
+                              <p:par>
+                                <p:cTn fill="hold" nodeType="clickEffect" presetClass="entr" presetID="10" presetSubtype="0">
+                                  <p:stCondLst>
+                                    <p:cond delay="0"/>
+                                  </p:stCondLst>
+                                  <p:childTnLst>
+                                    <p:set>
+                                      <p:cBhvr>
+                                        <p:cTn dur="1" fill="hold">
+                                          <p:stCondLst>
+                                            <p:cond delay="0"/>
+                                          </p:stCondLst>
+                                        </p:cTn>
+                                        <p:tgtEl>
+                                          <p:spTgt spid="158"/>
+                                        </p:tgtEl>
+                                        <p:attrNameLst>
+                                          <p:attrName>style.visibility</p:attrName>
+                                        </p:attrNameLst>
+                                      </p:cBhvr>
+                                      <p:to>
+                                        <p:strVal val="visible"/>
+                                      </p:to>
+                                    </p:set>
+                                    <p:animEffect filter="fade" transition="in">
+                                      <p:cBhvr>
+                                        <p:cTn dur="1000"/>
+                                        <p:tgtEl>
+                                          <p:spTgt spid="158"/>
+                                        </p:tgtEl>
+                                      </p:cBhvr>
+                                    </p:animEffect>
+                                  </p:childTnLst>
+                                </p:cTn>
+                              </p:par>
+                            </p:childTnLst>
+                          </p:cTn>
+                        </p:par>
+                      </p:childTnLst>
+                    </p:cTn>
+                  </p:par>
+                  <p:par>
+                    <p:cTn fill="hold">
+                      <p:stCondLst>
+                        <p:cond delay="indefinite"/>
+                      </p:stCondLst>
+                      <p:childTnLst>
+                        <p:par>
+                          <p:cTn fill="hold">
+                            <p:stCondLst>
+                              <p:cond delay="0"/>
+                            </p:stCondLst>
+                            <p:childTnLst>
+                              <p:par>
+                                <p:cTn fill="hold" nodeType="clickEffect" presetClass="entr" presetID="10" presetSubtype="0">
+                                  <p:stCondLst>
+                                    <p:cond delay="0"/>
+                                  </p:stCondLst>
+                                  <p:childTnLst>
+                                    <p:set>
+                                      <p:cBhvr>
+                                        <p:cTn dur="1" fill="hold">
+                                          <p:stCondLst>
+                                            <p:cond delay="0"/>
+                                          </p:stCondLst>
+                                        </p:cTn>
+                                        <p:tgtEl>
+                                          <p:spTgt spid="159"/>
+                                        </p:tgtEl>
+                                        <p:attrNameLst>
+                                          <p:attrName>style.visibility</p:attrName>
+                                        </p:attrNameLst>
+                                      </p:cBhvr>
+                                      <p:to>
+                                        <p:strVal val="visible"/>
+                                      </p:to>
+                                    </p:set>
+                                    <p:animEffect filter="fade" transition="in">
+                                      <p:cBhvr>
+                                        <p:cTn dur="1000"/>
+                                        <p:tgtEl>
+                                          <p:spTgt spid="159"/>
+                                        </p:tgtEl>
+                                      </p:cBhvr>
+                                    </p:animEffect>
+                                  </p:childTnLst>
+                                </p:cTn>
+                              </p:par>
+                            </p:childTnLst>
+                          </p:cTn>
+                        </p:par>
+                      </p:childTnLst>
+                    </p:cTn>
+                  </p:par>
+                </p:childTnLst>
+              </p:cTn>
+              <p:prevCondLst>
+                <p:cond evt="onPrev">
+                  <p:tgtEl>
+                    <p:sldTgt/>
+                  </p:tgtEl>
+                </p:cond>
+              </p:prevCondLst>
+              <p:nextCondLst>
+                <p:cond evt="onNext">
+                  <p:tgtEl>
+                    <p:sldTgt/>
+                  </p:tgtEl>
+                </p:cond>
+              </p:nextCondLst>
+            </p:seq>
+          </p:childTnLst>
+        </p:cTn>
+      </p:par>
+    </p:tnLst>
+  </p:timing>
 </p:sld>
 </file>
 
@@ -16793,7 +17999,7 @@
   <p:cSld>
     <p:spTree>
       <p:nvGrpSpPr>
-        <p:cNvPr id="158" name="Shape 158"/>
+        <p:cNvPr id="163" name="Shape 163"/>
         <p:cNvGrpSpPr/>
         <p:nvPr/>
       </p:nvGrpSpPr>
@@ -16807,7 +18013,7 @@
       </p:grpSpPr>
       <p:sp>
         <p:nvSpPr>
-          <p:cNvPr id="159" name="Google Shape;159;p24"/>
+          <p:cNvPr id="164" name="Google Shape;164;p24"/>
           <p:cNvSpPr txBox="1"/>
           <p:nvPr>
             <p:ph type="title"/>
@@ -16846,16 +18052,24 @@
               <a:buNone/>
             </a:pPr>
             <a:r>
-              <a:rPr lang="en-US"/>
+              <a:rPr lang="en-US">
+                <a:solidFill>
+                  <a:srgbClr val="0B3D59"/>
+                </a:solidFill>
+              </a:rPr>
               <a:t>PROBLEM STATEMENT</a:t>
             </a:r>
-            <a:endParaRPr/>
+            <a:endParaRPr>
+              <a:solidFill>
+                <a:srgbClr val="0B3D59"/>
+              </a:solidFill>
+            </a:endParaRPr>
           </a:p>
         </p:txBody>
       </p:sp>
       <p:sp>
         <p:nvSpPr>
-          <p:cNvPr id="160" name="Google Shape;160;p24"/>
+          <p:cNvPr id="165" name="Google Shape;165;p24"/>
           <p:cNvSpPr txBox="1"/>
           <p:nvPr>
             <p:ph idx="1" type="body"/>
@@ -16917,7 +18131,7 @@
   <p:cSld>
     <p:spTree>
       <p:nvGrpSpPr>
-        <p:cNvPr id="164" name="Shape 164"/>
+        <p:cNvPr id="169" name="Shape 169"/>
         <p:cNvGrpSpPr/>
         <p:nvPr/>
       </p:nvGrpSpPr>
@@ -16931,7 +18145,7 @@
       </p:grpSpPr>
       <p:sp>
         <p:nvSpPr>
-          <p:cNvPr id="165" name="Google Shape;165;p25"/>
+          <p:cNvPr id="170" name="Google Shape;170;p25"/>
           <p:cNvSpPr txBox="1"/>
           <p:nvPr>
             <p:ph type="title"/>
@@ -16967,16 +18181,24 @@
               <a:buNone/>
             </a:pPr>
             <a:r>
-              <a:rPr b="1" lang="en-US" sz="4000"/>
+              <a:rPr b="1" lang="en-US" sz="4000">
+                <a:solidFill>
+                  <a:srgbClr val="0B3D59"/>
+                </a:solidFill>
+              </a:rPr>
               <a:t>PROBLEM STATEMENT</a:t>
             </a:r>
-            <a:endParaRPr/>
+            <a:endParaRPr>
+              <a:solidFill>
+                <a:srgbClr val="0B3D59"/>
+              </a:solidFill>
+            </a:endParaRPr>
           </a:p>
         </p:txBody>
       </p:sp>
       <p:sp>
         <p:nvSpPr>
-          <p:cNvPr id="166" name="Google Shape;166;p25"/>
+          <p:cNvPr id="171" name="Google Shape;171;p25"/>
           <p:cNvSpPr txBox="1"/>
           <p:nvPr/>
         </p:nvSpPr>
@@ -17018,19 +18240,7 @@
                 <a:cs typeface="Calibri"/>
                 <a:sym typeface="Calibri"/>
               </a:rPr>
-              <a:t>  </a:t>
-            </a:r>
-            <a:r>
-              <a:rPr lang="en-US" sz="2400">
-                <a:solidFill>
-                  <a:schemeClr val="dk1"/>
-                </a:solidFill>
-                <a:latin typeface="Calibri"/>
-                <a:ea typeface="Calibri"/>
-                <a:cs typeface="Calibri"/>
-                <a:sym typeface="Calibri"/>
-              </a:rPr>
-              <a:t>Prior work has explored non-invasive screening per body surface: conjunctiva for anemia, nails for anemia/clubbing, oral cavity for OSCC. Asare et al. (2023) directly compared three of these five surfaces but did not fuse them. iMES (2026) fused three different modalities (face, tongue, pulse) using dedicated hardware and classical fusion (CCA), not a smartphone or transformer-based architecture. No system combines five body-surface photographs from a smartphone alone into one transformer-fused, uncertainty-aware, multi-disease screening output.</a:t>
+              <a:t>  Systemic diseases often show early visible signs on body surfaces such as the oral cavity, nails, eyes, tongue, and palms, but no existing tool screens for them together. Current approaches work on a single surface at a time, require dedicated capture hardware, or return a result with no confidence score and no explanation. As a result, patients without easy access to a clinician have no reliable way to self-screen using only a device they already own.</a:t>
             </a:r>
             <a:endParaRPr sz="3200">
               <a:solidFill>
@@ -17057,7 +18267,7 @@
   <p:cSld>
     <p:spTree>
       <p:nvGrpSpPr>
-        <p:cNvPr id="170" name="Shape 170"/>
+        <p:cNvPr id="175" name="Shape 175"/>
         <p:cNvGrpSpPr/>
         <p:nvPr/>
       </p:nvGrpSpPr>
@@ -17071,7 +18281,7 @@
       </p:grpSpPr>
       <p:sp>
         <p:nvSpPr>
-          <p:cNvPr id="171" name="Google Shape;171;p26"/>
+          <p:cNvPr id="176" name="Google Shape;176;p26"/>
           <p:cNvSpPr txBox="1"/>
           <p:nvPr>
             <p:ph type="title"/>
@@ -17110,16 +18320,24 @@
               <a:buNone/>
             </a:pPr>
             <a:r>
-              <a:rPr lang="en-US"/>
+              <a:rPr lang="en-US">
+                <a:solidFill>
+                  <a:srgbClr val="0B3D59"/>
+                </a:solidFill>
+              </a:rPr>
               <a:t>PROPOSED SOLUTION AND METHODOLOGY</a:t>
             </a:r>
-            <a:endParaRPr/>
+            <a:endParaRPr>
+              <a:solidFill>
+                <a:srgbClr val="0B3D59"/>
+              </a:solidFill>
+            </a:endParaRPr>
           </a:p>
         </p:txBody>
       </p:sp>
       <p:sp>
         <p:nvSpPr>
-          <p:cNvPr id="172" name="Google Shape;172;p26"/>
+          <p:cNvPr id="177" name="Google Shape;177;p26"/>
           <p:cNvSpPr txBox="1"/>
           <p:nvPr>
             <p:ph idx="1" type="body"/>
@@ -17181,7 +18399,7 @@
   <p:cSld>
     <p:spTree>
       <p:nvGrpSpPr>
-        <p:cNvPr id="176" name="Shape 176"/>
+        <p:cNvPr id="181" name="Shape 181"/>
         <p:cNvGrpSpPr/>
         <p:nvPr/>
       </p:nvGrpSpPr>
@@ -17195,7 +18413,7 @@
       </p:grpSpPr>
       <p:sp>
         <p:nvSpPr>
-          <p:cNvPr id="177" name="Google Shape;177;p27"/>
+          <p:cNvPr id="182" name="Google Shape;182;p27"/>
           <p:cNvSpPr txBox="1"/>
           <p:nvPr>
             <p:ph type="title"/>
@@ -17221,28 +18439,38 @@
           <a:lstStyle/>
           <a:p>
             <a:pPr indent="0" lvl="0" marL="0" rtl="0" algn="ctr">
-              <a:lnSpc>
-                <a:spcPct val="100000"/>
-              </a:lnSpc>
-              <a:spcBef>
-                <a:spcPts val="0"/>
-              </a:spcBef>
-              <a:spcAft>
-                <a:spcPts val="0"/>
-              </a:spcAft>
-              <a:buSzPts val="1400"/>
+              <a:spcBef>
+                <a:spcPts val="0"/>
+              </a:spcBef>
+              <a:spcAft>
+                <a:spcPts val="0"/>
+              </a:spcAft>
+              <a:buClr>
+                <a:schemeClr val="dk1"/>
+              </a:buClr>
+              <a:buSzPts val="1400"/>
+              <a:buFont typeface="Arial"/>
               <a:buNone/>
             </a:pPr>
             <a:r>
-              <a:t/>
+              <a:rPr b="1" lang="en-US" sz="4000">
+                <a:solidFill>
+                  <a:srgbClr val="0B3D59"/>
+                </a:solidFill>
+              </a:rPr>
+              <a:t>PROPOSED SOLUTION</a:t>
             </a:r>
-            <a:endParaRPr/>
+            <a:endParaRPr>
+              <a:solidFill>
+                <a:srgbClr val="0B3D59"/>
+              </a:solidFill>
+            </a:endParaRPr>
           </a:p>
         </p:txBody>
       </p:sp>
       <p:sp>
         <p:nvSpPr>
-          <p:cNvPr id="178" name="Google Shape;178;p27"/>
+          <p:cNvPr id="183" name="Google Shape;183;p27"/>
           <p:cNvSpPr txBox="1"/>
           <p:nvPr>
             <p:ph idx="1" type="body"/>
@@ -17251,7 +18479,7 @@
         <p:spPr>
           <a:xfrm>
             <a:off x="457200" y="1600200"/>
-            <a:ext cx="8229600" cy="4525963"/>
+            <a:ext cx="8229600" cy="768300"/>
           </a:xfrm>
           <a:prstGeom prst="rect">
             <a:avLst/>
@@ -17267,12 +18495,58 @@
           </a:bodyPr>
           <a:lstStyle/>
           <a:p>
-            <a:pPr indent="-139700" lvl="0" marL="342900" rtl="0" algn="l">
-              <a:lnSpc>
-                <a:spcPct val="100000"/>
-              </a:lnSpc>
-              <a:spcBef>
-                <a:spcPts val="0"/>
+            <a:pPr indent="-355600" lvl="0" marL="457200" rtl="0" algn="l">
+              <a:lnSpc>
+                <a:spcPct val="115000"/>
+              </a:lnSpc>
+              <a:spcBef>
+                <a:spcPts val="1200"/>
+              </a:spcBef>
+              <a:spcAft>
+                <a:spcPts val="0"/>
+              </a:spcAft>
+              <a:buSzPts val="2000"/>
+              <a:buChar char="○"/>
+            </a:pPr>
+            <a:r>
+              <a:rPr lang="en-US" sz="2000"/>
+              <a:t>GLANCE captures five smartphone photographs, one per body surface: oral cavity, fingernails, conjunctiva, tongue, and palm.</a:t>
+            </a:r>
+            <a:endParaRPr sz="2000"/>
+          </a:p>
+        </p:txBody>
+      </p:sp>
+      <p:sp>
+        <p:nvSpPr>
+          <p:cNvPr id="184" name="Google Shape;184;p27"/>
+          <p:cNvSpPr txBox="1"/>
+          <p:nvPr/>
+        </p:nvSpPr>
+        <p:spPr>
+          <a:xfrm>
+            <a:off x="449517" y="2325379"/>
+            <a:ext cx="8078700" cy="1143000"/>
+          </a:xfrm>
+          <a:prstGeom prst="rect">
+            <a:avLst/>
+          </a:prstGeom>
+          <a:noFill/>
+          <a:ln>
+            <a:noFill/>
+          </a:ln>
+        </p:spPr>
+        <p:txBody>
+          <a:bodyPr anchorCtr="0" anchor="t" bIns="91425" lIns="91425" spcFirstLastPara="1" rIns="91425" wrap="square" tIns="91425">
+            <a:noAutofit/>
+          </a:bodyPr>
+          <a:lstStyle/>
+          <a:p>
+            <a:pPr indent="-355600" lvl="0" marL="457200" rtl="0" algn="l">
+              <a:lnSpc>
+                <a:spcPct val="115000"/>
+              </a:lnSpc>
+              <a:spcBef>
+                <a:spcPts val="1200"/>
               </a:spcBef>
               <a:spcAft>
                 <a:spcPts val="0"/>
@@ -17280,13 +18554,183 @@
               <a:buClr>
                 <a:schemeClr val="dk1"/>
               </a:buClr>
-              <a:buSzPts val="3200"/>
+              <a:buSzPts val="2000"/>
+              <a:buChar char="○"/>
+            </a:pPr>
+            <a:r>
+              <a:rPr lang="en-US" sz="2000">
+                <a:solidFill>
+                  <a:schemeClr val="dk1"/>
+                </a:solidFill>
+                <a:latin typeface="Calibri"/>
+                <a:ea typeface="Calibri"/>
+                <a:cs typeface="Calibri"/>
+                <a:sym typeface="Calibri"/>
+              </a:rPr>
+              <a:t>Each surface is processed by its own ViT-B/16 encoder. A custom cross-modal attention fusion transformer combines the five encoder outputs into one joint assessment.</a:t>
+            </a:r>
+            <a:endParaRPr sz="2000">
+              <a:solidFill>
+                <a:schemeClr val="dk1"/>
+              </a:solidFill>
+              <a:latin typeface="Calibri"/>
+              <a:ea typeface="Calibri"/>
+              <a:cs typeface="Calibri"/>
+              <a:sym typeface="Calibri"/>
+            </a:endParaRPr>
+          </a:p>
+          <a:p>
+            <a:pPr indent="0" lvl="0" marL="0" rtl="0" algn="l">
+              <a:spcBef>
+                <a:spcPts val="1200"/>
+              </a:spcBef>
+              <a:spcAft>
+                <a:spcPts val="0"/>
+              </a:spcAft>
               <a:buNone/>
             </a:pPr>
             <a:r>
               <a:t/>
             </a:r>
-            <a:endParaRPr/>
+            <a:endParaRPr sz="3200">
+              <a:solidFill>
+                <a:schemeClr val="dk1"/>
+              </a:solidFill>
+              <a:latin typeface="Calibri"/>
+              <a:ea typeface="Calibri"/>
+              <a:cs typeface="Calibri"/>
+              <a:sym typeface="Calibri"/>
+            </a:endParaRPr>
+          </a:p>
+        </p:txBody>
+      </p:sp>
+      <p:sp>
+        <p:nvSpPr>
+          <p:cNvPr id="185" name="Google Shape;185;p27"/>
+          <p:cNvSpPr txBox="1"/>
+          <p:nvPr/>
+        </p:nvSpPr>
+        <p:spPr>
+          <a:xfrm>
+            <a:off x="435104" y="3434769"/>
+            <a:ext cx="7708200" cy="1143000"/>
+          </a:xfrm>
+          <a:prstGeom prst="rect">
+            <a:avLst/>
+          </a:prstGeom>
+          <a:noFill/>
+          <a:ln>
+            <a:noFill/>
+          </a:ln>
+        </p:spPr>
+        <p:txBody>
+          <a:bodyPr anchorCtr="0" anchor="t" bIns="91425" lIns="91425" spcFirstLastPara="1" rIns="91425" wrap="square" tIns="91425">
+            <a:noAutofit/>
+          </a:bodyPr>
+          <a:lstStyle/>
+          <a:p>
+            <a:pPr indent="-355600" lvl="0" marL="457200" rtl="0" algn="l">
+              <a:lnSpc>
+                <a:spcPct val="115000"/>
+              </a:lnSpc>
+              <a:spcBef>
+                <a:spcPts val="1200"/>
+              </a:spcBef>
+              <a:spcAft>
+                <a:spcPts val="0"/>
+              </a:spcAft>
+              <a:buClr>
+                <a:schemeClr val="dk1"/>
+              </a:buClr>
+              <a:buSzPts val="2000"/>
+              <a:buChar char="○"/>
+            </a:pPr>
+            <a:r>
+              <a:rPr lang="en-US" sz="2000">
+                <a:solidFill>
+                  <a:schemeClr val="dk1"/>
+                </a:solidFill>
+                <a:latin typeface="Calibri"/>
+                <a:ea typeface="Calibri"/>
+                <a:cs typeface="Calibri"/>
+                <a:sym typeface="Calibri"/>
+              </a:rPr>
+              <a:t>The system adds three things current approaches lack: a confidence score via Monte Carlo Dropout, an attention-based visual explanation of what drove the result, and robustness when a surface image is missing or low quality.</a:t>
+            </a:r>
+            <a:endParaRPr sz="3200">
+              <a:solidFill>
+                <a:schemeClr val="dk1"/>
+              </a:solidFill>
+              <a:latin typeface="Calibri"/>
+              <a:ea typeface="Calibri"/>
+              <a:cs typeface="Calibri"/>
+              <a:sym typeface="Calibri"/>
+            </a:endParaRPr>
+          </a:p>
+        </p:txBody>
+      </p:sp>
+      <p:sp>
+        <p:nvSpPr>
+          <p:cNvPr id="186" name="Google Shape;186;p27"/>
+          <p:cNvSpPr txBox="1"/>
+          <p:nvPr/>
+        </p:nvSpPr>
+        <p:spPr>
+          <a:xfrm>
+            <a:off x="435109" y="4918742"/>
+            <a:ext cx="7708200" cy="768300"/>
+          </a:xfrm>
+          <a:prstGeom prst="rect">
+            <a:avLst/>
+          </a:prstGeom>
+          <a:noFill/>
+          <a:ln>
+            <a:noFill/>
+          </a:ln>
+        </p:spPr>
+        <p:txBody>
+          <a:bodyPr anchorCtr="0" anchor="t" bIns="91425" lIns="91425" spcFirstLastPara="1" rIns="91425" wrap="square" tIns="91425">
+            <a:noAutofit/>
+          </a:bodyPr>
+          <a:lstStyle/>
+          <a:p>
+            <a:pPr indent="-355600" lvl="0" marL="457200" rtl="0" algn="l">
+              <a:lnSpc>
+                <a:spcPct val="115000"/>
+              </a:lnSpc>
+              <a:spcBef>
+                <a:spcPts val="1200"/>
+              </a:spcBef>
+              <a:spcAft>
+                <a:spcPts val="0"/>
+              </a:spcAft>
+              <a:buClr>
+                <a:schemeClr val="dk1"/>
+              </a:buClr>
+              <a:buSzPts val="2000"/>
+              <a:buChar char="○"/>
+            </a:pPr>
+            <a:r>
+              <a:rPr lang="en-US" sz="2000">
+                <a:solidFill>
+                  <a:schemeClr val="dk1"/>
+                </a:solidFill>
+                <a:latin typeface="Calibri"/>
+                <a:ea typeface="Calibri"/>
+                <a:cs typeface="Calibri"/>
+                <a:sym typeface="Calibri"/>
+              </a:rPr>
+              <a:t>The final output is a risk score with its confidence and explanation, converted into a plain-language report by an LLM.</a:t>
+            </a:r>
+            <a:endParaRPr sz="3200">
+              <a:solidFill>
+                <a:schemeClr val="dk1"/>
+              </a:solidFill>
+              <a:latin typeface="Calibri"/>
+              <a:ea typeface="Calibri"/>
+              <a:cs typeface="Calibri"/>
+              <a:sym typeface="Calibri"/>
+            </a:endParaRPr>
           </a:p>
         </p:txBody>
       </p:sp>
@@ -17303,7 +18747,7 @@
   <p:cSld>
     <p:spTree>
       <p:nvGrpSpPr>
-        <p:cNvPr id="182" name="Shape 182"/>
+        <p:cNvPr id="190" name="Shape 190"/>
         <p:cNvGrpSpPr/>
         <p:nvPr/>
       </p:nvGrpSpPr>
@@ -17317,7 +18761,2401 @@
       </p:grpSpPr>
       <p:sp>
         <p:nvSpPr>
-          <p:cNvPr id="183" name="Google Shape;183;p28"/>
+          <p:cNvPr id="191" name="Google Shape;191;p28"/>
+          <p:cNvSpPr txBox="1"/>
+          <p:nvPr>
+            <p:ph type="title"/>
+          </p:nvPr>
+        </p:nvSpPr>
+        <p:spPr>
+          <a:xfrm>
+            <a:off x="457200" y="274638"/>
+            <a:ext cx="8229600" cy="1143000"/>
+          </a:xfrm>
+          <a:prstGeom prst="rect">
+            <a:avLst/>
+          </a:prstGeom>
+          <a:noFill/>
+          <a:ln>
+            <a:noFill/>
+          </a:ln>
+        </p:spPr>
+        <p:txBody>
+          <a:bodyPr anchorCtr="0" anchor="ctr" bIns="45700" lIns="91425" spcFirstLastPara="1" rIns="91425" wrap="square" tIns="45700">
+            <a:noAutofit/>
+          </a:bodyPr>
+          <a:lstStyle/>
+          <a:p>
+            <a:pPr indent="0" lvl="0" marL="0" rtl="0" algn="ctr">
+              <a:spcBef>
+                <a:spcPts val="0"/>
+              </a:spcBef>
+              <a:spcAft>
+                <a:spcPts val="0"/>
+              </a:spcAft>
+              <a:buClr>
+                <a:schemeClr val="dk1"/>
+              </a:buClr>
+              <a:buSzPts val="1400"/>
+              <a:buFont typeface="Arial"/>
+              <a:buNone/>
+            </a:pPr>
+            <a:r>
+              <a:rPr b="1" lang="en-US" sz="4000">
+                <a:solidFill>
+                  <a:srgbClr val="0B3D59"/>
+                </a:solidFill>
+              </a:rPr>
+              <a:t>METHODOLOGY</a:t>
+            </a:r>
+            <a:endParaRPr>
+              <a:solidFill>
+                <a:srgbClr val="0B3D59"/>
+              </a:solidFill>
+            </a:endParaRPr>
+          </a:p>
+        </p:txBody>
+      </p:sp>
+      <p:sp>
+        <p:nvSpPr>
+          <p:cNvPr id="192" name="Google Shape;192;p28"/>
+          <p:cNvSpPr/>
+          <p:nvPr/>
+        </p:nvSpPr>
+        <p:spPr>
+          <a:xfrm>
+            <a:off x="457175" y="1835525"/>
+            <a:ext cx="1492500" cy="603300"/>
+          </a:xfrm>
+          <a:prstGeom prst="roundRect">
+            <a:avLst>
+              <a:gd fmla="val 9677" name="adj"/>
+            </a:avLst>
+          </a:prstGeom>
+          <a:solidFill>
+            <a:srgbClr val="FFFFFF"/>
+          </a:solidFill>
+          <a:ln cap="flat" cmpd="sng" w="12700">
+            <a:solidFill>
+              <a:srgbClr val="E1E9EA"/>
+            </a:solidFill>
+            <a:prstDash val="solid"/>
+            <a:round/>
+            <a:headEnd len="sm" w="sm" type="none"/>
+            <a:tailEnd len="sm" w="sm" type="none"/>
+          </a:ln>
+        </p:spPr>
+        <p:txBody>
+          <a:bodyPr anchorCtr="0" anchor="ctr" bIns="91425" lIns="91425" spcFirstLastPara="1" rIns="91425" wrap="square" tIns="91425">
+            <a:noAutofit/>
+          </a:bodyPr>
+          <a:lstStyle/>
+          <a:p>
+            <a:pPr indent="0" lvl="0" marL="0" rtl="0" algn="l">
+              <a:spcBef>
+                <a:spcPts val="0"/>
+              </a:spcBef>
+              <a:spcAft>
+                <a:spcPts val="0"/>
+              </a:spcAft>
+              <a:buNone/>
+            </a:pPr>
+            <a:r>
+              <a:t/>
+            </a:r>
+            <a:endParaRPr/>
+          </a:p>
+        </p:txBody>
+      </p:sp>
+      <p:sp>
+        <p:nvSpPr>
+          <p:cNvPr id="193" name="Google Shape;193;p28"/>
+          <p:cNvSpPr/>
+          <p:nvPr/>
+        </p:nvSpPr>
+        <p:spPr>
+          <a:xfrm>
+            <a:off x="457175" y="1835525"/>
+            <a:ext cx="1492500" cy="603300"/>
+          </a:xfrm>
+          <a:prstGeom prst="rect">
+            <a:avLst/>
+          </a:prstGeom>
+          <a:noFill/>
+          <a:ln>
+            <a:noFill/>
+          </a:ln>
+        </p:spPr>
+        <p:txBody>
+          <a:bodyPr anchorCtr="0" anchor="ctr" bIns="45700" lIns="91425" spcFirstLastPara="1" rIns="91425" wrap="square" tIns="45700">
+            <a:noAutofit/>
+          </a:bodyPr>
+          <a:lstStyle/>
+          <a:p>
+            <a:pPr indent="0" lvl="0" marL="0" marR="0" rtl="0" algn="ctr">
+              <a:spcBef>
+                <a:spcPts val="0"/>
+              </a:spcBef>
+              <a:spcAft>
+                <a:spcPts val="0"/>
+              </a:spcAft>
+              <a:buClr>
+                <a:srgbClr val="13232E"/>
+              </a:buClr>
+              <a:buSzPts val="1150"/>
+              <a:buFont typeface="Calibri"/>
+              <a:buNone/>
+            </a:pPr>
+            <a:r>
+              <a:rPr b="1" i="0" lang="en-US" sz="1800" u="none" cap="none" strike="noStrike">
+                <a:solidFill>
+                  <a:srgbClr val="13232E"/>
+                </a:solidFill>
+                <a:latin typeface="Calibri"/>
+                <a:ea typeface="Calibri"/>
+                <a:cs typeface="Calibri"/>
+                <a:sym typeface="Calibri"/>
+              </a:rPr>
+              <a:t>Oral</a:t>
+            </a:r>
+            <a:endParaRPr b="0" i="0" sz="1800" u="none" cap="none" strike="noStrike">
+              <a:solidFill>
+                <a:srgbClr val="000000"/>
+              </a:solidFill>
+              <a:latin typeface="Calibri"/>
+              <a:ea typeface="Calibri"/>
+              <a:cs typeface="Calibri"/>
+              <a:sym typeface="Calibri"/>
+            </a:endParaRPr>
+          </a:p>
+        </p:txBody>
+      </p:sp>
+      <p:cxnSp>
+        <p:nvCxnSpPr>
+          <p:cNvPr id="194" name="Google Shape;194;p28"/>
+          <p:cNvCxnSpPr/>
+          <p:nvPr/>
+        </p:nvCxnSpPr>
+        <p:spPr>
+          <a:xfrm>
+            <a:off x="1949803" y="2137211"/>
+            <a:ext cx="443700" cy="0"/>
+          </a:xfrm>
+          <a:prstGeom prst="straightConnector1">
+            <a:avLst/>
+          </a:prstGeom>
+          <a:noFill/>
+          <a:ln cap="flat" cmpd="sng" w="19050">
+            <a:solidFill>
+              <a:srgbClr val="1C7293"/>
+            </a:solidFill>
+            <a:prstDash val="solid"/>
+            <a:round/>
+            <a:headEnd len="sm" w="sm" type="none"/>
+            <a:tailEnd len="med" w="med" type="triangle"/>
+          </a:ln>
+        </p:spPr>
+      </p:cxnSp>
+      <p:sp>
+        <p:nvSpPr>
+          <p:cNvPr id="195" name="Google Shape;195;p28"/>
+          <p:cNvSpPr/>
+          <p:nvPr/>
+        </p:nvSpPr>
+        <p:spPr>
+          <a:xfrm>
+            <a:off x="457175" y="2594605"/>
+            <a:ext cx="1492500" cy="603300"/>
+          </a:xfrm>
+          <a:prstGeom prst="roundRect">
+            <a:avLst>
+              <a:gd fmla="val 9677" name="adj"/>
+            </a:avLst>
+          </a:prstGeom>
+          <a:solidFill>
+            <a:srgbClr val="FFFFFF"/>
+          </a:solidFill>
+          <a:ln cap="flat" cmpd="sng" w="12700">
+            <a:solidFill>
+              <a:srgbClr val="E1E9EA"/>
+            </a:solidFill>
+            <a:prstDash val="solid"/>
+            <a:round/>
+            <a:headEnd len="sm" w="sm" type="none"/>
+            <a:tailEnd len="sm" w="sm" type="none"/>
+          </a:ln>
+        </p:spPr>
+        <p:txBody>
+          <a:bodyPr anchorCtr="0" anchor="ctr" bIns="91425" lIns="91425" spcFirstLastPara="1" rIns="91425" wrap="square" tIns="91425">
+            <a:noAutofit/>
+          </a:bodyPr>
+          <a:lstStyle/>
+          <a:p>
+            <a:pPr indent="0" lvl="0" marL="0" rtl="0" algn="l">
+              <a:spcBef>
+                <a:spcPts val="0"/>
+              </a:spcBef>
+              <a:spcAft>
+                <a:spcPts val="0"/>
+              </a:spcAft>
+              <a:buNone/>
+            </a:pPr>
+            <a:r>
+              <a:t/>
+            </a:r>
+            <a:endParaRPr/>
+          </a:p>
+        </p:txBody>
+      </p:sp>
+      <p:sp>
+        <p:nvSpPr>
+          <p:cNvPr id="196" name="Google Shape;196;p28"/>
+          <p:cNvSpPr/>
+          <p:nvPr/>
+        </p:nvSpPr>
+        <p:spPr>
+          <a:xfrm>
+            <a:off x="457175" y="2594605"/>
+            <a:ext cx="1492500" cy="603300"/>
+          </a:xfrm>
+          <a:prstGeom prst="rect">
+            <a:avLst/>
+          </a:prstGeom>
+          <a:noFill/>
+          <a:ln>
+            <a:noFill/>
+          </a:ln>
+        </p:spPr>
+        <p:txBody>
+          <a:bodyPr anchorCtr="0" anchor="ctr" bIns="45700" lIns="91425" spcFirstLastPara="1" rIns="91425" wrap="square" tIns="45700">
+            <a:noAutofit/>
+          </a:bodyPr>
+          <a:lstStyle/>
+          <a:p>
+            <a:pPr indent="0" lvl="0" marL="0" marR="0" rtl="0" algn="ctr">
+              <a:spcBef>
+                <a:spcPts val="0"/>
+              </a:spcBef>
+              <a:spcAft>
+                <a:spcPts val="0"/>
+              </a:spcAft>
+              <a:buClr>
+                <a:srgbClr val="13232E"/>
+              </a:buClr>
+              <a:buSzPts val="1150"/>
+              <a:buFont typeface="Calibri"/>
+              <a:buNone/>
+            </a:pPr>
+            <a:r>
+              <a:rPr b="1" i="0" lang="en-US" sz="1800" u="none" cap="none" strike="noStrike">
+                <a:solidFill>
+                  <a:srgbClr val="13232E"/>
+                </a:solidFill>
+                <a:latin typeface="Calibri"/>
+                <a:ea typeface="Calibri"/>
+                <a:cs typeface="Calibri"/>
+                <a:sym typeface="Calibri"/>
+              </a:rPr>
+              <a:t>Nails</a:t>
+            </a:r>
+            <a:endParaRPr b="0" i="0" sz="1800" u="none" cap="none" strike="noStrike">
+              <a:solidFill>
+                <a:srgbClr val="000000"/>
+              </a:solidFill>
+              <a:latin typeface="Calibri"/>
+              <a:ea typeface="Calibri"/>
+              <a:cs typeface="Calibri"/>
+              <a:sym typeface="Calibri"/>
+            </a:endParaRPr>
+          </a:p>
+        </p:txBody>
+      </p:sp>
+      <p:cxnSp>
+        <p:nvCxnSpPr>
+          <p:cNvPr id="197" name="Google Shape;197;p28"/>
+          <p:cNvCxnSpPr/>
+          <p:nvPr/>
+        </p:nvCxnSpPr>
+        <p:spPr>
+          <a:xfrm>
+            <a:off x="1949803" y="2896291"/>
+            <a:ext cx="443700" cy="0"/>
+          </a:xfrm>
+          <a:prstGeom prst="straightConnector1">
+            <a:avLst/>
+          </a:prstGeom>
+          <a:noFill/>
+          <a:ln cap="flat" cmpd="sng" w="19050">
+            <a:solidFill>
+              <a:srgbClr val="1C7293"/>
+            </a:solidFill>
+            <a:prstDash val="solid"/>
+            <a:round/>
+            <a:headEnd len="sm" w="sm" type="none"/>
+            <a:tailEnd len="med" w="med" type="triangle"/>
+          </a:ln>
+        </p:spPr>
+      </p:cxnSp>
+      <p:sp>
+        <p:nvSpPr>
+          <p:cNvPr id="198" name="Google Shape;198;p28"/>
+          <p:cNvSpPr/>
+          <p:nvPr/>
+        </p:nvSpPr>
+        <p:spPr>
+          <a:xfrm>
+            <a:off x="457175" y="3353685"/>
+            <a:ext cx="1492500" cy="603300"/>
+          </a:xfrm>
+          <a:prstGeom prst="roundRect">
+            <a:avLst>
+              <a:gd fmla="val 9677" name="adj"/>
+            </a:avLst>
+          </a:prstGeom>
+          <a:solidFill>
+            <a:srgbClr val="FFFFFF"/>
+          </a:solidFill>
+          <a:ln cap="flat" cmpd="sng" w="12700">
+            <a:solidFill>
+              <a:srgbClr val="E1E9EA"/>
+            </a:solidFill>
+            <a:prstDash val="solid"/>
+            <a:round/>
+            <a:headEnd len="sm" w="sm" type="none"/>
+            <a:tailEnd len="sm" w="sm" type="none"/>
+          </a:ln>
+        </p:spPr>
+        <p:txBody>
+          <a:bodyPr anchorCtr="0" anchor="ctr" bIns="91425" lIns="91425" spcFirstLastPara="1" rIns="91425" wrap="square" tIns="91425">
+            <a:noAutofit/>
+          </a:bodyPr>
+          <a:lstStyle/>
+          <a:p>
+            <a:pPr indent="0" lvl="0" marL="0" rtl="0" algn="l">
+              <a:spcBef>
+                <a:spcPts val="0"/>
+              </a:spcBef>
+              <a:spcAft>
+                <a:spcPts val="0"/>
+              </a:spcAft>
+              <a:buNone/>
+            </a:pPr>
+            <a:r>
+              <a:t/>
+            </a:r>
+            <a:endParaRPr/>
+          </a:p>
+        </p:txBody>
+      </p:sp>
+      <p:sp>
+        <p:nvSpPr>
+          <p:cNvPr id="199" name="Google Shape;199;p28"/>
+          <p:cNvSpPr/>
+          <p:nvPr/>
+        </p:nvSpPr>
+        <p:spPr>
+          <a:xfrm>
+            <a:off x="457175" y="3353685"/>
+            <a:ext cx="1492500" cy="603300"/>
+          </a:xfrm>
+          <a:prstGeom prst="rect">
+            <a:avLst/>
+          </a:prstGeom>
+          <a:noFill/>
+          <a:ln>
+            <a:noFill/>
+          </a:ln>
+        </p:spPr>
+        <p:txBody>
+          <a:bodyPr anchorCtr="0" anchor="ctr" bIns="45700" lIns="91425" spcFirstLastPara="1" rIns="91425" wrap="square" tIns="45700">
+            <a:noAutofit/>
+          </a:bodyPr>
+          <a:lstStyle/>
+          <a:p>
+            <a:pPr indent="0" lvl="0" marL="0" marR="0" rtl="0" algn="ctr">
+              <a:spcBef>
+                <a:spcPts val="0"/>
+              </a:spcBef>
+              <a:spcAft>
+                <a:spcPts val="0"/>
+              </a:spcAft>
+              <a:buClr>
+                <a:srgbClr val="13232E"/>
+              </a:buClr>
+              <a:buSzPts val="1150"/>
+              <a:buFont typeface="Calibri"/>
+              <a:buNone/>
+            </a:pPr>
+            <a:r>
+              <a:rPr b="1" i="0" lang="en-US" sz="1800" u="none" cap="none" strike="noStrike">
+                <a:solidFill>
+                  <a:srgbClr val="13232E"/>
+                </a:solidFill>
+                <a:latin typeface="Calibri"/>
+                <a:ea typeface="Calibri"/>
+                <a:cs typeface="Calibri"/>
+                <a:sym typeface="Calibri"/>
+              </a:rPr>
+              <a:t>Conjunctiva</a:t>
+            </a:r>
+            <a:endParaRPr b="0" i="0" sz="1800" u="none" cap="none" strike="noStrike">
+              <a:solidFill>
+                <a:srgbClr val="000000"/>
+              </a:solidFill>
+              <a:latin typeface="Calibri"/>
+              <a:ea typeface="Calibri"/>
+              <a:cs typeface="Calibri"/>
+              <a:sym typeface="Calibri"/>
+            </a:endParaRPr>
+          </a:p>
+        </p:txBody>
+      </p:sp>
+      <p:cxnSp>
+        <p:nvCxnSpPr>
+          <p:cNvPr id="200" name="Google Shape;200;p28"/>
+          <p:cNvCxnSpPr/>
+          <p:nvPr/>
+        </p:nvCxnSpPr>
+        <p:spPr>
+          <a:xfrm>
+            <a:off x="1949803" y="3655371"/>
+            <a:ext cx="443700" cy="0"/>
+          </a:xfrm>
+          <a:prstGeom prst="straightConnector1">
+            <a:avLst/>
+          </a:prstGeom>
+          <a:noFill/>
+          <a:ln cap="flat" cmpd="sng" w="19050">
+            <a:solidFill>
+              <a:srgbClr val="1C7293"/>
+            </a:solidFill>
+            <a:prstDash val="solid"/>
+            <a:round/>
+            <a:headEnd len="sm" w="sm" type="none"/>
+            <a:tailEnd len="med" w="med" type="triangle"/>
+          </a:ln>
+        </p:spPr>
+      </p:cxnSp>
+      <p:sp>
+        <p:nvSpPr>
+          <p:cNvPr id="201" name="Google Shape;201;p28"/>
+          <p:cNvSpPr/>
+          <p:nvPr/>
+        </p:nvSpPr>
+        <p:spPr>
+          <a:xfrm>
+            <a:off x="457175" y="4112765"/>
+            <a:ext cx="1492500" cy="603300"/>
+          </a:xfrm>
+          <a:prstGeom prst="roundRect">
+            <a:avLst>
+              <a:gd fmla="val 9677" name="adj"/>
+            </a:avLst>
+          </a:prstGeom>
+          <a:solidFill>
+            <a:srgbClr val="FFFFFF"/>
+          </a:solidFill>
+          <a:ln cap="flat" cmpd="sng" w="12700">
+            <a:solidFill>
+              <a:srgbClr val="E1E9EA"/>
+            </a:solidFill>
+            <a:prstDash val="solid"/>
+            <a:round/>
+            <a:headEnd len="sm" w="sm" type="none"/>
+            <a:tailEnd len="sm" w="sm" type="none"/>
+          </a:ln>
+        </p:spPr>
+        <p:txBody>
+          <a:bodyPr anchorCtr="0" anchor="ctr" bIns="91425" lIns="91425" spcFirstLastPara="1" rIns="91425" wrap="square" tIns="91425">
+            <a:noAutofit/>
+          </a:bodyPr>
+          <a:lstStyle/>
+          <a:p>
+            <a:pPr indent="0" lvl="0" marL="0" rtl="0" algn="l">
+              <a:spcBef>
+                <a:spcPts val="0"/>
+              </a:spcBef>
+              <a:spcAft>
+                <a:spcPts val="0"/>
+              </a:spcAft>
+              <a:buNone/>
+            </a:pPr>
+            <a:r>
+              <a:t/>
+            </a:r>
+            <a:endParaRPr/>
+          </a:p>
+        </p:txBody>
+      </p:sp>
+      <p:sp>
+        <p:nvSpPr>
+          <p:cNvPr id="202" name="Google Shape;202;p28"/>
+          <p:cNvSpPr/>
+          <p:nvPr/>
+        </p:nvSpPr>
+        <p:spPr>
+          <a:xfrm>
+            <a:off x="457175" y="4112765"/>
+            <a:ext cx="1492500" cy="603300"/>
+          </a:xfrm>
+          <a:prstGeom prst="rect">
+            <a:avLst/>
+          </a:prstGeom>
+          <a:noFill/>
+          <a:ln>
+            <a:noFill/>
+          </a:ln>
+        </p:spPr>
+        <p:txBody>
+          <a:bodyPr anchorCtr="0" anchor="ctr" bIns="45700" lIns="91425" spcFirstLastPara="1" rIns="91425" wrap="square" tIns="45700">
+            <a:noAutofit/>
+          </a:bodyPr>
+          <a:lstStyle/>
+          <a:p>
+            <a:pPr indent="0" lvl="0" marL="0" marR="0" rtl="0" algn="ctr">
+              <a:spcBef>
+                <a:spcPts val="0"/>
+              </a:spcBef>
+              <a:spcAft>
+                <a:spcPts val="0"/>
+              </a:spcAft>
+              <a:buClr>
+                <a:srgbClr val="13232E"/>
+              </a:buClr>
+              <a:buSzPts val="1150"/>
+              <a:buFont typeface="Calibri"/>
+              <a:buNone/>
+            </a:pPr>
+            <a:r>
+              <a:rPr b="1" i="0" lang="en-US" sz="1800" u="none" cap="none" strike="noStrike">
+                <a:solidFill>
+                  <a:srgbClr val="13232E"/>
+                </a:solidFill>
+                <a:latin typeface="Calibri"/>
+                <a:ea typeface="Calibri"/>
+                <a:cs typeface="Calibri"/>
+                <a:sym typeface="Calibri"/>
+              </a:rPr>
+              <a:t>Tongue</a:t>
+            </a:r>
+            <a:endParaRPr b="0" i="0" sz="1800" u="none" cap="none" strike="noStrike">
+              <a:solidFill>
+                <a:srgbClr val="000000"/>
+              </a:solidFill>
+              <a:latin typeface="Calibri"/>
+              <a:ea typeface="Calibri"/>
+              <a:cs typeface="Calibri"/>
+              <a:sym typeface="Calibri"/>
+            </a:endParaRPr>
+          </a:p>
+        </p:txBody>
+      </p:sp>
+      <p:cxnSp>
+        <p:nvCxnSpPr>
+          <p:cNvPr id="203" name="Google Shape;203;p28"/>
+          <p:cNvCxnSpPr/>
+          <p:nvPr/>
+        </p:nvCxnSpPr>
+        <p:spPr>
+          <a:xfrm>
+            <a:off x="1949803" y="4414451"/>
+            <a:ext cx="443700" cy="0"/>
+          </a:xfrm>
+          <a:prstGeom prst="straightConnector1">
+            <a:avLst/>
+          </a:prstGeom>
+          <a:noFill/>
+          <a:ln cap="flat" cmpd="sng" w="19050">
+            <a:solidFill>
+              <a:srgbClr val="1C7293"/>
+            </a:solidFill>
+            <a:prstDash val="solid"/>
+            <a:round/>
+            <a:headEnd len="sm" w="sm" type="none"/>
+            <a:tailEnd len="med" w="med" type="triangle"/>
+          </a:ln>
+        </p:spPr>
+      </p:cxnSp>
+      <p:sp>
+        <p:nvSpPr>
+          <p:cNvPr id="204" name="Google Shape;204;p28"/>
+          <p:cNvSpPr/>
+          <p:nvPr/>
+        </p:nvSpPr>
+        <p:spPr>
+          <a:xfrm>
+            <a:off x="457175" y="4871845"/>
+            <a:ext cx="1492500" cy="603300"/>
+          </a:xfrm>
+          <a:prstGeom prst="roundRect">
+            <a:avLst>
+              <a:gd fmla="val 9677" name="adj"/>
+            </a:avLst>
+          </a:prstGeom>
+          <a:solidFill>
+            <a:srgbClr val="FFFFFF"/>
+          </a:solidFill>
+          <a:ln cap="flat" cmpd="sng" w="12700">
+            <a:solidFill>
+              <a:srgbClr val="E1E9EA"/>
+            </a:solidFill>
+            <a:prstDash val="solid"/>
+            <a:round/>
+            <a:headEnd len="sm" w="sm" type="none"/>
+            <a:tailEnd len="sm" w="sm" type="none"/>
+          </a:ln>
+        </p:spPr>
+        <p:txBody>
+          <a:bodyPr anchorCtr="0" anchor="ctr" bIns="91425" lIns="91425" spcFirstLastPara="1" rIns="91425" wrap="square" tIns="91425">
+            <a:noAutofit/>
+          </a:bodyPr>
+          <a:lstStyle/>
+          <a:p>
+            <a:pPr indent="0" lvl="0" marL="0" rtl="0" algn="l">
+              <a:spcBef>
+                <a:spcPts val="0"/>
+              </a:spcBef>
+              <a:spcAft>
+                <a:spcPts val="0"/>
+              </a:spcAft>
+              <a:buNone/>
+            </a:pPr>
+            <a:r>
+              <a:t/>
+            </a:r>
+            <a:endParaRPr/>
+          </a:p>
+        </p:txBody>
+      </p:sp>
+      <p:sp>
+        <p:nvSpPr>
+          <p:cNvPr id="205" name="Google Shape;205;p28"/>
+          <p:cNvSpPr/>
+          <p:nvPr/>
+        </p:nvSpPr>
+        <p:spPr>
+          <a:xfrm>
+            <a:off x="457175" y="4871845"/>
+            <a:ext cx="1492500" cy="603300"/>
+          </a:xfrm>
+          <a:prstGeom prst="rect">
+            <a:avLst/>
+          </a:prstGeom>
+          <a:noFill/>
+          <a:ln>
+            <a:noFill/>
+          </a:ln>
+        </p:spPr>
+        <p:txBody>
+          <a:bodyPr anchorCtr="0" anchor="ctr" bIns="45700" lIns="91425" spcFirstLastPara="1" rIns="91425" wrap="square" tIns="45700">
+            <a:noAutofit/>
+          </a:bodyPr>
+          <a:lstStyle/>
+          <a:p>
+            <a:pPr indent="0" lvl="0" marL="0" marR="0" rtl="0" algn="ctr">
+              <a:spcBef>
+                <a:spcPts val="0"/>
+              </a:spcBef>
+              <a:spcAft>
+                <a:spcPts val="0"/>
+              </a:spcAft>
+              <a:buClr>
+                <a:srgbClr val="13232E"/>
+              </a:buClr>
+              <a:buSzPts val="1150"/>
+              <a:buFont typeface="Calibri"/>
+              <a:buNone/>
+            </a:pPr>
+            <a:r>
+              <a:rPr b="1" i="0" lang="en-US" sz="1800" u="none" cap="none" strike="noStrike">
+                <a:solidFill>
+                  <a:srgbClr val="13232E"/>
+                </a:solidFill>
+                <a:latin typeface="Calibri"/>
+                <a:ea typeface="Calibri"/>
+                <a:cs typeface="Calibri"/>
+                <a:sym typeface="Calibri"/>
+              </a:rPr>
+              <a:t>Palm</a:t>
+            </a:r>
+            <a:endParaRPr b="0" i="0" sz="1800" u="none" cap="none" strike="noStrike">
+              <a:solidFill>
+                <a:srgbClr val="000000"/>
+              </a:solidFill>
+              <a:latin typeface="Calibri"/>
+              <a:ea typeface="Calibri"/>
+              <a:cs typeface="Calibri"/>
+              <a:sym typeface="Calibri"/>
+            </a:endParaRPr>
+          </a:p>
+        </p:txBody>
+      </p:sp>
+      <p:cxnSp>
+        <p:nvCxnSpPr>
+          <p:cNvPr id="206" name="Google Shape;206;p28"/>
+          <p:cNvCxnSpPr/>
+          <p:nvPr/>
+        </p:nvCxnSpPr>
+        <p:spPr>
+          <a:xfrm>
+            <a:off x="1949803" y="5173530"/>
+            <a:ext cx="443700" cy="0"/>
+          </a:xfrm>
+          <a:prstGeom prst="straightConnector1">
+            <a:avLst/>
+          </a:prstGeom>
+          <a:noFill/>
+          <a:ln cap="flat" cmpd="sng" w="19050">
+            <a:solidFill>
+              <a:srgbClr val="1C7293"/>
+            </a:solidFill>
+            <a:prstDash val="solid"/>
+            <a:round/>
+            <a:headEnd len="sm" w="sm" type="none"/>
+            <a:tailEnd len="med" w="med" type="triangle"/>
+          </a:ln>
+        </p:spPr>
+      </p:cxnSp>
+      <p:sp>
+        <p:nvSpPr>
+          <p:cNvPr id="207" name="Google Shape;207;p28"/>
+          <p:cNvSpPr/>
+          <p:nvPr/>
+        </p:nvSpPr>
+        <p:spPr>
+          <a:xfrm>
+            <a:off x="2393557" y="1835525"/>
+            <a:ext cx="1734600" cy="603300"/>
+          </a:xfrm>
+          <a:prstGeom prst="roundRect">
+            <a:avLst>
+              <a:gd fmla="val 9677" name="adj"/>
+            </a:avLst>
+          </a:prstGeom>
+          <a:solidFill>
+            <a:srgbClr val="1C7293"/>
+          </a:solidFill>
+          <a:ln>
+            <a:noFill/>
+          </a:ln>
+        </p:spPr>
+        <p:txBody>
+          <a:bodyPr anchorCtr="0" anchor="ctr" bIns="91425" lIns="91425" spcFirstLastPara="1" rIns="91425" wrap="square" tIns="91425">
+            <a:noAutofit/>
+          </a:bodyPr>
+          <a:lstStyle/>
+          <a:p>
+            <a:pPr indent="0" lvl="0" marL="0" rtl="0" algn="l">
+              <a:spcBef>
+                <a:spcPts val="0"/>
+              </a:spcBef>
+              <a:spcAft>
+                <a:spcPts val="0"/>
+              </a:spcAft>
+              <a:buNone/>
+            </a:pPr>
+            <a:r>
+              <a:t/>
+            </a:r>
+            <a:endParaRPr/>
+          </a:p>
+        </p:txBody>
+      </p:sp>
+      <p:sp>
+        <p:nvSpPr>
+          <p:cNvPr id="208" name="Google Shape;208;p28"/>
+          <p:cNvSpPr/>
+          <p:nvPr/>
+        </p:nvSpPr>
+        <p:spPr>
+          <a:xfrm>
+            <a:off x="2393557" y="1835525"/>
+            <a:ext cx="1734600" cy="603300"/>
+          </a:xfrm>
+          <a:prstGeom prst="rect">
+            <a:avLst/>
+          </a:prstGeom>
+          <a:noFill/>
+          <a:ln>
+            <a:noFill/>
+          </a:ln>
+        </p:spPr>
+        <p:txBody>
+          <a:bodyPr anchorCtr="0" anchor="ctr" bIns="45700" lIns="91425" spcFirstLastPara="1" rIns="91425" wrap="square" tIns="45700">
+            <a:noAutofit/>
+          </a:bodyPr>
+          <a:lstStyle/>
+          <a:p>
+            <a:pPr indent="0" lvl="0" marL="0" marR="0" rtl="0" algn="ctr">
+              <a:spcBef>
+                <a:spcPts val="0"/>
+              </a:spcBef>
+              <a:spcAft>
+                <a:spcPts val="0"/>
+              </a:spcAft>
+              <a:buClr>
+                <a:srgbClr val="FFFFFF"/>
+              </a:buClr>
+              <a:buSzPts val="1050"/>
+              <a:buFont typeface="Calibri"/>
+              <a:buNone/>
+            </a:pPr>
+            <a:r>
+              <a:rPr b="1" i="0" lang="en-US" sz="1300" u="none" cap="none" strike="noStrike">
+                <a:solidFill>
+                  <a:srgbClr val="FFFFFF"/>
+                </a:solidFill>
+                <a:latin typeface="Calibri"/>
+                <a:ea typeface="Calibri"/>
+                <a:cs typeface="Calibri"/>
+                <a:sym typeface="Calibri"/>
+              </a:rPr>
+              <a:t>ViT-B/16 encoder</a:t>
+            </a:r>
+            <a:endParaRPr b="0" i="0" sz="1300" u="none" cap="none" strike="noStrike">
+              <a:solidFill>
+                <a:srgbClr val="000000"/>
+              </a:solidFill>
+              <a:latin typeface="Calibri"/>
+              <a:ea typeface="Calibri"/>
+              <a:cs typeface="Calibri"/>
+              <a:sym typeface="Calibri"/>
+            </a:endParaRPr>
+          </a:p>
+        </p:txBody>
+      </p:sp>
+      <p:cxnSp>
+        <p:nvCxnSpPr>
+          <p:cNvPr id="209" name="Google Shape;209;p28"/>
+          <p:cNvCxnSpPr/>
+          <p:nvPr/>
+        </p:nvCxnSpPr>
+        <p:spPr>
+          <a:xfrm>
+            <a:off x="4128233" y="2137211"/>
+            <a:ext cx="403500" cy="0"/>
+          </a:xfrm>
+          <a:prstGeom prst="straightConnector1">
+            <a:avLst/>
+          </a:prstGeom>
+          <a:noFill/>
+          <a:ln cap="flat" cmpd="sng" w="19050">
+            <a:solidFill>
+              <a:srgbClr val="1C7293"/>
+            </a:solidFill>
+            <a:prstDash val="solid"/>
+            <a:round/>
+            <a:headEnd len="sm" w="sm" type="none"/>
+            <a:tailEnd len="sm" w="sm" type="none"/>
+          </a:ln>
+        </p:spPr>
+      </p:cxnSp>
+      <p:sp>
+        <p:nvSpPr>
+          <p:cNvPr id="210" name="Google Shape;210;p28"/>
+          <p:cNvSpPr/>
+          <p:nvPr/>
+        </p:nvSpPr>
+        <p:spPr>
+          <a:xfrm>
+            <a:off x="2393557" y="2594605"/>
+            <a:ext cx="1734600" cy="603300"/>
+          </a:xfrm>
+          <a:prstGeom prst="roundRect">
+            <a:avLst>
+              <a:gd fmla="val 9677" name="adj"/>
+            </a:avLst>
+          </a:prstGeom>
+          <a:solidFill>
+            <a:srgbClr val="1C7293"/>
+          </a:solidFill>
+          <a:ln>
+            <a:noFill/>
+          </a:ln>
+        </p:spPr>
+        <p:txBody>
+          <a:bodyPr anchorCtr="0" anchor="ctr" bIns="91425" lIns="91425" spcFirstLastPara="1" rIns="91425" wrap="square" tIns="91425">
+            <a:noAutofit/>
+          </a:bodyPr>
+          <a:lstStyle/>
+          <a:p>
+            <a:pPr indent="0" lvl="0" marL="0" rtl="0" algn="l">
+              <a:spcBef>
+                <a:spcPts val="0"/>
+              </a:spcBef>
+              <a:spcAft>
+                <a:spcPts val="0"/>
+              </a:spcAft>
+              <a:buNone/>
+            </a:pPr>
+            <a:r>
+              <a:t/>
+            </a:r>
+            <a:endParaRPr/>
+          </a:p>
+        </p:txBody>
+      </p:sp>
+      <p:sp>
+        <p:nvSpPr>
+          <p:cNvPr id="211" name="Google Shape;211;p28"/>
+          <p:cNvSpPr/>
+          <p:nvPr/>
+        </p:nvSpPr>
+        <p:spPr>
+          <a:xfrm>
+            <a:off x="2393557" y="2594605"/>
+            <a:ext cx="1734600" cy="603300"/>
+          </a:xfrm>
+          <a:prstGeom prst="rect">
+            <a:avLst/>
+          </a:prstGeom>
+          <a:noFill/>
+          <a:ln>
+            <a:noFill/>
+          </a:ln>
+        </p:spPr>
+        <p:txBody>
+          <a:bodyPr anchorCtr="0" anchor="ctr" bIns="45700" lIns="91425" spcFirstLastPara="1" rIns="91425" wrap="square" tIns="45700">
+            <a:noAutofit/>
+          </a:bodyPr>
+          <a:lstStyle/>
+          <a:p>
+            <a:pPr indent="0" lvl="0" marL="0" marR="0" rtl="0" algn="ctr">
+              <a:spcBef>
+                <a:spcPts val="0"/>
+              </a:spcBef>
+              <a:spcAft>
+                <a:spcPts val="0"/>
+              </a:spcAft>
+              <a:buClr>
+                <a:srgbClr val="FFFFFF"/>
+              </a:buClr>
+              <a:buSzPts val="1050"/>
+              <a:buFont typeface="Calibri"/>
+              <a:buNone/>
+            </a:pPr>
+            <a:r>
+              <a:rPr b="1" i="0" lang="en-US" sz="1300" u="none" cap="none" strike="noStrike">
+                <a:solidFill>
+                  <a:srgbClr val="FFFFFF"/>
+                </a:solidFill>
+                <a:latin typeface="Calibri"/>
+                <a:ea typeface="Calibri"/>
+                <a:cs typeface="Calibri"/>
+                <a:sym typeface="Calibri"/>
+              </a:rPr>
+              <a:t>ViT-B/16 encoder</a:t>
+            </a:r>
+            <a:endParaRPr b="0" i="0" sz="1300" u="none" cap="none" strike="noStrike">
+              <a:solidFill>
+                <a:srgbClr val="000000"/>
+              </a:solidFill>
+              <a:latin typeface="Calibri"/>
+              <a:ea typeface="Calibri"/>
+              <a:cs typeface="Calibri"/>
+              <a:sym typeface="Calibri"/>
+            </a:endParaRPr>
+          </a:p>
+        </p:txBody>
+      </p:sp>
+      <p:cxnSp>
+        <p:nvCxnSpPr>
+          <p:cNvPr id="212" name="Google Shape;212;p28"/>
+          <p:cNvCxnSpPr/>
+          <p:nvPr/>
+        </p:nvCxnSpPr>
+        <p:spPr>
+          <a:xfrm>
+            <a:off x="4128233" y="2896291"/>
+            <a:ext cx="403500" cy="0"/>
+          </a:xfrm>
+          <a:prstGeom prst="straightConnector1">
+            <a:avLst/>
+          </a:prstGeom>
+          <a:noFill/>
+          <a:ln cap="flat" cmpd="sng" w="19050">
+            <a:solidFill>
+              <a:srgbClr val="1C7293"/>
+            </a:solidFill>
+            <a:prstDash val="solid"/>
+            <a:round/>
+            <a:headEnd len="sm" w="sm" type="none"/>
+            <a:tailEnd len="sm" w="sm" type="none"/>
+          </a:ln>
+        </p:spPr>
+      </p:cxnSp>
+      <p:sp>
+        <p:nvSpPr>
+          <p:cNvPr id="213" name="Google Shape;213;p28"/>
+          <p:cNvSpPr/>
+          <p:nvPr/>
+        </p:nvSpPr>
+        <p:spPr>
+          <a:xfrm>
+            <a:off x="2393557" y="3353685"/>
+            <a:ext cx="1734600" cy="603300"/>
+          </a:xfrm>
+          <a:prstGeom prst="roundRect">
+            <a:avLst>
+              <a:gd fmla="val 9677" name="adj"/>
+            </a:avLst>
+          </a:prstGeom>
+          <a:solidFill>
+            <a:srgbClr val="1C7293"/>
+          </a:solidFill>
+          <a:ln>
+            <a:noFill/>
+          </a:ln>
+        </p:spPr>
+        <p:txBody>
+          <a:bodyPr anchorCtr="0" anchor="ctr" bIns="91425" lIns="91425" spcFirstLastPara="1" rIns="91425" wrap="square" tIns="91425">
+            <a:noAutofit/>
+          </a:bodyPr>
+          <a:lstStyle/>
+          <a:p>
+            <a:pPr indent="0" lvl="0" marL="0" rtl="0" algn="l">
+              <a:spcBef>
+                <a:spcPts val="0"/>
+              </a:spcBef>
+              <a:spcAft>
+                <a:spcPts val="0"/>
+              </a:spcAft>
+              <a:buNone/>
+            </a:pPr>
+            <a:r>
+              <a:t/>
+            </a:r>
+            <a:endParaRPr/>
+          </a:p>
+        </p:txBody>
+      </p:sp>
+      <p:sp>
+        <p:nvSpPr>
+          <p:cNvPr id="214" name="Google Shape;214;p28"/>
+          <p:cNvSpPr/>
+          <p:nvPr/>
+        </p:nvSpPr>
+        <p:spPr>
+          <a:xfrm>
+            <a:off x="2393557" y="3353685"/>
+            <a:ext cx="1734600" cy="603300"/>
+          </a:xfrm>
+          <a:prstGeom prst="rect">
+            <a:avLst/>
+          </a:prstGeom>
+          <a:noFill/>
+          <a:ln>
+            <a:noFill/>
+          </a:ln>
+        </p:spPr>
+        <p:txBody>
+          <a:bodyPr anchorCtr="0" anchor="ctr" bIns="45700" lIns="91425" spcFirstLastPara="1" rIns="91425" wrap="square" tIns="45700">
+            <a:noAutofit/>
+          </a:bodyPr>
+          <a:lstStyle/>
+          <a:p>
+            <a:pPr indent="0" lvl="0" marL="0" marR="0" rtl="0" algn="ctr">
+              <a:spcBef>
+                <a:spcPts val="0"/>
+              </a:spcBef>
+              <a:spcAft>
+                <a:spcPts val="0"/>
+              </a:spcAft>
+              <a:buClr>
+                <a:srgbClr val="FFFFFF"/>
+              </a:buClr>
+              <a:buSzPts val="1050"/>
+              <a:buFont typeface="Calibri"/>
+              <a:buNone/>
+            </a:pPr>
+            <a:r>
+              <a:rPr b="1" i="0" lang="en-US" sz="1300" u="none" cap="none" strike="noStrike">
+                <a:solidFill>
+                  <a:srgbClr val="FFFFFF"/>
+                </a:solidFill>
+                <a:latin typeface="Calibri"/>
+                <a:ea typeface="Calibri"/>
+                <a:cs typeface="Calibri"/>
+                <a:sym typeface="Calibri"/>
+              </a:rPr>
+              <a:t>ViT-B/16 encoder</a:t>
+            </a:r>
+            <a:endParaRPr b="0" i="0" sz="1300" u="none" cap="none" strike="noStrike">
+              <a:solidFill>
+                <a:srgbClr val="000000"/>
+              </a:solidFill>
+              <a:latin typeface="Calibri"/>
+              <a:ea typeface="Calibri"/>
+              <a:cs typeface="Calibri"/>
+              <a:sym typeface="Calibri"/>
+            </a:endParaRPr>
+          </a:p>
+        </p:txBody>
+      </p:sp>
+      <p:cxnSp>
+        <p:nvCxnSpPr>
+          <p:cNvPr id="215" name="Google Shape;215;p28"/>
+          <p:cNvCxnSpPr/>
+          <p:nvPr/>
+        </p:nvCxnSpPr>
+        <p:spPr>
+          <a:xfrm>
+            <a:off x="4128233" y="3655371"/>
+            <a:ext cx="403500" cy="0"/>
+          </a:xfrm>
+          <a:prstGeom prst="straightConnector1">
+            <a:avLst/>
+          </a:prstGeom>
+          <a:noFill/>
+          <a:ln cap="flat" cmpd="sng" w="19050">
+            <a:solidFill>
+              <a:srgbClr val="1C7293"/>
+            </a:solidFill>
+            <a:prstDash val="solid"/>
+            <a:round/>
+            <a:headEnd len="sm" w="sm" type="none"/>
+            <a:tailEnd len="sm" w="sm" type="none"/>
+          </a:ln>
+        </p:spPr>
+      </p:cxnSp>
+      <p:sp>
+        <p:nvSpPr>
+          <p:cNvPr id="216" name="Google Shape;216;p28"/>
+          <p:cNvSpPr/>
+          <p:nvPr/>
+        </p:nvSpPr>
+        <p:spPr>
+          <a:xfrm>
+            <a:off x="2393557" y="4112765"/>
+            <a:ext cx="1734600" cy="603300"/>
+          </a:xfrm>
+          <a:prstGeom prst="roundRect">
+            <a:avLst>
+              <a:gd fmla="val 9677" name="adj"/>
+            </a:avLst>
+          </a:prstGeom>
+          <a:solidFill>
+            <a:srgbClr val="1C7293"/>
+          </a:solidFill>
+          <a:ln>
+            <a:noFill/>
+          </a:ln>
+        </p:spPr>
+        <p:txBody>
+          <a:bodyPr anchorCtr="0" anchor="ctr" bIns="91425" lIns="91425" spcFirstLastPara="1" rIns="91425" wrap="square" tIns="91425">
+            <a:noAutofit/>
+          </a:bodyPr>
+          <a:lstStyle/>
+          <a:p>
+            <a:pPr indent="0" lvl="0" marL="0" rtl="0" algn="l">
+              <a:spcBef>
+                <a:spcPts val="0"/>
+              </a:spcBef>
+              <a:spcAft>
+                <a:spcPts val="0"/>
+              </a:spcAft>
+              <a:buNone/>
+            </a:pPr>
+            <a:r>
+              <a:t/>
+            </a:r>
+            <a:endParaRPr/>
+          </a:p>
+        </p:txBody>
+      </p:sp>
+      <p:sp>
+        <p:nvSpPr>
+          <p:cNvPr id="217" name="Google Shape;217;p28"/>
+          <p:cNvSpPr/>
+          <p:nvPr/>
+        </p:nvSpPr>
+        <p:spPr>
+          <a:xfrm>
+            <a:off x="2393557" y="4112765"/>
+            <a:ext cx="1734600" cy="603300"/>
+          </a:xfrm>
+          <a:prstGeom prst="rect">
+            <a:avLst/>
+          </a:prstGeom>
+          <a:noFill/>
+          <a:ln>
+            <a:noFill/>
+          </a:ln>
+        </p:spPr>
+        <p:txBody>
+          <a:bodyPr anchorCtr="0" anchor="ctr" bIns="45700" lIns="91425" spcFirstLastPara="1" rIns="91425" wrap="square" tIns="45700">
+            <a:noAutofit/>
+          </a:bodyPr>
+          <a:lstStyle/>
+          <a:p>
+            <a:pPr indent="0" lvl="0" marL="0" marR="0" rtl="0" algn="ctr">
+              <a:spcBef>
+                <a:spcPts val="0"/>
+              </a:spcBef>
+              <a:spcAft>
+                <a:spcPts val="0"/>
+              </a:spcAft>
+              <a:buClr>
+                <a:srgbClr val="FFFFFF"/>
+              </a:buClr>
+              <a:buSzPts val="1050"/>
+              <a:buFont typeface="Calibri"/>
+              <a:buNone/>
+            </a:pPr>
+            <a:r>
+              <a:rPr b="1" i="0" lang="en-US" sz="1300" u="none" cap="none" strike="noStrike">
+                <a:solidFill>
+                  <a:srgbClr val="FFFFFF"/>
+                </a:solidFill>
+                <a:latin typeface="Calibri"/>
+                <a:ea typeface="Calibri"/>
+                <a:cs typeface="Calibri"/>
+                <a:sym typeface="Calibri"/>
+              </a:rPr>
+              <a:t>ViT-B/16 encoder</a:t>
+            </a:r>
+            <a:endParaRPr b="0" i="0" sz="1300" u="none" cap="none" strike="noStrike">
+              <a:solidFill>
+                <a:srgbClr val="000000"/>
+              </a:solidFill>
+              <a:latin typeface="Calibri"/>
+              <a:ea typeface="Calibri"/>
+              <a:cs typeface="Calibri"/>
+              <a:sym typeface="Calibri"/>
+            </a:endParaRPr>
+          </a:p>
+        </p:txBody>
+      </p:sp>
+      <p:cxnSp>
+        <p:nvCxnSpPr>
+          <p:cNvPr id="218" name="Google Shape;218;p28"/>
+          <p:cNvCxnSpPr/>
+          <p:nvPr/>
+        </p:nvCxnSpPr>
+        <p:spPr>
+          <a:xfrm>
+            <a:off x="4128233" y="4414451"/>
+            <a:ext cx="403500" cy="0"/>
+          </a:xfrm>
+          <a:prstGeom prst="straightConnector1">
+            <a:avLst/>
+          </a:prstGeom>
+          <a:noFill/>
+          <a:ln cap="flat" cmpd="sng" w="19050">
+            <a:solidFill>
+              <a:srgbClr val="1C7293"/>
+            </a:solidFill>
+            <a:prstDash val="solid"/>
+            <a:round/>
+            <a:headEnd len="sm" w="sm" type="none"/>
+            <a:tailEnd len="sm" w="sm" type="none"/>
+          </a:ln>
+        </p:spPr>
+      </p:cxnSp>
+      <p:sp>
+        <p:nvSpPr>
+          <p:cNvPr id="219" name="Google Shape;219;p28"/>
+          <p:cNvSpPr/>
+          <p:nvPr/>
+        </p:nvSpPr>
+        <p:spPr>
+          <a:xfrm>
+            <a:off x="2393557" y="4871845"/>
+            <a:ext cx="1734600" cy="603300"/>
+          </a:xfrm>
+          <a:prstGeom prst="roundRect">
+            <a:avLst>
+              <a:gd fmla="val 9677" name="adj"/>
+            </a:avLst>
+          </a:prstGeom>
+          <a:solidFill>
+            <a:srgbClr val="1C7293"/>
+          </a:solidFill>
+          <a:ln>
+            <a:noFill/>
+          </a:ln>
+        </p:spPr>
+        <p:txBody>
+          <a:bodyPr anchorCtr="0" anchor="ctr" bIns="91425" lIns="91425" spcFirstLastPara="1" rIns="91425" wrap="square" tIns="91425">
+            <a:noAutofit/>
+          </a:bodyPr>
+          <a:lstStyle/>
+          <a:p>
+            <a:pPr indent="0" lvl="0" marL="0" rtl="0" algn="l">
+              <a:spcBef>
+                <a:spcPts val="0"/>
+              </a:spcBef>
+              <a:spcAft>
+                <a:spcPts val="0"/>
+              </a:spcAft>
+              <a:buNone/>
+            </a:pPr>
+            <a:r>
+              <a:t/>
+            </a:r>
+            <a:endParaRPr/>
+          </a:p>
+        </p:txBody>
+      </p:sp>
+      <p:sp>
+        <p:nvSpPr>
+          <p:cNvPr id="220" name="Google Shape;220;p28"/>
+          <p:cNvSpPr/>
+          <p:nvPr/>
+        </p:nvSpPr>
+        <p:spPr>
+          <a:xfrm>
+            <a:off x="2393557" y="4871845"/>
+            <a:ext cx="1734600" cy="603300"/>
+          </a:xfrm>
+          <a:prstGeom prst="rect">
+            <a:avLst/>
+          </a:prstGeom>
+          <a:noFill/>
+          <a:ln>
+            <a:noFill/>
+          </a:ln>
+        </p:spPr>
+        <p:txBody>
+          <a:bodyPr anchorCtr="0" anchor="ctr" bIns="45700" lIns="91425" spcFirstLastPara="1" rIns="91425" wrap="square" tIns="45700">
+            <a:noAutofit/>
+          </a:bodyPr>
+          <a:lstStyle/>
+          <a:p>
+            <a:pPr indent="0" lvl="0" marL="0" marR="0" rtl="0" algn="ctr">
+              <a:spcBef>
+                <a:spcPts val="0"/>
+              </a:spcBef>
+              <a:spcAft>
+                <a:spcPts val="0"/>
+              </a:spcAft>
+              <a:buClr>
+                <a:srgbClr val="FFFFFF"/>
+              </a:buClr>
+              <a:buSzPts val="1050"/>
+              <a:buFont typeface="Calibri"/>
+              <a:buNone/>
+            </a:pPr>
+            <a:r>
+              <a:rPr b="1" i="0" lang="en-US" sz="1300" u="none" cap="none" strike="noStrike">
+                <a:solidFill>
+                  <a:srgbClr val="FFFFFF"/>
+                </a:solidFill>
+                <a:latin typeface="Calibri"/>
+                <a:ea typeface="Calibri"/>
+                <a:cs typeface="Calibri"/>
+                <a:sym typeface="Calibri"/>
+              </a:rPr>
+              <a:t>ViT-B/16 encoder</a:t>
+            </a:r>
+            <a:endParaRPr b="0" i="0" sz="1300" u="none" cap="none" strike="noStrike">
+              <a:solidFill>
+                <a:srgbClr val="000000"/>
+              </a:solidFill>
+              <a:latin typeface="Calibri"/>
+              <a:ea typeface="Calibri"/>
+              <a:cs typeface="Calibri"/>
+              <a:sym typeface="Calibri"/>
+            </a:endParaRPr>
+          </a:p>
+        </p:txBody>
+      </p:sp>
+      <p:cxnSp>
+        <p:nvCxnSpPr>
+          <p:cNvPr id="221" name="Google Shape;221;p28"/>
+          <p:cNvCxnSpPr/>
+          <p:nvPr/>
+        </p:nvCxnSpPr>
+        <p:spPr>
+          <a:xfrm>
+            <a:off x="4128233" y="5173530"/>
+            <a:ext cx="403500" cy="0"/>
+          </a:xfrm>
+          <a:prstGeom prst="straightConnector1">
+            <a:avLst/>
+          </a:prstGeom>
+          <a:noFill/>
+          <a:ln cap="flat" cmpd="sng" w="19050">
+            <a:solidFill>
+              <a:srgbClr val="1C7293"/>
+            </a:solidFill>
+            <a:prstDash val="solid"/>
+            <a:round/>
+            <a:headEnd len="sm" w="sm" type="none"/>
+            <a:tailEnd len="sm" w="sm" type="none"/>
+          </a:ln>
+        </p:spPr>
+      </p:cxnSp>
+      <p:cxnSp>
+        <p:nvCxnSpPr>
+          <p:cNvPr id="222" name="Google Shape;222;p28"/>
+          <p:cNvCxnSpPr/>
+          <p:nvPr/>
+        </p:nvCxnSpPr>
+        <p:spPr>
+          <a:xfrm>
+            <a:off x="4530839" y="2137211"/>
+            <a:ext cx="900" cy="1518300"/>
+          </a:xfrm>
+          <a:prstGeom prst="straightConnector1">
+            <a:avLst/>
+          </a:prstGeom>
+          <a:noFill/>
+          <a:ln cap="flat" cmpd="sng" w="12700">
+            <a:solidFill>
+              <a:srgbClr val="02C39A"/>
+            </a:solidFill>
+            <a:prstDash val="dot"/>
+            <a:round/>
+            <a:headEnd len="sm" w="sm" type="none"/>
+            <a:tailEnd len="sm" w="sm" type="none"/>
+          </a:ln>
+        </p:spPr>
+      </p:cxnSp>
+      <p:cxnSp>
+        <p:nvCxnSpPr>
+          <p:cNvPr id="223" name="Google Shape;223;p28"/>
+          <p:cNvCxnSpPr/>
+          <p:nvPr/>
+        </p:nvCxnSpPr>
+        <p:spPr>
+          <a:xfrm>
+            <a:off x="4530839" y="2896291"/>
+            <a:ext cx="900" cy="759000"/>
+          </a:xfrm>
+          <a:prstGeom prst="straightConnector1">
+            <a:avLst/>
+          </a:prstGeom>
+          <a:noFill/>
+          <a:ln cap="flat" cmpd="sng" w="12700">
+            <a:solidFill>
+              <a:srgbClr val="02C39A"/>
+            </a:solidFill>
+            <a:prstDash val="dot"/>
+            <a:round/>
+            <a:headEnd len="sm" w="sm" type="none"/>
+            <a:tailEnd len="sm" w="sm" type="none"/>
+          </a:ln>
+        </p:spPr>
+      </p:cxnSp>
+      <p:cxnSp>
+        <p:nvCxnSpPr>
+          <p:cNvPr id="224" name="Google Shape;224;p28"/>
+          <p:cNvCxnSpPr/>
+          <p:nvPr/>
+        </p:nvCxnSpPr>
+        <p:spPr>
+          <a:xfrm>
+            <a:off x="4530839" y="3655371"/>
+            <a:ext cx="900" cy="0"/>
+          </a:xfrm>
+          <a:prstGeom prst="straightConnector1">
+            <a:avLst/>
+          </a:prstGeom>
+          <a:noFill/>
+          <a:ln cap="flat" cmpd="sng" w="12700">
+            <a:solidFill>
+              <a:srgbClr val="02C39A"/>
+            </a:solidFill>
+            <a:prstDash val="dot"/>
+            <a:round/>
+            <a:headEnd len="sm" w="sm" type="none"/>
+            <a:tailEnd len="sm" w="sm" type="none"/>
+          </a:ln>
+        </p:spPr>
+      </p:cxnSp>
+      <p:cxnSp>
+        <p:nvCxnSpPr>
+          <p:cNvPr id="225" name="Google Shape;225;p28"/>
+          <p:cNvCxnSpPr/>
+          <p:nvPr/>
+        </p:nvCxnSpPr>
+        <p:spPr>
+          <a:xfrm flipH="1" rot="10800000">
+            <a:off x="4530839" y="3655451"/>
+            <a:ext cx="900" cy="759000"/>
+          </a:xfrm>
+          <a:prstGeom prst="straightConnector1">
+            <a:avLst/>
+          </a:prstGeom>
+          <a:noFill/>
+          <a:ln cap="flat" cmpd="sng" w="12700">
+            <a:solidFill>
+              <a:srgbClr val="02C39A"/>
+            </a:solidFill>
+            <a:prstDash val="dot"/>
+            <a:round/>
+            <a:headEnd len="sm" w="sm" type="none"/>
+            <a:tailEnd len="sm" w="sm" type="none"/>
+          </a:ln>
+        </p:spPr>
+      </p:cxnSp>
+      <p:cxnSp>
+        <p:nvCxnSpPr>
+          <p:cNvPr id="226" name="Google Shape;226;p28"/>
+          <p:cNvCxnSpPr/>
+          <p:nvPr/>
+        </p:nvCxnSpPr>
+        <p:spPr>
+          <a:xfrm flipH="1" rot="10800000">
+            <a:off x="4530839" y="3655230"/>
+            <a:ext cx="900" cy="1518300"/>
+          </a:xfrm>
+          <a:prstGeom prst="straightConnector1">
+            <a:avLst/>
+          </a:prstGeom>
+          <a:noFill/>
+          <a:ln cap="flat" cmpd="sng" w="12700">
+            <a:solidFill>
+              <a:srgbClr val="02C39A"/>
+            </a:solidFill>
+            <a:prstDash val="dot"/>
+            <a:round/>
+            <a:headEnd len="sm" w="sm" type="none"/>
+            <a:tailEnd len="sm" w="sm" type="none"/>
+          </a:ln>
+        </p:spPr>
+      </p:cxnSp>
+      <p:sp>
+        <p:nvSpPr>
+          <p:cNvPr id="227" name="Google Shape;227;p28"/>
+          <p:cNvSpPr/>
+          <p:nvPr/>
+        </p:nvSpPr>
+        <p:spPr>
+          <a:xfrm>
+            <a:off x="4531646" y="1835525"/>
+            <a:ext cx="2178600" cy="3639900"/>
+          </a:xfrm>
+          <a:prstGeom prst="roundRect">
+            <a:avLst>
+              <a:gd fmla="val 2963" name="adj"/>
+            </a:avLst>
+          </a:prstGeom>
+          <a:solidFill>
+            <a:srgbClr val="0B3D59"/>
+          </a:solidFill>
+          <a:ln>
+            <a:noFill/>
+          </a:ln>
+          <a:effectLst>
+            <a:outerShdw blurRad="76200" rotWithShape="0" algn="bl" dir="5400000" dist="25400">
+              <a:srgbClr val="000000">
+                <a:alpha val="20000"/>
+              </a:srgbClr>
+            </a:outerShdw>
+          </a:effectLst>
+        </p:spPr>
+        <p:txBody>
+          <a:bodyPr anchorCtr="0" anchor="ctr" bIns="91425" lIns="91425" spcFirstLastPara="1" rIns="91425" wrap="square" tIns="91425">
+            <a:noAutofit/>
+          </a:bodyPr>
+          <a:lstStyle/>
+          <a:p>
+            <a:pPr indent="0" lvl="0" marL="0" rtl="0" algn="l">
+              <a:spcBef>
+                <a:spcPts val="0"/>
+              </a:spcBef>
+              <a:spcAft>
+                <a:spcPts val="0"/>
+              </a:spcAft>
+              <a:buNone/>
+            </a:pPr>
+            <a:r>
+              <a:t/>
+            </a:r>
+            <a:endParaRPr/>
+          </a:p>
+        </p:txBody>
+      </p:sp>
+      <p:sp>
+        <p:nvSpPr>
+          <p:cNvPr id="228" name="Google Shape;228;p28"/>
+          <p:cNvSpPr/>
+          <p:nvPr/>
+        </p:nvSpPr>
+        <p:spPr>
+          <a:xfrm>
+            <a:off x="4612328" y="1835525"/>
+            <a:ext cx="2017200" cy="3639900"/>
+          </a:xfrm>
+          <a:prstGeom prst="rect">
+            <a:avLst/>
+          </a:prstGeom>
+          <a:noFill/>
+          <a:ln>
+            <a:noFill/>
+          </a:ln>
+        </p:spPr>
+        <p:txBody>
+          <a:bodyPr anchorCtr="0" anchor="ctr" bIns="45700" lIns="91425" spcFirstLastPara="1" rIns="91425" wrap="square" tIns="45700">
+            <a:noAutofit/>
+          </a:bodyPr>
+          <a:lstStyle/>
+          <a:p>
+            <a:pPr indent="0" lvl="0" marL="0" marR="0" rtl="0" algn="ctr">
+              <a:lnSpc>
+                <a:spcPct val="105000"/>
+              </a:lnSpc>
+              <a:spcBef>
+                <a:spcPts val="0"/>
+              </a:spcBef>
+              <a:spcAft>
+                <a:spcPts val="0"/>
+              </a:spcAft>
+              <a:buClr>
+                <a:srgbClr val="FFFFFF"/>
+              </a:buClr>
+              <a:buSzPts val="1400"/>
+              <a:buFont typeface="Cambria"/>
+              <a:buNone/>
+            </a:pPr>
+            <a:r>
+              <a:rPr b="1" i="0" lang="en-US" sz="1600" u="none" cap="none" strike="noStrike">
+                <a:solidFill>
+                  <a:srgbClr val="FFFFFF"/>
+                </a:solidFill>
+                <a:latin typeface="Cambria"/>
+                <a:ea typeface="Cambria"/>
+                <a:cs typeface="Cambria"/>
+                <a:sym typeface="Cambria"/>
+              </a:rPr>
+              <a:t>Cross-Modal</a:t>
+            </a:r>
+            <a:endParaRPr b="0" i="0" sz="1600" u="none" cap="none" strike="noStrike">
+              <a:solidFill>
+                <a:srgbClr val="000000"/>
+              </a:solidFill>
+              <a:latin typeface="Calibri"/>
+              <a:ea typeface="Calibri"/>
+              <a:cs typeface="Calibri"/>
+              <a:sym typeface="Calibri"/>
+            </a:endParaRPr>
+          </a:p>
+          <a:p>
+            <a:pPr indent="0" lvl="0" marL="0" marR="0" rtl="0" algn="ctr">
+              <a:lnSpc>
+                <a:spcPct val="105000"/>
+              </a:lnSpc>
+              <a:spcBef>
+                <a:spcPts val="0"/>
+              </a:spcBef>
+              <a:spcAft>
+                <a:spcPts val="0"/>
+              </a:spcAft>
+              <a:buClr>
+                <a:srgbClr val="FFFFFF"/>
+              </a:buClr>
+              <a:buSzPts val="1400"/>
+              <a:buFont typeface="Cambria"/>
+              <a:buNone/>
+            </a:pPr>
+            <a:r>
+              <a:rPr b="1" i="0" lang="en-US" sz="1600" u="none" cap="none" strike="noStrike">
+                <a:solidFill>
+                  <a:srgbClr val="FFFFFF"/>
+                </a:solidFill>
+                <a:latin typeface="Cambria"/>
+                <a:ea typeface="Cambria"/>
+                <a:cs typeface="Cambria"/>
+                <a:sym typeface="Cambria"/>
+              </a:rPr>
+              <a:t>Attention</a:t>
+            </a:r>
+            <a:endParaRPr b="0" i="0" sz="1600" u="none" cap="none" strike="noStrike">
+              <a:solidFill>
+                <a:srgbClr val="000000"/>
+              </a:solidFill>
+              <a:latin typeface="Calibri"/>
+              <a:ea typeface="Calibri"/>
+              <a:cs typeface="Calibri"/>
+              <a:sym typeface="Calibri"/>
+            </a:endParaRPr>
+          </a:p>
+          <a:p>
+            <a:pPr indent="0" lvl="0" marL="0" marR="0" rtl="0" algn="ctr">
+              <a:lnSpc>
+                <a:spcPct val="105000"/>
+              </a:lnSpc>
+              <a:spcBef>
+                <a:spcPts val="0"/>
+              </a:spcBef>
+              <a:spcAft>
+                <a:spcPts val="0"/>
+              </a:spcAft>
+              <a:buClr>
+                <a:srgbClr val="FFFFFF"/>
+              </a:buClr>
+              <a:buSzPts val="1400"/>
+              <a:buFont typeface="Cambria"/>
+              <a:buNone/>
+            </a:pPr>
+            <a:r>
+              <a:rPr b="1" i="0" lang="en-US" sz="1600" u="none" cap="none" strike="noStrike">
+                <a:solidFill>
+                  <a:srgbClr val="FFFFFF"/>
+                </a:solidFill>
+                <a:latin typeface="Cambria"/>
+                <a:ea typeface="Cambria"/>
+                <a:cs typeface="Cambria"/>
+                <a:sym typeface="Cambria"/>
+              </a:rPr>
+              <a:t>Fusion</a:t>
+            </a:r>
+            <a:endParaRPr b="0" i="0" sz="1600" u="none" cap="none" strike="noStrike">
+              <a:solidFill>
+                <a:srgbClr val="000000"/>
+              </a:solidFill>
+              <a:latin typeface="Calibri"/>
+              <a:ea typeface="Calibri"/>
+              <a:cs typeface="Calibri"/>
+              <a:sym typeface="Calibri"/>
+            </a:endParaRPr>
+          </a:p>
+          <a:p>
+            <a:pPr indent="0" lvl="0" marL="0" marR="0" rtl="0" algn="ctr">
+              <a:lnSpc>
+                <a:spcPct val="105000"/>
+              </a:lnSpc>
+              <a:spcBef>
+                <a:spcPts val="0"/>
+              </a:spcBef>
+              <a:spcAft>
+                <a:spcPts val="0"/>
+              </a:spcAft>
+              <a:buClr>
+                <a:srgbClr val="FFFFFF"/>
+              </a:buClr>
+              <a:buSzPts val="1400"/>
+              <a:buFont typeface="Cambria"/>
+              <a:buNone/>
+            </a:pPr>
+            <a:r>
+              <a:rPr b="1" i="0" lang="en-US" sz="1600" u="none" cap="none" strike="noStrike">
+                <a:solidFill>
+                  <a:srgbClr val="FFFFFF"/>
+                </a:solidFill>
+                <a:latin typeface="Cambria"/>
+                <a:ea typeface="Cambria"/>
+                <a:cs typeface="Cambria"/>
+                <a:sym typeface="Cambria"/>
+              </a:rPr>
+              <a:t>Transformer</a:t>
+            </a:r>
+            <a:endParaRPr b="0" i="0" sz="1600" u="none" cap="none" strike="noStrike">
+              <a:solidFill>
+                <a:srgbClr val="000000"/>
+              </a:solidFill>
+              <a:latin typeface="Calibri"/>
+              <a:ea typeface="Calibri"/>
+              <a:cs typeface="Calibri"/>
+              <a:sym typeface="Calibri"/>
+            </a:endParaRPr>
+          </a:p>
+        </p:txBody>
+      </p:sp>
+      <p:cxnSp>
+        <p:nvCxnSpPr>
+          <p:cNvPr id="229" name="Google Shape;229;p28"/>
+          <p:cNvCxnSpPr/>
+          <p:nvPr/>
+        </p:nvCxnSpPr>
+        <p:spPr>
+          <a:xfrm>
+            <a:off x="6710076" y="3655371"/>
+            <a:ext cx="403500" cy="0"/>
+          </a:xfrm>
+          <a:prstGeom prst="straightConnector1">
+            <a:avLst/>
+          </a:prstGeom>
+          <a:noFill/>
+          <a:ln cap="flat" cmpd="sng" w="19050">
+            <a:solidFill>
+              <a:srgbClr val="1C7293"/>
+            </a:solidFill>
+            <a:prstDash val="solid"/>
+            <a:round/>
+            <a:headEnd len="sm" w="sm" type="none"/>
+            <a:tailEnd len="med" w="med" type="triangle"/>
+          </a:ln>
+        </p:spPr>
+      </p:cxnSp>
+      <p:sp>
+        <p:nvSpPr>
+          <p:cNvPr id="230" name="Google Shape;230;p28"/>
+          <p:cNvSpPr/>
+          <p:nvPr/>
+        </p:nvSpPr>
+        <p:spPr>
+          <a:xfrm>
+            <a:off x="7113489" y="1835525"/>
+            <a:ext cx="1573200" cy="827400"/>
+          </a:xfrm>
+          <a:prstGeom prst="roundRect">
+            <a:avLst>
+              <a:gd fmla="val 7059" name="adj"/>
+            </a:avLst>
+          </a:prstGeom>
+          <a:solidFill>
+            <a:srgbClr val="FFFFFF"/>
+          </a:solidFill>
+          <a:ln cap="flat" cmpd="sng" w="15875">
+            <a:solidFill>
+              <a:srgbClr val="02C39A"/>
+            </a:solidFill>
+            <a:prstDash val="solid"/>
+            <a:round/>
+            <a:headEnd len="sm" w="sm" type="none"/>
+            <a:tailEnd len="sm" w="sm" type="none"/>
+          </a:ln>
+        </p:spPr>
+        <p:txBody>
+          <a:bodyPr anchorCtr="0" anchor="ctr" bIns="91425" lIns="91425" spcFirstLastPara="1" rIns="91425" wrap="square" tIns="91425">
+            <a:noAutofit/>
+          </a:bodyPr>
+          <a:lstStyle/>
+          <a:p>
+            <a:pPr indent="0" lvl="0" marL="0" rtl="0" algn="l">
+              <a:spcBef>
+                <a:spcPts val="0"/>
+              </a:spcBef>
+              <a:spcAft>
+                <a:spcPts val="0"/>
+              </a:spcAft>
+              <a:buNone/>
+            </a:pPr>
+            <a:r>
+              <a:t/>
+            </a:r>
+            <a:endParaRPr/>
+          </a:p>
+        </p:txBody>
+      </p:sp>
+      <p:sp>
+        <p:nvSpPr>
+          <p:cNvPr id="231" name="Google Shape;231;p28"/>
+          <p:cNvSpPr/>
+          <p:nvPr/>
+        </p:nvSpPr>
+        <p:spPr>
+          <a:xfrm>
+            <a:off x="7113489" y="1835525"/>
+            <a:ext cx="1573200" cy="827400"/>
+          </a:xfrm>
+          <a:prstGeom prst="rect">
+            <a:avLst/>
+          </a:prstGeom>
+          <a:noFill/>
+          <a:ln>
+            <a:noFill/>
+          </a:ln>
+        </p:spPr>
+        <p:txBody>
+          <a:bodyPr anchorCtr="0" anchor="ctr" bIns="45700" lIns="91425" spcFirstLastPara="1" rIns="91425" wrap="square" tIns="45700">
+            <a:noAutofit/>
+          </a:bodyPr>
+          <a:lstStyle/>
+          <a:p>
+            <a:pPr indent="0" lvl="0" marL="0" marR="0" rtl="0" algn="ctr">
+              <a:lnSpc>
+                <a:spcPct val="100000"/>
+              </a:lnSpc>
+              <a:spcBef>
+                <a:spcPts val="0"/>
+              </a:spcBef>
+              <a:spcAft>
+                <a:spcPts val="0"/>
+              </a:spcAft>
+              <a:buClr>
+                <a:srgbClr val="0B3D59"/>
+              </a:buClr>
+              <a:buSzPts val="1000"/>
+              <a:buFont typeface="Calibri"/>
+              <a:buNone/>
+            </a:pPr>
+            <a:r>
+              <a:rPr b="1" i="0" lang="en-US" sz="1600" u="none" cap="none" strike="noStrike">
+                <a:solidFill>
+                  <a:srgbClr val="0B3D59"/>
+                </a:solidFill>
+                <a:latin typeface="Calibri"/>
+                <a:ea typeface="Calibri"/>
+                <a:cs typeface="Calibri"/>
+                <a:sym typeface="Calibri"/>
+              </a:rPr>
+              <a:t>Risk score</a:t>
+            </a:r>
+            <a:endParaRPr b="0" i="0" sz="1600" u="none" cap="none" strike="noStrike">
+              <a:solidFill>
+                <a:srgbClr val="000000"/>
+              </a:solidFill>
+              <a:latin typeface="Calibri"/>
+              <a:ea typeface="Calibri"/>
+              <a:cs typeface="Calibri"/>
+              <a:sym typeface="Calibri"/>
+            </a:endParaRPr>
+          </a:p>
+        </p:txBody>
+      </p:sp>
+      <p:sp>
+        <p:nvSpPr>
+          <p:cNvPr id="232" name="Google Shape;232;p28"/>
+          <p:cNvSpPr/>
+          <p:nvPr/>
+        </p:nvSpPr>
+        <p:spPr>
+          <a:xfrm>
+            <a:off x="7113489" y="2784375"/>
+            <a:ext cx="1573200" cy="827400"/>
+          </a:xfrm>
+          <a:prstGeom prst="roundRect">
+            <a:avLst>
+              <a:gd fmla="val 7059" name="adj"/>
+            </a:avLst>
+          </a:prstGeom>
+          <a:solidFill>
+            <a:srgbClr val="FFFFFF"/>
+          </a:solidFill>
+          <a:ln cap="flat" cmpd="sng" w="15875">
+            <a:solidFill>
+              <a:srgbClr val="02C39A"/>
+            </a:solidFill>
+            <a:prstDash val="solid"/>
+            <a:round/>
+            <a:headEnd len="sm" w="sm" type="none"/>
+            <a:tailEnd len="sm" w="sm" type="none"/>
+          </a:ln>
+        </p:spPr>
+        <p:txBody>
+          <a:bodyPr anchorCtr="0" anchor="ctr" bIns="91425" lIns="91425" spcFirstLastPara="1" rIns="91425" wrap="square" tIns="91425">
+            <a:noAutofit/>
+          </a:bodyPr>
+          <a:lstStyle/>
+          <a:p>
+            <a:pPr indent="0" lvl="0" marL="0" rtl="0" algn="l">
+              <a:spcBef>
+                <a:spcPts val="0"/>
+              </a:spcBef>
+              <a:spcAft>
+                <a:spcPts val="0"/>
+              </a:spcAft>
+              <a:buNone/>
+            </a:pPr>
+            <a:r>
+              <a:t/>
+            </a:r>
+            <a:endParaRPr/>
+          </a:p>
+        </p:txBody>
+      </p:sp>
+      <p:sp>
+        <p:nvSpPr>
+          <p:cNvPr id="233" name="Google Shape;233;p28"/>
+          <p:cNvSpPr/>
+          <p:nvPr/>
+        </p:nvSpPr>
+        <p:spPr>
+          <a:xfrm>
+            <a:off x="7113489" y="2784375"/>
+            <a:ext cx="1573200" cy="827400"/>
+          </a:xfrm>
+          <a:prstGeom prst="rect">
+            <a:avLst/>
+          </a:prstGeom>
+          <a:noFill/>
+          <a:ln>
+            <a:noFill/>
+          </a:ln>
+        </p:spPr>
+        <p:txBody>
+          <a:bodyPr anchorCtr="0" anchor="ctr" bIns="45700" lIns="91425" spcFirstLastPara="1" rIns="91425" wrap="square" tIns="45700">
+            <a:noAutofit/>
+          </a:bodyPr>
+          <a:lstStyle/>
+          <a:p>
+            <a:pPr indent="0" lvl="0" marL="0" marR="0" rtl="0" algn="ctr">
+              <a:lnSpc>
+                <a:spcPct val="100000"/>
+              </a:lnSpc>
+              <a:spcBef>
+                <a:spcPts val="0"/>
+              </a:spcBef>
+              <a:spcAft>
+                <a:spcPts val="0"/>
+              </a:spcAft>
+              <a:buClr>
+                <a:srgbClr val="0B3D59"/>
+              </a:buClr>
+              <a:buSzPts val="1000"/>
+              <a:buFont typeface="Calibri"/>
+              <a:buNone/>
+            </a:pPr>
+            <a:r>
+              <a:rPr b="1" i="0" lang="en-US" sz="1600" u="none" cap="none" strike="noStrike">
+                <a:solidFill>
+                  <a:srgbClr val="0B3D59"/>
+                </a:solidFill>
+                <a:latin typeface="Calibri"/>
+                <a:ea typeface="Calibri"/>
+                <a:cs typeface="Calibri"/>
+                <a:sym typeface="Calibri"/>
+              </a:rPr>
+              <a:t>Uncertainty</a:t>
+            </a:r>
+            <a:endParaRPr b="0" i="0" sz="1600" u="none" cap="none" strike="noStrike">
+              <a:solidFill>
+                <a:srgbClr val="000000"/>
+              </a:solidFill>
+              <a:latin typeface="Calibri"/>
+              <a:ea typeface="Calibri"/>
+              <a:cs typeface="Calibri"/>
+              <a:sym typeface="Calibri"/>
+            </a:endParaRPr>
+          </a:p>
+          <a:p>
+            <a:pPr indent="0" lvl="0" marL="0" marR="0" rtl="0" algn="ctr">
+              <a:lnSpc>
+                <a:spcPct val="100000"/>
+              </a:lnSpc>
+              <a:spcBef>
+                <a:spcPts val="0"/>
+              </a:spcBef>
+              <a:spcAft>
+                <a:spcPts val="0"/>
+              </a:spcAft>
+              <a:buClr>
+                <a:srgbClr val="0B3D59"/>
+              </a:buClr>
+              <a:buSzPts val="1000"/>
+              <a:buFont typeface="Calibri"/>
+              <a:buNone/>
+            </a:pPr>
+            <a:r>
+              <a:rPr b="1" i="0" lang="en-US" sz="1600" u="none" cap="none" strike="noStrike">
+                <a:solidFill>
+                  <a:srgbClr val="0B3D59"/>
+                </a:solidFill>
+                <a:latin typeface="Calibri"/>
+                <a:ea typeface="Calibri"/>
+                <a:cs typeface="Calibri"/>
+                <a:sym typeface="Calibri"/>
+              </a:rPr>
+              <a:t>(MC Dropout)</a:t>
+            </a:r>
+            <a:endParaRPr b="0" i="0" sz="1600" u="none" cap="none" strike="noStrike">
+              <a:solidFill>
+                <a:srgbClr val="000000"/>
+              </a:solidFill>
+              <a:latin typeface="Calibri"/>
+              <a:ea typeface="Calibri"/>
+              <a:cs typeface="Calibri"/>
+              <a:sym typeface="Calibri"/>
+            </a:endParaRPr>
+          </a:p>
+        </p:txBody>
+      </p:sp>
+      <p:sp>
+        <p:nvSpPr>
+          <p:cNvPr id="234" name="Google Shape;234;p28"/>
+          <p:cNvSpPr/>
+          <p:nvPr/>
+        </p:nvSpPr>
+        <p:spPr>
+          <a:xfrm>
+            <a:off x="7113489" y="3733225"/>
+            <a:ext cx="1573200" cy="827400"/>
+          </a:xfrm>
+          <a:prstGeom prst="roundRect">
+            <a:avLst>
+              <a:gd fmla="val 7059" name="adj"/>
+            </a:avLst>
+          </a:prstGeom>
+          <a:solidFill>
+            <a:srgbClr val="FFFFFF"/>
+          </a:solidFill>
+          <a:ln cap="flat" cmpd="sng" w="15875">
+            <a:solidFill>
+              <a:srgbClr val="02C39A"/>
+            </a:solidFill>
+            <a:prstDash val="solid"/>
+            <a:round/>
+            <a:headEnd len="sm" w="sm" type="none"/>
+            <a:tailEnd len="sm" w="sm" type="none"/>
+          </a:ln>
+        </p:spPr>
+        <p:txBody>
+          <a:bodyPr anchorCtr="0" anchor="ctr" bIns="91425" lIns="91425" spcFirstLastPara="1" rIns="91425" wrap="square" tIns="91425">
+            <a:noAutofit/>
+          </a:bodyPr>
+          <a:lstStyle/>
+          <a:p>
+            <a:pPr indent="0" lvl="0" marL="0" rtl="0" algn="l">
+              <a:spcBef>
+                <a:spcPts val="0"/>
+              </a:spcBef>
+              <a:spcAft>
+                <a:spcPts val="0"/>
+              </a:spcAft>
+              <a:buNone/>
+            </a:pPr>
+            <a:r>
+              <a:t/>
+            </a:r>
+            <a:endParaRPr/>
+          </a:p>
+        </p:txBody>
+      </p:sp>
+      <p:sp>
+        <p:nvSpPr>
+          <p:cNvPr id="235" name="Google Shape;235;p28"/>
+          <p:cNvSpPr/>
+          <p:nvPr/>
+        </p:nvSpPr>
+        <p:spPr>
+          <a:xfrm>
+            <a:off x="7113489" y="3733225"/>
+            <a:ext cx="1573200" cy="827400"/>
+          </a:xfrm>
+          <a:prstGeom prst="rect">
+            <a:avLst/>
+          </a:prstGeom>
+          <a:noFill/>
+          <a:ln>
+            <a:noFill/>
+          </a:ln>
+        </p:spPr>
+        <p:txBody>
+          <a:bodyPr anchorCtr="0" anchor="ctr" bIns="45700" lIns="91425" spcFirstLastPara="1" rIns="91425" wrap="square" tIns="45700">
+            <a:noAutofit/>
+          </a:bodyPr>
+          <a:lstStyle/>
+          <a:p>
+            <a:pPr indent="0" lvl="0" marL="0" marR="0" rtl="0" algn="ctr">
+              <a:lnSpc>
+                <a:spcPct val="100000"/>
+              </a:lnSpc>
+              <a:spcBef>
+                <a:spcPts val="0"/>
+              </a:spcBef>
+              <a:spcAft>
+                <a:spcPts val="0"/>
+              </a:spcAft>
+              <a:buClr>
+                <a:srgbClr val="0B3D59"/>
+              </a:buClr>
+              <a:buSzPts val="1000"/>
+              <a:buFont typeface="Calibri"/>
+              <a:buNone/>
+            </a:pPr>
+            <a:r>
+              <a:rPr b="1" lang="en-US" sz="1600">
+                <a:solidFill>
+                  <a:srgbClr val="0B3D59"/>
+                </a:solidFill>
+                <a:latin typeface="Calibri"/>
+                <a:ea typeface="Calibri"/>
+                <a:cs typeface="Calibri"/>
+                <a:sym typeface="Calibri"/>
+              </a:rPr>
+              <a:t>Attention map</a:t>
+            </a:r>
+            <a:endParaRPr b="0" i="0" sz="1600" u="none" cap="none" strike="noStrike">
+              <a:solidFill>
+                <a:srgbClr val="000000"/>
+              </a:solidFill>
+              <a:latin typeface="Calibri"/>
+              <a:ea typeface="Calibri"/>
+              <a:cs typeface="Calibri"/>
+              <a:sym typeface="Calibri"/>
+            </a:endParaRPr>
+          </a:p>
+        </p:txBody>
+      </p:sp>
+      <p:sp>
+        <p:nvSpPr>
+          <p:cNvPr id="236" name="Google Shape;236;p28"/>
+          <p:cNvSpPr/>
+          <p:nvPr/>
+        </p:nvSpPr>
+        <p:spPr>
+          <a:xfrm>
+            <a:off x="7113489" y="4682075"/>
+            <a:ext cx="1573200" cy="827400"/>
+          </a:xfrm>
+          <a:prstGeom prst="roundRect">
+            <a:avLst>
+              <a:gd fmla="val 7059" name="adj"/>
+            </a:avLst>
+          </a:prstGeom>
+          <a:solidFill>
+            <a:srgbClr val="FFFFFF"/>
+          </a:solidFill>
+          <a:ln cap="flat" cmpd="sng" w="15875">
+            <a:solidFill>
+              <a:srgbClr val="02C39A"/>
+            </a:solidFill>
+            <a:prstDash val="solid"/>
+            <a:round/>
+            <a:headEnd len="sm" w="sm" type="none"/>
+            <a:tailEnd len="sm" w="sm" type="none"/>
+          </a:ln>
+        </p:spPr>
+        <p:txBody>
+          <a:bodyPr anchorCtr="0" anchor="ctr" bIns="91425" lIns="91425" spcFirstLastPara="1" rIns="91425" wrap="square" tIns="91425">
+            <a:noAutofit/>
+          </a:bodyPr>
+          <a:lstStyle/>
+          <a:p>
+            <a:pPr indent="0" lvl="0" marL="0" rtl="0" algn="l">
+              <a:spcBef>
+                <a:spcPts val="0"/>
+              </a:spcBef>
+              <a:spcAft>
+                <a:spcPts val="0"/>
+              </a:spcAft>
+              <a:buNone/>
+            </a:pPr>
+            <a:r>
+              <a:t/>
+            </a:r>
+            <a:endParaRPr/>
+          </a:p>
+        </p:txBody>
+      </p:sp>
+      <p:sp>
+        <p:nvSpPr>
+          <p:cNvPr id="237" name="Google Shape;237;p28"/>
+          <p:cNvSpPr/>
+          <p:nvPr/>
+        </p:nvSpPr>
+        <p:spPr>
+          <a:xfrm>
+            <a:off x="7113489" y="4682075"/>
+            <a:ext cx="1573200" cy="827400"/>
+          </a:xfrm>
+          <a:prstGeom prst="rect">
+            <a:avLst/>
+          </a:prstGeom>
+          <a:noFill/>
+          <a:ln>
+            <a:noFill/>
+          </a:ln>
+        </p:spPr>
+        <p:txBody>
+          <a:bodyPr anchorCtr="0" anchor="ctr" bIns="45700" lIns="91425" spcFirstLastPara="1" rIns="91425" wrap="square" tIns="45700">
+            <a:noAutofit/>
+          </a:bodyPr>
+          <a:lstStyle/>
+          <a:p>
+            <a:pPr indent="0" lvl="0" marL="0" marR="0" rtl="0" algn="ctr">
+              <a:lnSpc>
+                <a:spcPct val="100000"/>
+              </a:lnSpc>
+              <a:spcBef>
+                <a:spcPts val="0"/>
+              </a:spcBef>
+              <a:spcAft>
+                <a:spcPts val="0"/>
+              </a:spcAft>
+              <a:buClr>
+                <a:srgbClr val="0B3D59"/>
+              </a:buClr>
+              <a:buSzPts val="1000"/>
+              <a:buFont typeface="Calibri"/>
+              <a:buNone/>
+            </a:pPr>
+            <a:r>
+              <a:rPr b="1" i="0" lang="en-US" sz="1600" u="none" cap="none" strike="noStrike">
+                <a:solidFill>
+                  <a:srgbClr val="0B3D59"/>
+                </a:solidFill>
+                <a:latin typeface="Calibri"/>
+                <a:ea typeface="Calibri"/>
+                <a:cs typeface="Calibri"/>
+                <a:sym typeface="Calibri"/>
+              </a:rPr>
+              <a:t>LLM patient</a:t>
+            </a:r>
+            <a:endParaRPr b="0" i="0" sz="1600" u="none" cap="none" strike="noStrike">
+              <a:solidFill>
+                <a:srgbClr val="000000"/>
+              </a:solidFill>
+              <a:latin typeface="Calibri"/>
+              <a:ea typeface="Calibri"/>
+              <a:cs typeface="Calibri"/>
+              <a:sym typeface="Calibri"/>
+            </a:endParaRPr>
+          </a:p>
+          <a:p>
+            <a:pPr indent="0" lvl="0" marL="0" marR="0" rtl="0" algn="ctr">
+              <a:lnSpc>
+                <a:spcPct val="100000"/>
+              </a:lnSpc>
+              <a:spcBef>
+                <a:spcPts val="0"/>
+              </a:spcBef>
+              <a:spcAft>
+                <a:spcPts val="0"/>
+              </a:spcAft>
+              <a:buClr>
+                <a:srgbClr val="0B3D59"/>
+              </a:buClr>
+              <a:buSzPts val="1000"/>
+              <a:buFont typeface="Calibri"/>
+              <a:buNone/>
+            </a:pPr>
+            <a:r>
+              <a:rPr b="1" i="0" lang="en-US" sz="1600" u="none" cap="none" strike="noStrike">
+                <a:solidFill>
+                  <a:srgbClr val="0B3D59"/>
+                </a:solidFill>
+                <a:latin typeface="Calibri"/>
+                <a:ea typeface="Calibri"/>
+                <a:cs typeface="Calibri"/>
+                <a:sym typeface="Calibri"/>
+              </a:rPr>
+              <a:t>report</a:t>
+            </a:r>
+            <a:endParaRPr b="0" i="0" sz="1600" u="none" cap="none" strike="noStrike">
+              <a:solidFill>
+                <a:srgbClr val="000000"/>
+              </a:solidFill>
+              <a:latin typeface="Calibri"/>
+              <a:ea typeface="Calibri"/>
+              <a:cs typeface="Calibri"/>
+              <a:sym typeface="Calibri"/>
+            </a:endParaRPr>
+          </a:p>
+        </p:txBody>
+      </p:sp>
+    </p:spTree>
+  </p:cSld>
+  <p:clrMapOvr>
+    <a:masterClrMapping/>
+  </p:clrMapOvr>
+</p:sld>
+</file>
+
+<file path=ppt/slides/slide17.xml><?xml version="1.0" encoding="utf-8"?>
+<p:sld xmlns:a="http://schemas.openxmlformats.org/drawingml/2006/main" xmlns:r="http://schemas.openxmlformats.org/officeDocument/2006/relationships" xmlns:mc="http://schemas.openxmlformats.org/markup-compatibility/2006" xmlns:mv="urn:schemas-microsoft-com:mac:vml" xmlns:p="http://schemas.openxmlformats.org/presentationml/2006/main" xmlns:c="http://schemas.openxmlformats.org/drawingml/2006/chart" xmlns:dgm="http://schemas.openxmlformats.org/drawingml/2006/diagram" xmlns:o="urn:schemas-microsoft-com:office:office" xmlns:v="urn:schemas-microsoft-com:vml" xmlns:pvml="urn:schemas-microsoft-com:office:powerpoint" xmlns:com="http://schemas.openxmlformats.org/drawingml/2006/compatibility" xmlns:p14="http://schemas.microsoft.com/office/powerpoint/2010/main" xmlns:p15="http://schemas.microsoft.com/office/powerpoint/2012/main" xmlns:ahyp="http://schemas.microsoft.com/office/drawing/2018/hyperlinkcolor">
+  <p:cSld>
+    <p:spTree>
+      <p:nvGrpSpPr>
+        <p:cNvPr id="241" name="Shape 241"/>
+        <p:cNvGrpSpPr/>
+        <p:nvPr/>
+      </p:nvGrpSpPr>
+      <p:grpSpPr>
+        <a:xfrm>
+          <a:off x="0" y="0"/>
+          <a:ext cx="0" cy="0"/>
+          <a:chOff x="0" y="0"/>
+          <a:chExt cx="0" cy="0"/>
+        </a:xfrm>
+      </p:grpSpPr>
+      <p:sp>
+        <p:nvSpPr>
+          <p:cNvPr id="242" name="Google Shape;242;p29"/>
           <p:cNvSpPr txBox="1"/>
           <p:nvPr>
             <p:ph type="title"/>
@@ -17356,16 +21194,24 @@
               <a:buNone/>
             </a:pPr>
             <a:r>
-              <a:rPr lang="en-US"/>
+              <a:rPr lang="en-US">
+                <a:solidFill>
+                  <a:srgbClr val="0B3D59"/>
+                </a:solidFill>
+              </a:rPr>
               <a:t>PROJECT SCOPE</a:t>
             </a:r>
-            <a:endParaRPr/>
+            <a:endParaRPr>
+              <a:solidFill>
+                <a:srgbClr val="0B3D59"/>
+              </a:solidFill>
+            </a:endParaRPr>
           </a:p>
         </p:txBody>
       </p:sp>
       <p:sp>
         <p:nvSpPr>
-          <p:cNvPr id="184" name="Google Shape;184;p28"/>
+          <p:cNvPr id="243" name="Google Shape;243;p29"/>
           <p:cNvSpPr txBox="1"/>
           <p:nvPr>
             <p:ph idx="1" type="body"/>
@@ -17422,12 +21268,12 @@
 </p:sld>
 </file>
 
-<file path=ppt/slides/slide17.xml><?xml version="1.0" encoding="utf-8"?>
+<file path=ppt/slides/slide18.xml><?xml version="1.0" encoding="utf-8"?>
 <p:sld xmlns:a="http://schemas.openxmlformats.org/drawingml/2006/main" xmlns:r="http://schemas.openxmlformats.org/officeDocument/2006/relationships" xmlns:mc="http://schemas.openxmlformats.org/markup-compatibility/2006" xmlns:mv="urn:schemas-microsoft-com:mac:vml" xmlns:p="http://schemas.openxmlformats.org/presentationml/2006/main" xmlns:c="http://schemas.openxmlformats.org/drawingml/2006/chart" xmlns:dgm="http://schemas.openxmlformats.org/drawingml/2006/diagram" xmlns:o="urn:schemas-microsoft-com:office:office" xmlns:v="urn:schemas-microsoft-com:vml" xmlns:pvml="urn:schemas-microsoft-com:office:powerpoint" xmlns:com="http://schemas.openxmlformats.org/drawingml/2006/compatibility" xmlns:p14="http://schemas.microsoft.com/office/powerpoint/2010/main" xmlns:p15="http://schemas.microsoft.com/office/powerpoint/2012/main" xmlns:ahyp="http://schemas.microsoft.com/office/drawing/2018/hyperlinkcolor">
   <p:cSld>
     <p:spTree>
       <p:nvGrpSpPr>
-        <p:cNvPr id="188" name="Shape 188"/>
+        <p:cNvPr id="247" name="Shape 247"/>
         <p:cNvGrpSpPr/>
         <p:nvPr/>
       </p:nvGrpSpPr>
@@ -17441,7 +21287,7 @@
       </p:grpSpPr>
       <p:sp>
         <p:nvSpPr>
-          <p:cNvPr id="189" name="Google Shape;189;p29"/>
+          <p:cNvPr id="248" name="Google Shape;248;p30"/>
           <p:cNvSpPr txBox="1"/>
           <p:nvPr>
             <p:ph type="title"/>
@@ -17467,9 +21313,6 @@
           <a:lstStyle/>
           <a:p>
             <a:pPr indent="0" lvl="0" marL="0" rtl="0" algn="ctr">
-              <a:lnSpc>
-                <a:spcPct val="100000"/>
-              </a:lnSpc>
               <a:spcBef>
                 <a:spcPts val="0"/>
               </a:spcBef>
@@ -17480,7 +21323,12 @@
               <a:buNone/>
             </a:pPr>
             <a:r>
-              <a:t/>
+              <a:rPr b="1" lang="en-US" sz="4000">
+                <a:solidFill>
+                  <a:srgbClr val="0B3D59"/>
+                </a:solidFill>
+              </a:rPr>
+              <a:t>PROJECT SCOPE</a:t>
             </a:r>
             <a:endParaRPr/>
           </a:p>
@@ -17488,7 +21336,7 @@
       </p:sp>
       <p:sp>
         <p:nvSpPr>
-          <p:cNvPr id="190" name="Google Shape;190;p29"/>
+          <p:cNvPr id="249" name="Google Shape;249;p30"/>
           <p:cNvSpPr txBox="1"/>
           <p:nvPr>
             <p:ph idx="1" type="body"/>
@@ -17496,8 +21344,8 @@
         </p:nvSpPr>
         <p:spPr>
           <a:xfrm>
-            <a:off x="457200" y="1600200"/>
-            <a:ext cx="8229600" cy="4525963"/>
+            <a:off x="457200" y="1268826"/>
+            <a:ext cx="8229600" cy="4526100"/>
           </a:xfrm>
           <a:prstGeom prst="rect">
             <a:avLst/>
@@ -17513,26 +21361,164 @@
           </a:bodyPr>
           <a:lstStyle/>
           <a:p>
-            <a:pPr indent="-139700" lvl="0" marL="342900" rtl="0" algn="l">
-              <a:lnSpc>
-                <a:spcPct val="100000"/>
-              </a:lnSpc>
-              <a:spcBef>
-                <a:spcPts val="0"/>
-              </a:spcBef>
-              <a:spcAft>
-                <a:spcPts val="0"/>
-              </a:spcAft>
-              <a:buClr>
-                <a:schemeClr val="dk1"/>
-              </a:buClr>
-              <a:buSzPts val="3200"/>
-              <a:buNone/>
+            <a:pPr indent="-355600" lvl="0" marL="457200" rtl="0" algn="l">
+              <a:lnSpc>
+                <a:spcPct val="150000"/>
+              </a:lnSpc>
+              <a:spcBef>
+                <a:spcPts val="0"/>
+              </a:spcBef>
+              <a:spcAft>
+                <a:spcPts val="0"/>
+              </a:spcAft>
+              <a:buSzPts val="2000"/>
+              <a:buChar char="○"/>
             </a:pPr>
             <a:r>
-              <a:t/>
+              <a:rPr lang="en-US" sz="2000"/>
+              <a:t>Image capture and preprocessing for multiple body surfaces: oral cavity, fingernails, conjunctiva, tongue, palm</a:t>
             </a:r>
-            <a:endParaRPr/>
+            <a:endParaRPr sz="2000"/>
+          </a:p>
+          <a:p>
+            <a:pPr indent="-355600" lvl="0" marL="457200" rtl="0" algn="l">
+              <a:lnSpc>
+                <a:spcPct val="150000"/>
+              </a:lnSpc>
+              <a:spcBef>
+                <a:spcPts val="0"/>
+              </a:spcBef>
+              <a:spcAft>
+                <a:spcPts val="0"/>
+              </a:spcAft>
+              <a:buSzPts val="2000"/>
+              <a:buChar char="○"/>
+            </a:pPr>
+            <a:r>
+              <a:rPr lang="en-US" sz="2000"/>
+              <a:t>Five specialist ViT-B/16 encoders, one per surface</a:t>
+            </a:r>
+            <a:endParaRPr sz="2000"/>
+          </a:p>
+          <a:p>
+            <a:pPr indent="-355600" lvl="0" marL="457200" rtl="0" algn="l">
+              <a:lnSpc>
+                <a:spcPct val="150000"/>
+              </a:lnSpc>
+              <a:spcBef>
+                <a:spcPts val="0"/>
+              </a:spcBef>
+              <a:spcAft>
+                <a:spcPts val="0"/>
+              </a:spcAft>
+              <a:buSzPts val="2000"/>
+              <a:buChar char="○"/>
+            </a:pPr>
+            <a:r>
+              <a:rPr lang="en-US" sz="2000"/>
+              <a:t>Custom cross-modal attention fusion transformer, built in PyTorch</a:t>
+            </a:r>
+            <a:endParaRPr sz="2000"/>
+          </a:p>
+          <a:p>
+            <a:pPr indent="-355600" lvl="0" marL="457200" rtl="0" algn="l">
+              <a:lnSpc>
+                <a:spcPct val="150000"/>
+              </a:lnSpc>
+              <a:spcBef>
+                <a:spcPts val="0"/>
+              </a:spcBef>
+              <a:spcAft>
+                <a:spcPts val="0"/>
+              </a:spcAft>
+              <a:buSzPts val="2000"/>
+              <a:buChar char="○"/>
+            </a:pPr>
+            <a:r>
+              <a:rPr lang="en-US" sz="2000"/>
+              <a:t>Monte Carlo Dropout for uncertainty estimation</a:t>
+            </a:r>
+            <a:endParaRPr sz="2000"/>
+          </a:p>
+          <a:p>
+            <a:pPr indent="-355600" lvl="0" marL="457200" rtl="0" algn="l">
+              <a:lnSpc>
+                <a:spcPct val="150000"/>
+              </a:lnSpc>
+              <a:spcBef>
+                <a:spcPts val="0"/>
+              </a:spcBef>
+              <a:spcAft>
+                <a:spcPts val="0"/>
+              </a:spcAft>
+              <a:buSzPts val="2000"/>
+              <a:buChar char="○"/>
+            </a:pPr>
+            <a:r>
+              <a:rPr lang="en-US" sz="2000"/>
+              <a:t>Attention-based explainability </a:t>
+            </a:r>
+            <a:endParaRPr sz="2000"/>
+          </a:p>
+          <a:p>
+            <a:pPr indent="-355600" lvl="0" marL="457200" rtl="0" algn="l">
+              <a:lnSpc>
+                <a:spcPct val="150000"/>
+              </a:lnSpc>
+              <a:spcBef>
+                <a:spcPts val="0"/>
+              </a:spcBef>
+              <a:spcAft>
+                <a:spcPts val="0"/>
+              </a:spcAft>
+              <a:buSzPts val="2000"/>
+              <a:buChar char="○"/>
+            </a:pPr>
+            <a:r>
+              <a:rPr lang="en-US" sz="2000"/>
+              <a:t>Missing-modality robustness handling</a:t>
+            </a:r>
+            <a:endParaRPr sz="2000"/>
+          </a:p>
+          <a:p>
+            <a:pPr indent="-355600" lvl="0" marL="457200" rtl="0" algn="l">
+              <a:lnSpc>
+                <a:spcPct val="150000"/>
+              </a:lnSpc>
+              <a:spcBef>
+                <a:spcPts val="0"/>
+              </a:spcBef>
+              <a:spcAft>
+                <a:spcPts val="0"/>
+              </a:spcAft>
+              <a:buSzPts val="2000"/>
+              <a:buChar char="○"/>
+            </a:pPr>
+            <a:r>
+              <a:rPr lang="en-US" sz="2000"/>
+              <a:t>LLM-generated, patient-readable summary report</a:t>
+            </a:r>
+            <a:endParaRPr sz="2000"/>
+          </a:p>
+          <a:p>
+            <a:pPr indent="-355600" lvl="0" marL="457200" rtl="0" algn="l">
+              <a:lnSpc>
+                <a:spcPct val="150000"/>
+              </a:lnSpc>
+              <a:spcBef>
+                <a:spcPts val="0"/>
+              </a:spcBef>
+              <a:spcAft>
+                <a:spcPts val="0"/>
+              </a:spcAft>
+              <a:buSzPts val="2000"/>
+              <a:buChar char="○"/>
+            </a:pPr>
+            <a:r>
+              <a:rPr lang="en-US" sz="2000"/>
+              <a:t>Evaluation on public datasets: Piyarathne, Flügge et al. 2023 (Berlin OSCC), Rabinovici-Cohen et al. 2024</a:t>
+            </a:r>
+            <a:endParaRPr sz="2000"/>
           </a:p>
         </p:txBody>
       </p:sp>
@@ -17544,12 +21530,12 @@
 </p:sld>
 </file>
 
-<file path=ppt/slides/slide18.xml><?xml version="1.0" encoding="utf-8"?>
+<file path=ppt/slides/slide19.xml><?xml version="1.0" encoding="utf-8"?>
 <p:sld xmlns:a="http://schemas.openxmlformats.org/drawingml/2006/main" xmlns:r="http://schemas.openxmlformats.org/officeDocument/2006/relationships" xmlns:mc="http://schemas.openxmlformats.org/markup-compatibility/2006" xmlns:mv="urn:schemas-microsoft-com:mac:vml" xmlns:p="http://schemas.openxmlformats.org/presentationml/2006/main" xmlns:c="http://schemas.openxmlformats.org/drawingml/2006/chart" xmlns:dgm="http://schemas.openxmlformats.org/drawingml/2006/diagram" xmlns:o="urn:schemas-microsoft-com:office:office" xmlns:v="urn:schemas-microsoft-com:vml" xmlns:pvml="urn:schemas-microsoft-com:office:powerpoint" xmlns:com="http://schemas.openxmlformats.org/drawingml/2006/compatibility" xmlns:p14="http://schemas.microsoft.com/office/powerpoint/2010/main" xmlns:p15="http://schemas.microsoft.com/office/powerpoint/2012/main" xmlns:ahyp="http://schemas.microsoft.com/office/drawing/2018/hyperlinkcolor">
   <p:cSld>
     <p:spTree>
       <p:nvGrpSpPr>
-        <p:cNvPr id="194" name="Shape 194"/>
+        <p:cNvPr id="253" name="Shape 253"/>
         <p:cNvGrpSpPr/>
         <p:nvPr/>
       </p:nvGrpSpPr>
@@ -17563,7 +21549,7 @@
       </p:grpSpPr>
       <p:sp>
         <p:nvSpPr>
-          <p:cNvPr id="195" name="Google Shape;195;p30"/>
+          <p:cNvPr id="254" name="Google Shape;254;p31"/>
           <p:cNvSpPr txBox="1"/>
           <p:nvPr>
             <p:ph type="title"/>
@@ -17572,7 +21558,7 @@
         <p:spPr>
           <a:xfrm>
             <a:off x="722313" y="4406900"/>
-            <a:ext cx="7772400" cy="1362075"/>
+            <a:ext cx="7772400" cy="1362000"/>
           </a:xfrm>
           <a:prstGeom prst="rect">
             <a:avLst/>
@@ -17602,16 +21588,32 @@
               <a:buNone/>
             </a:pPr>
             <a:r>
-              <a:rPr lang="en-US"/>
-              <a:t>CONSTRAINTS AND LIMITATIONS</a:t>
+              <a:rPr lang="en-US">
+                <a:solidFill>
+                  <a:srgbClr val="0B3D59"/>
+                </a:solidFill>
+              </a:rPr>
+              <a:t>Work Breakdown </a:t>
             </a:r>
-            <a:endParaRPr/>
+            <a:r>
+              <a:rPr lang="en-US">
+                <a:solidFill>
+                  <a:srgbClr val="0B3D59"/>
+                </a:solidFill>
+              </a:rPr>
+              <a:t>&amp; Structure</a:t>
+            </a:r>
+            <a:endParaRPr>
+              <a:solidFill>
+                <a:srgbClr val="0B3D59"/>
+              </a:solidFill>
+            </a:endParaRPr>
           </a:p>
         </p:txBody>
       </p:sp>
       <p:sp>
         <p:nvSpPr>
-          <p:cNvPr id="196" name="Google Shape;196;p30"/>
+          <p:cNvPr id="255" name="Google Shape;255;p31"/>
           <p:cNvSpPr txBox="1"/>
           <p:nvPr>
             <p:ph idx="1" type="body"/>
@@ -17620,7 +21622,7 @@
         <p:spPr>
           <a:xfrm>
             <a:off x="722313" y="2906713"/>
-            <a:ext cx="7772400" cy="1500187"/>
+            <a:ext cx="7772400" cy="1500300"/>
           </a:xfrm>
           <a:prstGeom prst="rect">
             <a:avLst/>
@@ -17651,128 +21653,6 @@
               </a:buClr>
               <a:buSzPts val="2000"/>
               <a:buFont typeface="Arial"/>
-              <a:buNone/>
-            </a:pPr>
-            <a:r>
-              <a:t/>
-            </a:r>
-            <a:endParaRPr/>
-          </a:p>
-        </p:txBody>
-      </p:sp>
-    </p:spTree>
-  </p:cSld>
-  <p:clrMapOvr>
-    <a:masterClrMapping/>
-  </p:clrMapOvr>
-</p:sld>
-</file>
-
-<file path=ppt/slides/slide19.xml><?xml version="1.0" encoding="utf-8"?>
-<p:sld xmlns:a="http://schemas.openxmlformats.org/drawingml/2006/main" xmlns:r="http://schemas.openxmlformats.org/officeDocument/2006/relationships" xmlns:mc="http://schemas.openxmlformats.org/markup-compatibility/2006" xmlns:mv="urn:schemas-microsoft-com:mac:vml" xmlns:p="http://schemas.openxmlformats.org/presentationml/2006/main" xmlns:c="http://schemas.openxmlformats.org/drawingml/2006/chart" xmlns:dgm="http://schemas.openxmlformats.org/drawingml/2006/diagram" xmlns:o="urn:schemas-microsoft-com:office:office" xmlns:v="urn:schemas-microsoft-com:vml" xmlns:pvml="urn:schemas-microsoft-com:office:powerpoint" xmlns:com="http://schemas.openxmlformats.org/drawingml/2006/compatibility" xmlns:p14="http://schemas.microsoft.com/office/powerpoint/2010/main" xmlns:p15="http://schemas.microsoft.com/office/powerpoint/2012/main" xmlns:ahyp="http://schemas.microsoft.com/office/drawing/2018/hyperlinkcolor">
-  <p:cSld>
-    <p:spTree>
-      <p:nvGrpSpPr>
-        <p:cNvPr id="200" name="Shape 200"/>
-        <p:cNvGrpSpPr/>
-        <p:nvPr/>
-      </p:nvGrpSpPr>
-      <p:grpSpPr>
-        <a:xfrm>
-          <a:off x="0" y="0"/>
-          <a:ext cx="0" cy="0"/>
-          <a:chOff x="0" y="0"/>
-          <a:chExt cx="0" cy="0"/>
-        </a:xfrm>
-      </p:grpSpPr>
-      <p:sp>
-        <p:nvSpPr>
-          <p:cNvPr id="201" name="Google Shape;201;p31"/>
-          <p:cNvSpPr txBox="1"/>
-          <p:nvPr>
-            <p:ph type="title"/>
-          </p:nvPr>
-        </p:nvSpPr>
-        <p:spPr>
-          <a:xfrm>
-            <a:off x="457200" y="274638"/>
-            <a:ext cx="8229600" cy="1143000"/>
-          </a:xfrm>
-          <a:prstGeom prst="rect">
-            <a:avLst/>
-          </a:prstGeom>
-          <a:noFill/>
-          <a:ln>
-            <a:noFill/>
-          </a:ln>
-        </p:spPr>
-        <p:txBody>
-          <a:bodyPr anchorCtr="0" anchor="ctr" bIns="45700" lIns="91425" spcFirstLastPara="1" rIns="91425" wrap="square" tIns="45700">
-            <a:noAutofit/>
-          </a:bodyPr>
-          <a:lstStyle/>
-          <a:p>
-            <a:pPr indent="0" lvl="0" marL="0" rtl="0" algn="ctr">
-              <a:lnSpc>
-                <a:spcPct val="100000"/>
-              </a:lnSpc>
-              <a:spcBef>
-                <a:spcPts val="0"/>
-              </a:spcBef>
-              <a:spcAft>
-                <a:spcPts val="0"/>
-              </a:spcAft>
-              <a:buSzPts val="1400"/>
-              <a:buNone/>
-            </a:pPr>
-            <a:r>
-              <a:t/>
-            </a:r>
-            <a:endParaRPr/>
-          </a:p>
-        </p:txBody>
-      </p:sp>
-      <p:sp>
-        <p:nvSpPr>
-          <p:cNvPr id="202" name="Google Shape;202;p31"/>
-          <p:cNvSpPr txBox="1"/>
-          <p:nvPr>
-            <p:ph idx="1" type="body"/>
-          </p:nvPr>
-        </p:nvSpPr>
-        <p:spPr>
-          <a:xfrm>
-            <a:off x="457200" y="1600200"/>
-            <a:ext cx="8229600" cy="4525963"/>
-          </a:xfrm>
-          <a:prstGeom prst="rect">
-            <a:avLst/>
-          </a:prstGeom>
-          <a:noFill/>
-          <a:ln>
-            <a:noFill/>
-          </a:ln>
-        </p:spPr>
-        <p:txBody>
-          <a:bodyPr anchorCtr="0" anchor="t" bIns="45700" lIns="91425" spcFirstLastPara="1" rIns="91425" wrap="square" tIns="45700">
-            <a:noAutofit/>
-          </a:bodyPr>
-          <a:lstStyle/>
-          <a:p>
-            <a:pPr indent="-139700" lvl="0" marL="342900" rtl="0" algn="l">
-              <a:lnSpc>
-                <a:spcPct val="100000"/>
-              </a:lnSpc>
-              <a:spcBef>
-                <a:spcPts val="0"/>
-              </a:spcBef>
-              <a:spcAft>
-                <a:spcPts val="0"/>
-              </a:spcAft>
-              <a:buClr>
-                <a:schemeClr val="dk1"/>
-              </a:buClr>
-              <a:buSzPts val="3200"/>
               <a:buNone/>
             </a:pPr>
             <a:r>
@@ -17848,10 +21728,18 @@
               <a:buNone/>
             </a:pPr>
             <a:r>
-              <a:rPr lang="en-US"/>
+              <a:rPr lang="en-US">
+                <a:solidFill>
+                  <a:srgbClr val="0B3D59"/>
+                </a:solidFill>
+              </a:rPr>
               <a:t>Project Team</a:t>
             </a:r>
-            <a:endParaRPr/>
+            <a:endParaRPr>
+              <a:solidFill>
+                <a:srgbClr val="0B3D59"/>
+              </a:solidFill>
+            </a:endParaRPr>
           </a:p>
         </p:txBody>
       </p:sp>
@@ -17866,7 +21754,7 @@
         <p:spPr>
           <a:xfrm>
             <a:off x="457200" y="1600200"/>
-            <a:ext cx="8229600" cy="4525963"/>
+            <a:ext cx="8229600" cy="4526100"/>
           </a:xfrm>
           <a:prstGeom prst="rect">
             <a:avLst/>
@@ -17893,16 +21781,24 @@
                 <a:spcPts val="0"/>
               </a:spcAft>
               <a:buClr>
-                <a:schemeClr val="dk1"/>
+                <a:srgbClr val="0B3D59"/>
               </a:buClr>
               <a:buSzPts val="3200"/>
               <a:buChar char="•"/>
             </a:pPr>
             <a:r>
-              <a:rPr lang="en-US"/>
+              <a:rPr lang="en-US">
+                <a:solidFill>
+                  <a:srgbClr val="0B3D59"/>
+                </a:solidFill>
+              </a:rPr>
               <a:t>Syed Jaffar Raza Kazmi (57375)</a:t>
             </a:r>
-            <a:endParaRPr/>
+            <a:endParaRPr>
+              <a:solidFill>
+                <a:srgbClr val="0B3D59"/>
+              </a:solidFill>
+            </a:endParaRPr>
           </a:p>
           <a:p>
             <a:pPr indent="-342900" lvl="0" marL="342900" rtl="0" algn="l">
@@ -17916,16 +21812,24 @@
                 <a:spcPts val="0"/>
               </a:spcAft>
               <a:buClr>
-                <a:schemeClr val="dk1"/>
+                <a:srgbClr val="0B3D59"/>
               </a:buClr>
               <a:buSzPts val="3200"/>
               <a:buChar char="•"/>
             </a:pPr>
             <a:r>
-              <a:rPr lang="en-US"/>
+              <a:rPr lang="en-US">
+                <a:solidFill>
+                  <a:srgbClr val="0B3D59"/>
+                </a:solidFill>
+              </a:rPr>
               <a:t>Shahroz Khalid (53531)</a:t>
             </a:r>
-            <a:endParaRPr/>
+            <a:endParaRPr>
+              <a:solidFill>
+                <a:srgbClr val="0B3D59"/>
+              </a:solidFill>
+            </a:endParaRPr>
           </a:p>
           <a:p>
             <a:pPr indent="-342900" lvl="0" marL="342900" rtl="0" algn="l">
@@ -17939,24 +21843,162 @@
                 <a:spcPts val="0"/>
               </a:spcAft>
               <a:buClr>
-                <a:schemeClr val="dk1"/>
+                <a:srgbClr val="0B3D59"/>
               </a:buClr>
               <a:buSzPts val="3200"/>
               <a:buChar char="•"/>
             </a:pPr>
             <a:r>
-              <a:rPr lang="en-US"/>
+              <a:rPr lang="en-US">
+                <a:solidFill>
+                  <a:srgbClr val="0B3D59"/>
+                </a:solidFill>
+              </a:rPr>
               <a:t>Muhammad Sarmad Chughtai (54915)</a:t>
+            </a:r>
+            <a:endParaRPr>
+              <a:solidFill>
+                <a:srgbClr val="0B3D59"/>
+              </a:solidFill>
+            </a:endParaRPr>
+          </a:p>
+          <a:p>
+            <a:pPr indent="-139700" lvl="0" marL="342900" rtl="0" algn="l">
+              <a:lnSpc>
+                <a:spcPct val="100000"/>
+              </a:lnSpc>
+              <a:spcBef>
+                <a:spcPts val="640"/>
+              </a:spcBef>
+              <a:spcAft>
+                <a:spcPts val="0"/>
+              </a:spcAft>
+              <a:buClr>
+                <a:schemeClr val="dk1"/>
+              </a:buClr>
+              <a:buSzPts val="3200"/>
+              <a:buNone/>
+            </a:pPr>
+            <a:r>
+              <a:t/>
+            </a:r>
+            <a:endParaRPr>
+              <a:solidFill>
+                <a:srgbClr val="0B3D59"/>
+              </a:solidFill>
+            </a:endParaRPr>
+          </a:p>
+        </p:txBody>
+      </p:sp>
+    </p:spTree>
+  </p:cSld>
+  <p:clrMapOvr>
+    <a:masterClrMapping/>
+  </p:clrMapOvr>
+</p:sld>
+</file>
+
+<file path=ppt/slides/slide20.xml><?xml version="1.0" encoding="utf-8"?>
+<p:sld xmlns:a="http://schemas.openxmlformats.org/drawingml/2006/main" xmlns:r="http://schemas.openxmlformats.org/officeDocument/2006/relationships" xmlns:mc="http://schemas.openxmlformats.org/markup-compatibility/2006" xmlns:mv="urn:schemas-microsoft-com:mac:vml" xmlns:p="http://schemas.openxmlformats.org/presentationml/2006/main" xmlns:c="http://schemas.openxmlformats.org/drawingml/2006/chart" xmlns:dgm="http://schemas.openxmlformats.org/drawingml/2006/diagram" xmlns:o="urn:schemas-microsoft-com:office:office" xmlns:v="urn:schemas-microsoft-com:vml" xmlns:pvml="urn:schemas-microsoft-com:office:powerpoint" xmlns:com="http://schemas.openxmlformats.org/drawingml/2006/compatibility" xmlns:p14="http://schemas.microsoft.com/office/powerpoint/2010/main" xmlns:p15="http://schemas.microsoft.com/office/powerpoint/2012/main" xmlns:ahyp="http://schemas.microsoft.com/office/drawing/2018/hyperlinkcolor">
+  <p:cSld>
+    <p:spTree>
+      <p:nvGrpSpPr>
+        <p:cNvPr id="259" name="Shape 259"/>
+        <p:cNvGrpSpPr/>
+        <p:nvPr/>
+      </p:nvGrpSpPr>
+      <p:grpSpPr>
+        <a:xfrm>
+          <a:off x="0" y="0"/>
+          <a:ext cx="0" cy="0"/>
+          <a:chOff x="0" y="0"/>
+          <a:chExt cx="0" cy="0"/>
+        </a:xfrm>
+      </p:grpSpPr>
+      <p:sp>
+        <p:nvSpPr>
+          <p:cNvPr id="260" name="Google Shape;260;p32"/>
+          <p:cNvSpPr txBox="1"/>
+          <p:nvPr>
+            <p:ph type="title"/>
+          </p:nvPr>
+        </p:nvSpPr>
+        <p:spPr>
+          <a:xfrm>
+            <a:off x="457200" y="274638"/>
+            <a:ext cx="8229600" cy="1143000"/>
+          </a:xfrm>
+          <a:prstGeom prst="rect">
+            <a:avLst/>
+          </a:prstGeom>
+          <a:noFill/>
+          <a:ln>
+            <a:noFill/>
+          </a:ln>
+        </p:spPr>
+        <p:txBody>
+          <a:bodyPr anchorCtr="0" anchor="ctr" bIns="45700" lIns="91425" spcFirstLastPara="1" rIns="91425" wrap="square" tIns="45700">
+            <a:noAutofit/>
+          </a:bodyPr>
+          <a:lstStyle/>
+          <a:p>
+            <a:pPr indent="0" lvl="0" marL="0" rtl="0" algn="ctr">
+              <a:spcBef>
+                <a:spcPts val="0"/>
+              </a:spcBef>
+              <a:spcAft>
+                <a:spcPts val="0"/>
+              </a:spcAft>
+              <a:buClr>
+                <a:schemeClr val="dk1"/>
+              </a:buClr>
+              <a:buSzPts val="1400"/>
+              <a:buFont typeface="Arial"/>
+              <a:buNone/>
+            </a:pPr>
+            <a:r>
+              <a:rPr b="1" lang="en-US" sz="4000">
+                <a:solidFill>
+                  <a:srgbClr val="0B3D59"/>
+                </a:solidFill>
+              </a:rPr>
+              <a:t>Work Breakdown</a:t>
             </a:r>
             <a:endParaRPr/>
           </a:p>
+        </p:txBody>
+      </p:sp>
+      <p:sp>
+        <p:nvSpPr>
+          <p:cNvPr id="261" name="Google Shape;261;p32"/>
+          <p:cNvSpPr txBox="1"/>
+          <p:nvPr/>
+        </p:nvSpPr>
+        <p:spPr>
+          <a:xfrm>
+            <a:off x="342900" y="1418725"/>
+            <a:ext cx="8343900" cy="4292700"/>
+          </a:xfrm>
+          <a:prstGeom prst="rect">
+            <a:avLst/>
+          </a:prstGeom>
+          <a:noFill/>
+          <a:ln>
+            <a:noFill/>
+          </a:ln>
+        </p:spPr>
+        <p:txBody>
+          <a:bodyPr anchorCtr="0" anchor="t" bIns="91425" lIns="91425" spcFirstLastPara="1" rIns="91425" wrap="square" tIns="91425">
+            <a:noAutofit/>
+          </a:bodyPr>
+          <a:lstStyle/>
           <a:p>
-            <a:pPr indent="-139700" lvl="0" marL="342900" rtl="0" algn="l">
-              <a:lnSpc>
-                <a:spcPct val="100000"/>
-              </a:lnSpc>
-              <a:spcBef>
-                <a:spcPts val="640"/>
+            <a:pPr indent="0" lvl="0" marL="0" rtl="0" algn="l">
+              <a:lnSpc>
+                <a:spcPct val="150000"/>
+              </a:lnSpc>
+              <a:spcBef>
+                <a:spcPts val="0"/>
               </a:spcBef>
               <a:spcAft>
                 <a:spcPts val="0"/>
@@ -17964,7 +22006,563 @@
               <a:buClr>
                 <a:schemeClr val="dk1"/>
               </a:buClr>
-              <a:buSzPts val="3200"/>
+              <a:buSzPts val="1100"/>
+              <a:buFont typeface="Arial"/>
+              <a:buNone/>
+            </a:pPr>
+            <a:r>
+              <a:rPr b="1" lang="en-US" sz="2000">
+                <a:solidFill>
+                  <a:schemeClr val="dk1"/>
+                </a:solidFill>
+              </a:rPr>
+              <a:t>Phase 1: Proposal &amp; Literature Foundation:</a:t>
+            </a:r>
+            <a:r>
+              <a:rPr lang="en-US" sz="2000">
+                <a:solidFill>
+                  <a:schemeClr val="dk1"/>
+                </a:solidFill>
+              </a:rPr>
+              <a:t> Weeks 1-4</a:t>
+            </a:r>
+            <a:br>
+              <a:rPr lang="en-US" sz="2000">
+                <a:solidFill>
+                  <a:schemeClr val="dk1"/>
+                </a:solidFill>
+              </a:rPr>
+            </a:br>
+            <a:r>
+              <a:rPr lang="en-US" sz="2000">
+                <a:solidFill>
+                  <a:schemeClr val="dk1"/>
+                </a:solidFill>
+              </a:rPr>
+              <a:t>Finalize literature review, gap analysis, problem statement. Build and deliver proposal presentation.</a:t>
+            </a:r>
+            <a:endParaRPr i="1" sz="2000">
+              <a:solidFill>
+                <a:schemeClr val="dk1"/>
+              </a:solidFill>
+            </a:endParaRPr>
+          </a:p>
+          <a:p>
+            <a:pPr indent="0" lvl="0" marL="0" rtl="0" algn="l">
+              <a:lnSpc>
+                <a:spcPct val="150000"/>
+              </a:lnSpc>
+              <a:spcBef>
+                <a:spcPts val="1200"/>
+              </a:spcBef>
+              <a:spcAft>
+                <a:spcPts val="0"/>
+              </a:spcAft>
+              <a:buClr>
+                <a:schemeClr val="dk1"/>
+              </a:buClr>
+              <a:buSzPts val="1100"/>
+              <a:buFont typeface="Arial"/>
+              <a:buNone/>
+            </a:pPr>
+            <a:r>
+              <a:rPr b="1" lang="en-US" sz="2000">
+                <a:solidFill>
+                  <a:schemeClr val="dk1"/>
+                </a:solidFill>
+              </a:rPr>
+              <a:t>Phase 2: Data Pipeline &amp; Preprocessing:</a:t>
+            </a:r>
+            <a:r>
+              <a:rPr lang="en-US" sz="2000">
+                <a:solidFill>
+                  <a:schemeClr val="dk1"/>
+                </a:solidFill>
+              </a:rPr>
+              <a:t> Weeks 5-7</a:t>
+            </a:r>
+            <a:br>
+              <a:rPr lang="en-US" sz="2000">
+                <a:solidFill>
+                  <a:schemeClr val="dk1"/>
+                </a:solidFill>
+              </a:rPr>
+            </a:br>
+            <a:r>
+              <a:rPr lang="en-US" sz="2000">
+                <a:solidFill>
+                  <a:schemeClr val="dk1"/>
+                </a:solidFill>
+              </a:rPr>
+              <a:t>Collect and standardize all five modality datasets. Address class imbalance. Build train/validation/test splits.</a:t>
+            </a:r>
+            <a:endParaRPr sz="2000">
+              <a:solidFill>
+                <a:schemeClr val="dk1"/>
+              </a:solidFill>
+            </a:endParaRPr>
+          </a:p>
+          <a:p>
+            <a:pPr indent="0" lvl="0" marL="0" rtl="0" algn="l">
+              <a:lnSpc>
+                <a:spcPct val="150000"/>
+              </a:lnSpc>
+              <a:spcBef>
+                <a:spcPts val="1200"/>
+              </a:spcBef>
+              <a:spcAft>
+                <a:spcPts val="0"/>
+              </a:spcAft>
+              <a:buClr>
+                <a:schemeClr val="dk1"/>
+              </a:buClr>
+              <a:buSzPts val="1100"/>
+              <a:buFont typeface="Arial"/>
+              <a:buNone/>
+            </a:pPr>
+            <a:r>
+              <a:rPr b="1" lang="en-US" sz="2000">
+                <a:solidFill>
+                  <a:schemeClr val="dk1"/>
+                </a:solidFill>
+              </a:rPr>
+              <a:t>Phase 3: Encoder &amp; Fusion Development:</a:t>
+            </a:r>
+            <a:r>
+              <a:rPr lang="en-US" sz="2000">
+                <a:solidFill>
+                  <a:schemeClr val="dk1"/>
+                </a:solidFill>
+              </a:rPr>
+              <a:t> Weeks 8-10</a:t>
+            </a:r>
+            <a:br>
+              <a:rPr lang="en-US" sz="2000">
+                <a:solidFill>
+                  <a:schemeClr val="dk1"/>
+                </a:solidFill>
+              </a:rPr>
+            </a:br>
+            <a:r>
+              <a:rPr lang="en-US" sz="2000">
+                <a:solidFill>
+                  <a:schemeClr val="dk1"/>
+                </a:solidFill>
+              </a:rPr>
+              <a:t>Train five ViT-B/16 specialist encoders. Implement and tune the cross-modal attention fusion transformer.</a:t>
+            </a:r>
+            <a:endParaRPr i="1" sz="2000">
+              <a:solidFill>
+                <a:schemeClr val="dk1"/>
+              </a:solidFill>
+            </a:endParaRPr>
+          </a:p>
+          <a:p>
+            <a:pPr indent="0" lvl="0" marL="0" rtl="0" algn="l">
+              <a:spcBef>
+                <a:spcPts val="1200"/>
+              </a:spcBef>
+              <a:spcAft>
+                <a:spcPts val="0"/>
+              </a:spcAft>
+              <a:buNone/>
+            </a:pPr>
+            <a:r>
+              <a:t/>
+            </a:r>
+            <a:endParaRPr sz="2000">
+              <a:solidFill>
+                <a:schemeClr val="dk1"/>
+              </a:solidFill>
+              <a:latin typeface="Calibri"/>
+              <a:ea typeface="Calibri"/>
+              <a:cs typeface="Calibri"/>
+              <a:sym typeface="Calibri"/>
+            </a:endParaRPr>
+          </a:p>
+        </p:txBody>
+      </p:sp>
+    </p:spTree>
+  </p:cSld>
+  <p:clrMapOvr>
+    <a:masterClrMapping/>
+  </p:clrMapOvr>
+</p:sld>
+</file>
+
+<file path=ppt/slides/slide21.xml><?xml version="1.0" encoding="utf-8"?>
+<p:sld xmlns:a="http://schemas.openxmlformats.org/drawingml/2006/main" xmlns:r="http://schemas.openxmlformats.org/officeDocument/2006/relationships" xmlns:mc="http://schemas.openxmlformats.org/markup-compatibility/2006" xmlns:mv="urn:schemas-microsoft-com:mac:vml" xmlns:p="http://schemas.openxmlformats.org/presentationml/2006/main" xmlns:c="http://schemas.openxmlformats.org/drawingml/2006/chart" xmlns:dgm="http://schemas.openxmlformats.org/drawingml/2006/diagram" xmlns:o="urn:schemas-microsoft-com:office:office" xmlns:v="urn:schemas-microsoft-com:vml" xmlns:pvml="urn:schemas-microsoft-com:office:powerpoint" xmlns:com="http://schemas.openxmlformats.org/drawingml/2006/compatibility" xmlns:p14="http://schemas.microsoft.com/office/powerpoint/2010/main" xmlns:p15="http://schemas.microsoft.com/office/powerpoint/2012/main" xmlns:ahyp="http://schemas.microsoft.com/office/drawing/2018/hyperlinkcolor">
+  <p:cSld>
+    <p:spTree>
+      <p:nvGrpSpPr>
+        <p:cNvPr id="265" name="Shape 265"/>
+        <p:cNvGrpSpPr/>
+        <p:nvPr/>
+      </p:nvGrpSpPr>
+      <p:grpSpPr>
+        <a:xfrm>
+          <a:off x="0" y="0"/>
+          <a:ext cx="0" cy="0"/>
+          <a:chOff x="0" y="0"/>
+          <a:chExt cx="0" cy="0"/>
+        </a:xfrm>
+      </p:grpSpPr>
+      <p:sp>
+        <p:nvSpPr>
+          <p:cNvPr id="266" name="Google Shape;266;p33"/>
+          <p:cNvSpPr txBox="1"/>
+          <p:nvPr>
+            <p:ph type="title"/>
+          </p:nvPr>
+        </p:nvSpPr>
+        <p:spPr>
+          <a:xfrm>
+            <a:off x="457200" y="274638"/>
+            <a:ext cx="8229600" cy="1143000"/>
+          </a:xfrm>
+          <a:prstGeom prst="rect">
+            <a:avLst/>
+          </a:prstGeom>
+          <a:noFill/>
+          <a:ln>
+            <a:noFill/>
+          </a:ln>
+        </p:spPr>
+        <p:txBody>
+          <a:bodyPr anchorCtr="0" anchor="ctr" bIns="45700" lIns="91425" spcFirstLastPara="1" rIns="91425" wrap="square" tIns="45700">
+            <a:noAutofit/>
+          </a:bodyPr>
+          <a:lstStyle/>
+          <a:p>
+            <a:pPr indent="0" lvl="0" marL="0" rtl="0" algn="ctr">
+              <a:spcBef>
+                <a:spcPts val="0"/>
+              </a:spcBef>
+              <a:spcAft>
+                <a:spcPts val="0"/>
+              </a:spcAft>
+              <a:buSzPts val="1400"/>
+              <a:buNone/>
+            </a:pPr>
+            <a:r>
+              <a:rPr b="1" lang="en-US" sz="4000">
+                <a:solidFill>
+                  <a:srgbClr val="0B3D59"/>
+                </a:solidFill>
+              </a:rPr>
+              <a:t>Work Breakdown</a:t>
+            </a:r>
+            <a:endParaRPr/>
+          </a:p>
+        </p:txBody>
+      </p:sp>
+      <p:sp>
+        <p:nvSpPr>
+          <p:cNvPr id="267" name="Google Shape;267;p33"/>
+          <p:cNvSpPr txBox="1"/>
+          <p:nvPr/>
+        </p:nvSpPr>
+        <p:spPr>
+          <a:xfrm>
+            <a:off x="342900" y="1418725"/>
+            <a:ext cx="8343900" cy="4292700"/>
+          </a:xfrm>
+          <a:prstGeom prst="rect">
+            <a:avLst/>
+          </a:prstGeom>
+          <a:noFill/>
+          <a:ln>
+            <a:noFill/>
+          </a:ln>
+        </p:spPr>
+        <p:txBody>
+          <a:bodyPr anchorCtr="0" anchor="t" bIns="91425" lIns="91425" spcFirstLastPara="1" rIns="91425" wrap="square" tIns="91425">
+            <a:noAutofit/>
+          </a:bodyPr>
+          <a:lstStyle/>
+          <a:p>
+            <a:pPr indent="0" lvl="0" marL="0" rtl="0" algn="l">
+              <a:lnSpc>
+                <a:spcPct val="150000"/>
+              </a:lnSpc>
+              <a:spcBef>
+                <a:spcPts val="1200"/>
+              </a:spcBef>
+              <a:spcAft>
+                <a:spcPts val="0"/>
+              </a:spcAft>
+              <a:buClr>
+                <a:schemeClr val="dk1"/>
+              </a:buClr>
+              <a:buSzPts val="1100"/>
+              <a:buFont typeface="Arial"/>
+              <a:buNone/>
+            </a:pPr>
+            <a:r>
+              <a:rPr b="1" lang="en-US" sz="2000">
+                <a:solidFill>
+                  <a:schemeClr val="dk1"/>
+                </a:solidFill>
+              </a:rPr>
+              <a:t>Phase 4: Uncertainty &amp; Explainability:</a:t>
+            </a:r>
+            <a:r>
+              <a:rPr lang="en-US" sz="2000">
+                <a:solidFill>
+                  <a:schemeClr val="dk1"/>
+                </a:solidFill>
+              </a:rPr>
+              <a:t> Weeks 11-13</a:t>
+            </a:r>
+            <a:br>
+              <a:rPr lang="en-US" sz="2000">
+                <a:solidFill>
+                  <a:schemeClr val="dk1"/>
+                </a:solidFill>
+              </a:rPr>
+            </a:br>
+            <a:r>
+              <a:rPr lang="en-US" sz="2000">
+                <a:solidFill>
+                  <a:schemeClr val="dk1"/>
+                </a:solidFill>
+              </a:rPr>
+              <a:t>Integrate Monte Carlo Dropout for confidence estimation. Implement attention-based explainability. Add missing-modality robustness handling.</a:t>
+            </a:r>
+            <a:endParaRPr sz="2000">
+              <a:solidFill>
+                <a:schemeClr val="dk1"/>
+              </a:solidFill>
+            </a:endParaRPr>
+          </a:p>
+          <a:p>
+            <a:pPr indent="0" lvl="0" marL="0" rtl="0" algn="l">
+              <a:lnSpc>
+                <a:spcPct val="150000"/>
+              </a:lnSpc>
+              <a:spcBef>
+                <a:spcPts val="1200"/>
+              </a:spcBef>
+              <a:spcAft>
+                <a:spcPts val="0"/>
+              </a:spcAft>
+              <a:buClr>
+                <a:schemeClr val="dk1"/>
+              </a:buClr>
+              <a:buSzPts val="1100"/>
+              <a:buFont typeface="Arial"/>
+              <a:buNone/>
+            </a:pPr>
+            <a:r>
+              <a:rPr b="1" lang="en-US" sz="2000">
+                <a:solidFill>
+                  <a:schemeClr val="dk1"/>
+                </a:solidFill>
+              </a:rPr>
+              <a:t>Phase 5: Evaluation &amp; Report Generation:</a:t>
+            </a:r>
+            <a:r>
+              <a:rPr lang="en-US" sz="2000">
+                <a:solidFill>
+                  <a:schemeClr val="dk1"/>
+                </a:solidFill>
+              </a:rPr>
+              <a:t> Weeks 14-16</a:t>
+            </a:r>
+            <a:br>
+              <a:rPr lang="en-US" sz="2000">
+                <a:solidFill>
+                  <a:schemeClr val="dk1"/>
+                </a:solidFill>
+              </a:rPr>
+            </a:br>
+            <a:r>
+              <a:rPr lang="en-US" sz="2000">
+                <a:solidFill>
+                  <a:schemeClr val="dk1"/>
+                </a:solidFill>
+              </a:rPr>
+              <a:t>Benchmark against literature baselines. Build the LLM patient-report module. Finalize documentation.</a:t>
+            </a:r>
+            <a:endParaRPr i="1" sz="2000">
+              <a:solidFill>
+                <a:schemeClr val="dk1"/>
+              </a:solidFill>
+            </a:endParaRPr>
+          </a:p>
+          <a:p>
+            <a:pPr indent="0" lvl="0" marL="0" rtl="0" algn="l">
+              <a:lnSpc>
+                <a:spcPct val="150000"/>
+              </a:lnSpc>
+              <a:spcBef>
+                <a:spcPts val="1200"/>
+              </a:spcBef>
+              <a:spcAft>
+                <a:spcPts val="1200"/>
+              </a:spcAft>
+              <a:buClr>
+                <a:schemeClr val="dk1"/>
+              </a:buClr>
+              <a:buSzPts val="1100"/>
+              <a:buFont typeface="Arial"/>
+              <a:buNone/>
+            </a:pPr>
+            <a:r>
+              <a:rPr b="1" lang="en-US" sz="2000">
+                <a:solidFill>
+                  <a:schemeClr val="dk1"/>
+                </a:solidFill>
+              </a:rPr>
+              <a:t>Phase 6: Part 1 Defense Prep:</a:t>
+            </a:r>
+            <a:r>
+              <a:rPr lang="en-US" sz="2000">
+                <a:solidFill>
+                  <a:schemeClr val="dk1"/>
+                </a:solidFill>
+              </a:rPr>
+              <a:t> After Finals</a:t>
+            </a:r>
+            <a:br>
+              <a:rPr lang="en-US" sz="2000">
+                <a:solidFill>
+                  <a:schemeClr val="dk1"/>
+                </a:solidFill>
+              </a:rPr>
+            </a:br>
+            <a:r>
+              <a:rPr lang="en-US" sz="2000">
+                <a:solidFill>
+                  <a:schemeClr val="dk1"/>
+                </a:solidFill>
+              </a:rPr>
+              <a:t>Rehearse and deliver Part 1 Defense</a:t>
+            </a:r>
+            <a:endParaRPr b="1" sz="2000">
+              <a:solidFill>
+                <a:schemeClr val="dk1"/>
+              </a:solidFill>
+            </a:endParaRPr>
+          </a:p>
+        </p:txBody>
+      </p:sp>
+    </p:spTree>
+  </p:cSld>
+  <p:clrMapOvr>
+    <a:masterClrMapping/>
+  </p:clrMapOvr>
+</p:sld>
+</file>
+
+<file path=ppt/slides/slide22.xml><?xml version="1.0" encoding="utf-8"?>
+<p:sld xmlns:a="http://schemas.openxmlformats.org/drawingml/2006/main" xmlns:r="http://schemas.openxmlformats.org/officeDocument/2006/relationships" xmlns:mc="http://schemas.openxmlformats.org/markup-compatibility/2006" xmlns:mv="urn:schemas-microsoft-com:mac:vml" xmlns:p="http://schemas.openxmlformats.org/presentationml/2006/main" xmlns:c="http://schemas.openxmlformats.org/drawingml/2006/chart" xmlns:dgm="http://schemas.openxmlformats.org/drawingml/2006/diagram" xmlns:o="urn:schemas-microsoft-com:office:office" xmlns:v="urn:schemas-microsoft-com:vml" xmlns:pvml="urn:schemas-microsoft-com:office:powerpoint" xmlns:com="http://schemas.openxmlformats.org/drawingml/2006/compatibility" xmlns:p14="http://schemas.microsoft.com/office/powerpoint/2010/main" xmlns:p15="http://schemas.microsoft.com/office/powerpoint/2012/main" xmlns:ahyp="http://schemas.microsoft.com/office/drawing/2018/hyperlinkcolor">
+  <p:cSld>
+    <p:spTree>
+      <p:nvGrpSpPr>
+        <p:cNvPr id="271" name="Shape 271"/>
+        <p:cNvGrpSpPr/>
+        <p:nvPr/>
+      </p:nvGrpSpPr>
+      <p:grpSpPr>
+        <a:xfrm>
+          <a:off x="0" y="0"/>
+          <a:ext cx="0" cy="0"/>
+          <a:chOff x="0" y="0"/>
+          <a:chExt cx="0" cy="0"/>
+        </a:xfrm>
+      </p:grpSpPr>
+      <p:sp>
+        <p:nvSpPr>
+          <p:cNvPr id="272" name="Google Shape;272;p34"/>
+          <p:cNvSpPr txBox="1"/>
+          <p:nvPr>
+            <p:ph type="title"/>
+          </p:nvPr>
+        </p:nvSpPr>
+        <p:spPr>
+          <a:xfrm>
+            <a:off x="722313" y="4406900"/>
+            <a:ext cx="7772400" cy="1362075"/>
+          </a:xfrm>
+          <a:prstGeom prst="rect">
+            <a:avLst/>
+          </a:prstGeom>
+          <a:noFill/>
+          <a:ln>
+            <a:noFill/>
+          </a:ln>
+        </p:spPr>
+        <p:txBody>
+          <a:bodyPr anchorCtr="0" anchor="t" bIns="45700" lIns="91425" spcFirstLastPara="1" rIns="91425" wrap="square" tIns="45700">
+            <a:normAutofit/>
+          </a:bodyPr>
+          <a:lstStyle/>
+          <a:p>
+            <a:pPr indent="0" lvl="0" marL="0" rtl="0" algn="l">
+              <a:spcBef>
+                <a:spcPts val="0"/>
+              </a:spcBef>
+              <a:spcAft>
+                <a:spcPts val="0"/>
+              </a:spcAft>
+              <a:buSzPts val="1400"/>
+              <a:buNone/>
+            </a:pPr>
+            <a:r>
+              <a:rPr b="0" lang="en-US" sz="4400">
+                <a:solidFill>
+                  <a:srgbClr val="0B3D59"/>
+                </a:solidFill>
+              </a:rPr>
+              <a:t>Roles &amp; Responsibilities</a:t>
+            </a:r>
+            <a:endParaRPr/>
+          </a:p>
+        </p:txBody>
+      </p:sp>
+      <p:sp>
+        <p:nvSpPr>
+          <p:cNvPr id="273" name="Google Shape;273;p34"/>
+          <p:cNvSpPr txBox="1"/>
+          <p:nvPr>
+            <p:ph idx="1" type="body"/>
+          </p:nvPr>
+        </p:nvSpPr>
+        <p:spPr>
+          <a:xfrm>
+            <a:off x="722313" y="2906713"/>
+            <a:ext cx="7772400" cy="1500187"/>
+          </a:xfrm>
+          <a:prstGeom prst="rect">
+            <a:avLst/>
+          </a:prstGeom>
+          <a:noFill/>
+          <a:ln>
+            <a:noFill/>
+          </a:ln>
+        </p:spPr>
+        <p:txBody>
+          <a:bodyPr anchorCtr="0" anchor="b" bIns="45700" lIns="91425" spcFirstLastPara="1" rIns="91425" wrap="square" tIns="45700">
+            <a:normAutofit/>
+          </a:bodyPr>
+          <a:lstStyle/>
+          <a:p>
+            <a:pPr indent="0" lvl="0" marL="44450" rtl="0" algn="l">
+              <a:lnSpc>
+                <a:spcPct val="100000"/>
+              </a:lnSpc>
+              <a:spcBef>
+                <a:spcPts val="0"/>
+              </a:spcBef>
+              <a:spcAft>
+                <a:spcPts val="0"/>
+              </a:spcAft>
+              <a:buClr>
+                <a:srgbClr val="888888"/>
+              </a:buClr>
+              <a:buSzPts val="2000"/>
+              <a:buFont typeface="Arial"/>
               <a:buNone/>
             </a:pPr>
             <a:r>
@@ -17974,6 +22572,725 @@
           </a:p>
         </p:txBody>
       </p:sp>
+    </p:spTree>
+  </p:cSld>
+  <p:clrMapOvr>
+    <a:masterClrMapping/>
+  </p:clrMapOvr>
+</p:sld>
+</file>
+
+<file path=ppt/slides/slide23.xml><?xml version="1.0" encoding="utf-8"?>
+<p:sld xmlns:a="http://schemas.openxmlformats.org/drawingml/2006/main" xmlns:r="http://schemas.openxmlformats.org/officeDocument/2006/relationships" xmlns:mc="http://schemas.openxmlformats.org/markup-compatibility/2006" xmlns:mv="urn:schemas-microsoft-com:mac:vml" xmlns:p="http://schemas.openxmlformats.org/presentationml/2006/main" xmlns:c="http://schemas.openxmlformats.org/drawingml/2006/chart" xmlns:dgm="http://schemas.openxmlformats.org/drawingml/2006/diagram" xmlns:o="urn:schemas-microsoft-com:office:office" xmlns:v="urn:schemas-microsoft-com:vml" xmlns:pvml="urn:schemas-microsoft-com:office:powerpoint" xmlns:com="http://schemas.openxmlformats.org/drawingml/2006/compatibility" xmlns:p14="http://schemas.microsoft.com/office/powerpoint/2010/main" xmlns:p15="http://schemas.microsoft.com/office/powerpoint/2012/main" xmlns:ahyp="http://schemas.microsoft.com/office/drawing/2018/hyperlinkcolor">
+  <p:cSld>
+    <p:spTree>
+      <p:nvGrpSpPr>
+        <p:cNvPr id="277" name="Shape 277"/>
+        <p:cNvGrpSpPr/>
+        <p:nvPr/>
+      </p:nvGrpSpPr>
+      <p:grpSpPr>
+        <a:xfrm>
+          <a:off x="0" y="0"/>
+          <a:ext cx="0" cy="0"/>
+          <a:chOff x="0" y="0"/>
+          <a:chExt cx="0" cy="0"/>
+        </a:xfrm>
+      </p:grpSpPr>
+      <p:sp>
+        <p:nvSpPr>
+          <p:cNvPr id="278" name="Google Shape;278;p35"/>
+          <p:cNvSpPr txBox="1"/>
+          <p:nvPr>
+            <p:ph type="title"/>
+          </p:nvPr>
+        </p:nvSpPr>
+        <p:spPr>
+          <a:xfrm>
+            <a:off x="457200" y="274638"/>
+            <a:ext cx="8229600" cy="1143000"/>
+          </a:xfrm>
+          <a:prstGeom prst="rect">
+            <a:avLst/>
+          </a:prstGeom>
+          <a:noFill/>
+          <a:ln>
+            <a:noFill/>
+          </a:ln>
+        </p:spPr>
+        <p:txBody>
+          <a:bodyPr anchorCtr="0" anchor="ctr" bIns="45700" lIns="91425" spcFirstLastPara="1" rIns="91425" wrap="square" tIns="45700">
+            <a:noAutofit/>
+          </a:bodyPr>
+          <a:lstStyle/>
+          <a:p>
+            <a:pPr indent="0" lvl="0" marL="0" rtl="0" algn="ctr">
+              <a:lnSpc>
+                <a:spcPct val="100000"/>
+              </a:lnSpc>
+              <a:spcBef>
+                <a:spcPts val="0"/>
+              </a:spcBef>
+              <a:spcAft>
+                <a:spcPts val="0"/>
+              </a:spcAft>
+              <a:buSzPts val="1400"/>
+              <a:buNone/>
+            </a:pPr>
+            <a:r>
+              <a:rPr lang="en-US">
+                <a:solidFill>
+                  <a:srgbClr val="0B3D59"/>
+                </a:solidFill>
+              </a:rPr>
+              <a:t>Roles &amp; Responsibilities</a:t>
+            </a:r>
+            <a:endParaRPr>
+              <a:solidFill>
+                <a:srgbClr val="0B3D59"/>
+              </a:solidFill>
+            </a:endParaRPr>
+          </a:p>
+        </p:txBody>
+      </p:sp>
+      <p:graphicFrame>
+        <p:nvGraphicFramePr>
+          <p:cNvPr id="279" name="Google Shape;279;p35"/>
+          <p:cNvGraphicFramePr/>
+          <p:nvPr/>
+        </p:nvGraphicFramePr>
+        <p:xfrm>
+          <a:off x="457200" y="1556325"/>
+          <a:ext cx="3000000" cy="3000000"/>
+        </p:xfrm>
+        <a:graphic>
+          <a:graphicData uri="http://schemas.openxmlformats.org/drawingml/2006/table">
+            <a:tbl>
+              <a:tblPr>
+                <a:noFill/>
+                <a:tableStyleId>{A86E29F2-8678-437A-8A81-A00D8066E49F}</a:tableStyleId>
+              </a:tblPr>
+              <a:tblGrid>
+                <a:gridCol w="2720975"/>
+                <a:gridCol w="2720975"/>
+                <a:gridCol w="2720975"/>
+              </a:tblGrid>
+              <a:tr h="469075">
+                <a:tc>
+                  <a:txBody>
+                    <a:bodyPr/>
+                    <a:lstStyle/>
+                    <a:p>
+                      <a:pPr indent="0" lvl="0" marL="0" rtl="0" algn="l">
+                        <a:spcBef>
+                          <a:spcPts val="0"/>
+                        </a:spcBef>
+                        <a:spcAft>
+                          <a:spcPts val="0"/>
+                        </a:spcAft>
+                        <a:buNone/>
+                      </a:pPr>
+                      <a:r>
+                        <a:rPr b="1" lang="en-US" sz="2000">
+                          <a:solidFill>
+                            <a:schemeClr val="lt1"/>
+                          </a:solidFill>
+                          <a:latin typeface="Calibri"/>
+                          <a:ea typeface="Calibri"/>
+                          <a:cs typeface="Calibri"/>
+                          <a:sym typeface="Calibri"/>
+                        </a:rPr>
+                        <a:t>Member</a:t>
+                      </a:r>
+                      <a:endParaRPr b="1" sz="2000">
+                        <a:solidFill>
+                          <a:schemeClr val="lt1"/>
+                        </a:solidFill>
+                        <a:latin typeface="Calibri"/>
+                        <a:ea typeface="Calibri"/>
+                        <a:cs typeface="Calibri"/>
+                        <a:sym typeface="Calibri"/>
+                      </a:endParaRPr>
+                    </a:p>
+                  </a:txBody>
+                  <a:tcPr marT="91425" marB="91425" marR="91425" marL="91425">
+                    <a:solidFill>
+                      <a:srgbClr val="1C7293"/>
+                    </a:solidFill>
+                  </a:tcPr>
+                </a:tc>
+                <a:tc>
+                  <a:txBody>
+                    <a:bodyPr/>
+                    <a:lstStyle/>
+                    <a:p>
+                      <a:pPr indent="0" lvl="0" marL="0" rtl="0" algn="l">
+                        <a:spcBef>
+                          <a:spcPts val="0"/>
+                        </a:spcBef>
+                        <a:spcAft>
+                          <a:spcPts val="0"/>
+                        </a:spcAft>
+                        <a:buNone/>
+                      </a:pPr>
+                      <a:r>
+                        <a:rPr b="1" lang="en-US" sz="2000">
+                          <a:solidFill>
+                            <a:schemeClr val="lt1"/>
+                          </a:solidFill>
+                          <a:latin typeface="Calibri"/>
+                          <a:ea typeface="Calibri"/>
+                          <a:cs typeface="Calibri"/>
+                          <a:sym typeface="Calibri"/>
+                        </a:rPr>
+                        <a:t>Role</a:t>
+                      </a:r>
+                      <a:endParaRPr b="1" sz="2000">
+                        <a:solidFill>
+                          <a:schemeClr val="lt1"/>
+                        </a:solidFill>
+                        <a:latin typeface="Calibri"/>
+                        <a:ea typeface="Calibri"/>
+                        <a:cs typeface="Calibri"/>
+                        <a:sym typeface="Calibri"/>
+                      </a:endParaRPr>
+                    </a:p>
+                  </a:txBody>
+                  <a:tcPr marT="91425" marB="91425" marR="91425" marL="91425">
+                    <a:solidFill>
+                      <a:srgbClr val="1C7293"/>
+                    </a:solidFill>
+                  </a:tcPr>
+                </a:tc>
+                <a:tc>
+                  <a:txBody>
+                    <a:bodyPr/>
+                    <a:lstStyle/>
+                    <a:p>
+                      <a:pPr indent="0" lvl="0" marL="0" rtl="0" algn="l">
+                        <a:spcBef>
+                          <a:spcPts val="0"/>
+                        </a:spcBef>
+                        <a:spcAft>
+                          <a:spcPts val="0"/>
+                        </a:spcAft>
+                        <a:buNone/>
+                      </a:pPr>
+                      <a:r>
+                        <a:rPr b="1" lang="en-US" sz="2000">
+                          <a:solidFill>
+                            <a:schemeClr val="lt1"/>
+                          </a:solidFill>
+                          <a:latin typeface="Calibri"/>
+                          <a:ea typeface="Calibri"/>
+                          <a:cs typeface="Calibri"/>
+                          <a:sym typeface="Calibri"/>
+                        </a:rPr>
+                        <a:t>Responsibilities</a:t>
+                      </a:r>
+                      <a:endParaRPr b="1" sz="2000">
+                        <a:solidFill>
+                          <a:schemeClr val="lt1"/>
+                        </a:solidFill>
+                        <a:latin typeface="Calibri"/>
+                        <a:ea typeface="Calibri"/>
+                        <a:cs typeface="Calibri"/>
+                        <a:sym typeface="Calibri"/>
+                      </a:endParaRPr>
+                    </a:p>
+                  </a:txBody>
+                  <a:tcPr marT="91425" marB="91425" marR="91425" marL="91425">
+                    <a:solidFill>
+                      <a:srgbClr val="1C7293"/>
+                    </a:solidFill>
+                  </a:tcPr>
+                </a:tc>
+              </a:tr>
+              <a:tr h="1627200">
+                <a:tc>
+                  <a:txBody>
+                    <a:bodyPr/>
+                    <a:lstStyle/>
+                    <a:p>
+                      <a:pPr indent="0" lvl="0" marL="0" rtl="0" algn="l">
+                        <a:lnSpc>
+                          <a:spcPct val="150000"/>
+                        </a:lnSpc>
+                        <a:spcBef>
+                          <a:spcPts val="0"/>
+                        </a:spcBef>
+                        <a:spcAft>
+                          <a:spcPts val="0"/>
+                        </a:spcAft>
+                        <a:buNone/>
+                      </a:pPr>
+                      <a:r>
+                        <a:rPr b="1" lang="en-US" sz="1800">
+                          <a:latin typeface="Calibri"/>
+                          <a:ea typeface="Calibri"/>
+                          <a:cs typeface="Calibri"/>
+                          <a:sym typeface="Calibri"/>
+                        </a:rPr>
+                        <a:t>Jaffar</a:t>
+                      </a:r>
+                      <a:endParaRPr b="1" sz="1800">
+                        <a:latin typeface="Calibri"/>
+                        <a:ea typeface="Calibri"/>
+                        <a:cs typeface="Calibri"/>
+                        <a:sym typeface="Calibri"/>
+                      </a:endParaRPr>
+                    </a:p>
+                  </a:txBody>
+                  <a:tcPr marT="91425" marB="91425" marR="91425" marL="91425"/>
+                </a:tc>
+                <a:tc>
+                  <a:txBody>
+                    <a:bodyPr/>
+                    <a:lstStyle/>
+                    <a:p>
+                      <a:pPr indent="0" lvl="0" marL="0" rtl="0" algn="l">
+                        <a:lnSpc>
+                          <a:spcPct val="150000"/>
+                        </a:lnSpc>
+                        <a:spcBef>
+                          <a:spcPts val="0"/>
+                        </a:spcBef>
+                        <a:spcAft>
+                          <a:spcPts val="0"/>
+                        </a:spcAft>
+                        <a:buNone/>
+                      </a:pPr>
+                      <a:r>
+                        <a:rPr lang="en-US" sz="1800">
+                          <a:latin typeface="Calibri"/>
+                          <a:ea typeface="Calibri"/>
+                          <a:cs typeface="Calibri"/>
+                          <a:sym typeface="Calibri"/>
+                        </a:rPr>
+                        <a:t>Project Lead + Oral Cavity Pipeline + Fusion Lead</a:t>
+                      </a:r>
+                      <a:endParaRPr sz="1800">
+                        <a:latin typeface="Calibri"/>
+                        <a:ea typeface="Calibri"/>
+                        <a:cs typeface="Calibri"/>
+                        <a:sym typeface="Calibri"/>
+                      </a:endParaRPr>
+                    </a:p>
+                  </a:txBody>
+                  <a:tcPr marT="91425" marB="91425" marR="91425" marL="91425"/>
+                </a:tc>
+                <a:tc>
+                  <a:txBody>
+                    <a:bodyPr/>
+                    <a:lstStyle/>
+                    <a:p>
+                      <a:pPr indent="0" lvl="0" marL="0" rtl="0" algn="l">
+                        <a:lnSpc>
+                          <a:spcPct val="150000"/>
+                        </a:lnSpc>
+                        <a:spcBef>
+                          <a:spcPts val="0"/>
+                        </a:spcBef>
+                        <a:spcAft>
+                          <a:spcPts val="0"/>
+                        </a:spcAft>
+                        <a:buNone/>
+                      </a:pPr>
+                      <a:r>
+                        <a:rPr lang="en-US" sz="1800">
+                          <a:latin typeface="Calibri"/>
+                          <a:ea typeface="Calibri"/>
+                          <a:cs typeface="Calibri"/>
+                          <a:sym typeface="Calibri"/>
+                        </a:rPr>
+                        <a:t>Oral cavity pipeline; cross-modal fusion; </a:t>
+                      </a:r>
+                      <a:endParaRPr sz="1800">
+                        <a:latin typeface="Calibri"/>
+                        <a:ea typeface="Calibri"/>
+                        <a:cs typeface="Calibri"/>
+                        <a:sym typeface="Calibri"/>
+                      </a:endParaRPr>
+                    </a:p>
+                    <a:p>
+                      <a:pPr indent="0" lvl="0" marL="0" rtl="0" algn="l">
+                        <a:lnSpc>
+                          <a:spcPct val="150000"/>
+                        </a:lnSpc>
+                        <a:spcBef>
+                          <a:spcPts val="0"/>
+                        </a:spcBef>
+                        <a:spcAft>
+                          <a:spcPts val="0"/>
+                        </a:spcAft>
+                        <a:buNone/>
+                      </a:pPr>
+                      <a:r>
+                        <a:rPr lang="en-US" sz="1800">
+                          <a:latin typeface="Calibri"/>
+                          <a:ea typeface="Calibri"/>
+                          <a:cs typeface="Calibri"/>
+                          <a:sym typeface="Calibri"/>
+                        </a:rPr>
+                        <a:t>backend API;</a:t>
+                      </a:r>
+                      <a:endParaRPr sz="1800">
+                        <a:latin typeface="Calibri"/>
+                        <a:ea typeface="Calibri"/>
+                        <a:cs typeface="Calibri"/>
+                        <a:sym typeface="Calibri"/>
+                      </a:endParaRPr>
+                    </a:p>
+                    <a:p>
+                      <a:pPr indent="0" lvl="0" marL="0" rtl="0" algn="l">
+                        <a:lnSpc>
+                          <a:spcPct val="150000"/>
+                        </a:lnSpc>
+                        <a:spcBef>
+                          <a:spcPts val="0"/>
+                        </a:spcBef>
+                        <a:spcAft>
+                          <a:spcPts val="0"/>
+                        </a:spcAft>
+                        <a:buNone/>
+                      </a:pPr>
+                      <a:r>
+                        <a:rPr lang="en-US" sz="1800">
+                          <a:latin typeface="Calibri"/>
+                          <a:ea typeface="Calibri"/>
+                          <a:cs typeface="Calibri"/>
+                          <a:sym typeface="Calibri"/>
+                        </a:rPr>
+                        <a:t>overall coordination</a:t>
+                      </a:r>
+                      <a:endParaRPr sz="1800">
+                        <a:latin typeface="Calibri"/>
+                        <a:ea typeface="Calibri"/>
+                        <a:cs typeface="Calibri"/>
+                        <a:sym typeface="Calibri"/>
+                      </a:endParaRPr>
+                    </a:p>
+                  </a:txBody>
+                  <a:tcPr marT="91425" marB="91425" marR="91425" marL="91425"/>
+                </a:tc>
+              </a:tr>
+              <a:tr h="1140625">
+                <a:tc>
+                  <a:txBody>
+                    <a:bodyPr/>
+                    <a:lstStyle/>
+                    <a:p>
+                      <a:pPr indent="0" lvl="0" marL="0" rtl="0" algn="l">
+                        <a:lnSpc>
+                          <a:spcPct val="150000"/>
+                        </a:lnSpc>
+                        <a:spcBef>
+                          <a:spcPts val="0"/>
+                        </a:spcBef>
+                        <a:spcAft>
+                          <a:spcPts val="0"/>
+                        </a:spcAft>
+                        <a:buNone/>
+                      </a:pPr>
+                      <a:r>
+                        <a:rPr b="1" lang="en-US" sz="1800">
+                          <a:latin typeface="Calibri"/>
+                          <a:ea typeface="Calibri"/>
+                          <a:cs typeface="Calibri"/>
+                          <a:sym typeface="Calibri"/>
+                        </a:rPr>
+                        <a:t>Shahroz</a:t>
+                      </a:r>
+                      <a:endParaRPr b="1" sz="1800">
+                        <a:latin typeface="Calibri"/>
+                        <a:ea typeface="Calibri"/>
+                        <a:cs typeface="Calibri"/>
+                        <a:sym typeface="Calibri"/>
+                      </a:endParaRPr>
+                    </a:p>
+                  </a:txBody>
+                  <a:tcPr marT="91425" marB="91425" marR="91425" marL="91425"/>
+                </a:tc>
+                <a:tc>
+                  <a:txBody>
+                    <a:bodyPr/>
+                    <a:lstStyle/>
+                    <a:p>
+                      <a:pPr indent="0" lvl="0" marL="0" rtl="0" algn="l">
+                        <a:lnSpc>
+                          <a:spcPct val="150000"/>
+                        </a:lnSpc>
+                        <a:spcBef>
+                          <a:spcPts val="0"/>
+                        </a:spcBef>
+                        <a:spcAft>
+                          <a:spcPts val="0"/>
+                        </a:spcAft>
+                        <a:buNone/>
+                      </a:pPr>
+                      <a:r>
+                        <a:rPr lang="en-US" sz="1800">
+                          <a:latin typeface="Calibri"/>
+                          <a:ea typeface="Calibri"/>
+                          <a:cs typeface="Calibri"/>
+                          <a:sym typeface="Calibri"/>
+                        </a:rPr>
+                        <a:t>Nail &amp; Eye Pipelines + </a:t>
+                      </a:r>
+                      <a:r>
+                        <a:rPr lang="en-US" sz="1800">
+                          <a:solidFill>
+                            <a:schemeClr val="dk1"/>
+                          </a:solidFill>
+                          <a:latin typeface="Calibri"/>
+                          <a:ea typeface="Calibri"/>
+                          <a:cs typeface="Calibri"/>
+                          <a:sym typeface="Calibri"/>
+                        </a:rPr>
+                        <a:t>Deployment Lead</a:t>
+                      </a:r>
+                      <a:endParaRPr sz="1800">
+                        <a:latin typeface="Calibri"/>
+                        <a:ea typeface="Calibri"/>
+                        <a:cs typeface="Calibri"/>
+                        <a:sym typeface="Calibri"/>
+                      </a:endParaRPr>
+                    </a:p>
+                  </a:txBody>
+                  <a:tcPr marT="91425" marB="91425" marR="91425" marL="91425"/>
+                </a:tc>
+                <a:tc>
+                  <a:txBody>
+                    <a:bodyPr/>
+                    <a:lstStyle/>
+                    <a:p>
+                      <a:pPr indent="0" lvl="0" marL="0" rtl="0" algn="l">
+                        <a:lnSpc>
+                          <a:spcPct val="150000"/>
+                        </a:lnSpc>
+                        <a:spcBef>
+                          <a:spcPts val="0"/>
+                        </a:spcBef>
+                        <a:spcAft>
+                          <a:spcPts val="0"/>
+                        </a:spcAft>
+                        <a:buNone/>
+                      </a:pPr>
+                      <a:r>
+                        <a:rPr lang="en-US" sz="1800">
+                          <a:latin typeface="Calibri"/>
+                          <a:ea typeface="Calibri"/>
+                          <a:cs typeface="Calibri"/>
+                          <a:sym typeface="Calibri"/>
+                        </a:rPr>
+                        <a:t>Pipeline for nails and eyes</a:t>
+                      </a:r>
+                      <a:r>
+                        <a:rPr lang="en-US" sz="1800">
+                          <a:latin typeface="Calibri"/>
+                          <a:ea typeface="Calibri"/>
+                          <a:cs typeface="Calibri"/>
+                          <a:sym typeface="Calibri"/>
+                        </a:rPr>
+                        <a:t>; </a:t>
+                      </a:r>
+                      <a:r>
+                        <a:rPr lang="en-US" sz="1800">
+                          <a:solidFill>
+                            <a:schemeClr val="dk1"/>
+                          </a:solidFill>
+                          <a:latin typeface="Calibri"/>
+                          <a:ea typeface="Calibri"/>
+                          <a:cs typeface="Calibri"/>
+                          <a:sym typeface="Calibri"/>
+                        </a:rPr>
+                        <a:t>handles deployment</a:t>
+                      </a:r>
+                      <a:endParaRPr/>
+                    </a:p>
+                  </a:txBody>
+                  <a:tcPr marT="91425" marB="91425" marR="91425" marL="91425"/>
+                </a:tc>
+              </a:tr>
+              <a:tr h="1030450">
+                <a:tc>
+                  <a:txBody>
+                    <a:bodyPr/>
+                    <a:lstStyle/>
+                    <a:p>
+                      <a:pPr indent="0" lvl="0" marL="0" rtl="0" algn="l">
+                        <a:lnSpc>
+                          <a:spcPct val="150000"/>
+                        </a:lnSpc>
+                        <a:spcBef>
+                          <a:spcPts val="0"/>
+                        </a:spcBef>
+                        <a:spcAft>
+                          <a:spcPts val="0"/>
+                        </a:spcAft>
+                        <a:buNone/>
+                      </a:pPr>
+                      <a:r>
+                        <a:rPr b="1" lang="en-US" sz="1800">
+                          <a:latin typeface="Calibri"/>
+                          <a:ea typeface="Calibri"/>
+                          <a:cs typeface="Calibri"/>
+                          <a:sym typeface="Calibri"/>
+                        </a:rPr>
+                        <a:t>Sarmad</a:t>
+                      </a:r>
+                      <a:endParaRPr b="1" sz="1800">
+                        <a:latin typeface="Calibri"/>
+                        <a:ea typeface="Calibri"/>
+                        <a:cs typeface="Calibri"/>
+                        <a:sym typeface="Calibri"/>
+                      </a:endParaRPr>
+                    </a:p>
+                  </a:txBody>
+                  <a:tcPr marT="91425" marB="91425" marR="91425" marL="91425"/>
+                </a:tc>
+                <a:tc>
+                  <a:txBody>
+                    <a:bodyPr/>
+                    <a:lstStyle/>
+                    <a:p>
+                      <a:pPr indent="0" lvl="0" marL="0" rtl="0" algn="l">
+                        <a:lnSpc>
+                          <a:spcPct val="150000"/>
+                        </a:lnSpc>
+                        <a:spcBef>
+                          <a:spcPts val="0"/>
+                        </a:spcBef>
+                        <a:spcAft>
+                          <a:spcPts val="0"/>
+                        </a:spcAft>
+                        <a:buNone/>
+                      </a:pPr>
+                      <a:r>
+                        <a:rPr lang="en-US" sz="1800">
+                          <a:latin typeface="Calibri"/>
+                          <a:ea typeface="Calibri"/>
+                          <a:cs typeface="Calibri"/>
+                          <a:sym typeface="Calibri"/>
+                        </a:rPr>
+                        <a:t>Tongue &amp; Palm Pipelines +</a:t>
+                      </a:r>
+                      <a:endParaRPr sz="1800">
+                        <a:latin typeface="Calibri"/>
+                        <a:ea typeface="Calibri"/>
+                        <a:cs typeface="Calibri"/>
+                        <a:sym typeface="Calibri"/>
+                      </a:endParaRPr>
+                    </a:p>
+                    <a:p>
+                      <a:pPr indent="0" lvl="0" marL="0" rtl="0" algn="l">
+                        <a:lnSpc>
+                          <a:spcPct val="150000"/>
+                        </a:lnSpc>
+                        <a:spcBef>
+                          <a:spcPts val="0"/>
+                        </a:spcBef>
+                        <a:spcAft>
+                          <a:spcPts val="0"/>
+                        </a:spcAft>
+                        <a:buNone/>
+                      </a:pPr>
+                      <a:r>
+                        <a:rPr lang="en-US" sz="1800">
+                          <a:solidFill>
+                            <a:schemeClr val="dk1"/>
+                          </a:solidFill>
+                          <a:latin typeface="Calibri"/>
+                          <a:ea typeface="Calibri"/>
+                          <a:cs typeface="Calibri"/>
+                          <a:sym typeface="Calibri"/>
+                        </a:rPr>
+                        <a:t>App Lead </a:t>
+                      </a:r>
+                      <a:r>
+                        <a:rPr lang="en-US" sz="1800">
+                          <a:latin typeface="Calibri"/>
+                          <a:ea typeface="Calibri"/>
+                          <a:cs typeface="Calibri"/>
+                          <a:sym typeface="Calibri"/>
+                        </a:rPr>
+                        <a:t> </a:t>
+                      </a:r>
+                      <a:endParaRPr sz="1800">
+                        <a:latin typeface="Calibri"/>
+                        <a:ea typeface="Calibri"/>
+                        <a:cs typeface="Calibri"/>
+                        <a:sym typeface="Calibri"/>
+                      </a:endParaRPr>
+                    </a:p>
+                  </a:txBody>
+                  <a:tcPr marT="91425" marB="91425" marR="91425" marL="91425"/>
+                </a:tc>
+                <a:tc>
+                  <a:txBody>
+                    <a:bodyPr/>
+                    <a:lstStyle/>
+                    <a:p>
+                      <a:pPr indent="0" lvl="0" marL="0" rtl="0" algn="l">
+                        <a:lnSpc>
+                          <a:spcPct val="150000"/>
+                        </a:lnSpc>
+                        <a:spcBef>
+                          <a:spcPts val="0"/>
+                        </a:spcBef>
+                        <a:spcAft>
+                          <a:spcPts val="0"/>
+                        </a:spcAft>
+                        <a:buNone/>
+                      </a:pPr>
+                      <a:r>
+                        <a:rPr lang="en-US" sz="1800">
+                          <a:latin typeface="Calibri"/>
+                          <a:ea typeface="Calibri"/>
+                          <a:cs typeface="Calibri"/>
+                          <a:sym typeface="Calibri"/>
+                        </a:rPr>
+                        <a:t>Pipeline for tongue and palm; </a:t>
+                      </a:r>
+                      <a:r>
+                        <a:rPr lang="en-US" sz="1800">
+                          <a:solidFill>
+                            <a:schemeClr val="dk1"/>
+                          </a:solidFill>
+                          <a:latin typeface="Calibri"/>
+                          <a:ea typeface="Calibri"/>
+                          <a:cs typeface="Calibri"/>
+                          <a:sym typeface="Calibri"/>
+                        </a:rPr>
+                        <a:t>b</a:t>
+                      </a:r>
+                      <a:r>
+                        <a:rPr lang="en-US" sz="1800">
+                          <a:solidFill>
+                            <a:schemeClr val="dk1"/>
+                          </a:solidFill>
+                          <a:latin typeface="Calibri"/>
+                          <a:ea typeface="Calibri"/>
+                          <a:cs typeface="Calibri"/>
+                          <a:sym typeface="Calibri"/>
+                        </a:rPr>
+                        <a:t>uilds the UI</a:t>
+                      </a:r>
+                      <a:endParaRPr sz="1800">
+                        <a:latin typeface="Calibri"/>
+                        <a:ea typeface="Calibri"/>
+                        <a:cs typeface="Calibri"/>
+                        <a:sym typeface="Calibri"/>
+                      </a:endParaRPr>
+                    </a:p>
+                  </a:txBody>
+                  <a:tcPr marT="91425" marB="91425" marR="91425" marL="91425"/>
+                </a:tc>
+              </a:tr>
+            </a:tbl>
+          </a:graphicData>
+        </a:graphic>
+      </p:graphicFrame>
     </p:spTree>
   </p:cSld>
   <p:clrMapOvr>
@@ -18040,10 +23357,18 @@
               <a:buNone/>
             </a:pPr>
             <a:r>
-              <a:rPr lang="en-US"/>
+              <a:rPr lang="en-US">
+                <a:solidFill>
+                  <a:srgbClr val="0B3D59"/>
+                </a:solidFill>
+              </a:rPr>
               <a:t>Table of Content</a:t>
             </a:r>
-            <a:endParaRPr/>
+            <a:endParaRPr>
+              <a:solidFill>
+                <a:srgbClr val="0B3D59"/>
+              </a:solidFill>
+            </a:endParaRPr>
           </a:p>
         </p:txBody>
       </p:sp>
@@ -18085,16 +23410,24 @@
                 <a:spcPts val="0"/>
               </a:spcAft>
               <a:buClr>
-                <a:schemeClr val="dk1"/>
+                <a:srgbClr val="0B3D59"/>
               </a:buClr>
               <a:buSzPts val="3200"/>
               <a:buChar char="•"/>
             </a:pPr>
             <a:r>
-              <a:rPr lang="en-US"/>
+              <a:rPr lang="en-US">
+                <a:solidFill>
+                  <a:srgbClr val="0B3D59"/>
+                </a:solidFill>
+              </a:rPr>
               <a:t>Introduction and Background</a:t>
             </a:r>
-            <a:endParaRPr/>
+            <a:endParaRPr>
+              <a:solidFill>
+                <a:srgbClr val="0B3D59"/>
+              </a:solidFill>
+            </a:endParaRPr>
           </a:p>
           <a:p>
             <a:pPr indent="-342900" lvl="0" marL="342900" rtl="0" algn="l">
@@ -18108,36 +23441,24 @@
                 <a:spcPts val="0"/>
               </a:spcAft>
               <a:buClr>
-                <a:schemeClr val="dk1"/>
+                <a:srgbClr val="0B3D59"/>
               </a:buClr>
               <a:buSzPts val="3200"/>
               <a:buChar char="•"/>
             </a:pPr>
             <a:r>
-              <a:rPr lang="en-US"/>
+              <a:rPr lang="en-US">
+                <a:solidFill>
+                  <a:srgbClr val="0B3D59"/>
+                </a:solidFill>
+              </a:rPr>
               <a:t>Literature Review and Summary Table</a:t>
             </a:r>
-            <a:endParaRPr/>
-          </a:p>
-          <a:p>
-            <a:pPr indent="-254000" lvl="0" marL="342900" rtl="0" algn="l">
-              <a:lnSpc>
-                <a:spcPct val="100000"/>
-              </a:lnSpc>
-              <a:spcBef>
-                <a:spcPts val="640"/>
-              </a:spcBef>
-              <a:spcAft>
-                <a:spcPts val="0"/>
-              </a:spcAft>
-              <a:buSzPts val="1800"/>
-              <a:buChar char="•"/>
-            </a:pPr>
-            <a:r>
-              <a:rPr lang="en-US"/>
-              <a:t>Gap Analysis</a:t>
-            </a:r>
-            <a:endParaRPr/>
+            <a:endParaRPr>
+              <a:solidFill>
+                <a:srgbClr val="0B3D59"/>
+              </a:solidFill>
+            </a:endParaRPr>
           </a:p>
           <a:p>
             <a:pPr indent="-342900" lvl="0" marL="342900" rtl="0" algn="l">
@@ -18151,16 +23472,24 @@
                 <a:spcPts val="0"/>
               </a:spcAft>
               <a:buClr>
-                <a:schemeClr val="dk1"/>
+                <a:srgbClr val="0B3D59"/>
               </a:buClr>
               <a:buSzPts val="3200"/>
               <a:buChar char="•"/>
             </a:pPr>
             <a:r>
-              <a:rPr lang="en-US"/>
-              <a:t>Problem Statement</a:t>
+              <a:rPr lang="en-US">
+                <a:solidFill>
+                  <a:srgbClr val="0B3D59"/>
+                </a:solidFill>
+              </a:rPr>
+              <a:t>Gap Analysis</a:t>
             </a:r>
-            <a:endParaRPr/>
+            <a:endParaRPr>
+              <a:solidFill>
+                <a:srgbClr val="0B3D59"/>
+              </a:solidFill>
+            </a:endParaRPr>
           </a:p>
           <a:p>
             <a:pPr indent="-342900" lvl="0" marL="342900" rtl="0" algn="l">
@@ -18174,16 +23503,24 @@
                 <a:spcPts val="0"/>
               </a:spcAft>
               <a:buClr>
-                <a:schemeClr val="dk1"/>
+                <a:srgbClr val="0B3D59"/>
               </a:buClr>
               <a:buSzPts val="3200"/>
               <a:buChar char="•"/>
             </a:pPr>
             <a:r>
-              <a:rPr lang="en-US"/>
-              <a:t>Proposed Solution &amp; Methodology</a:t>
+              <a:rPr lang="en-US">
+                <a:solidFill>
+                  <a:srgbClr val="0B3D59"/>
+                </a:solidFill>
+              </a:rPr>
+              <a:t>Problem Statement</a:t>
             </a:r>
-            <a:endParaRPr/>
+            <a:endParaRPr>
+              <a:solidFill>
+                <a:srgbClr val="0B3D59"/>
+              </a:solidFill>
+            </a:endParaRPr>
           </a:p>
           <a:p>
             <a:pPr indent="-342900" lvl="0" marL="342900" rtl="0" algn="l">
@@ -18197,16 +23534,24 @@
                 <a:spcPts val="0"/>
               </a:spcAft>
               <a:buClr>
-                <a:schemeClr val="dk1"/>
+                <a:srgbClr val="0B3D59"/>
               </a:buClr>
               <a:buSzPts val="3200"/>
               <a:buChar char="•"/>
             </a:pPr>
             <a:r>
-              <a:rPr lang="en-US"/>
-              <a:t>Project Scope</a:t>
+              <a:rPr lang="en-US">
+                <a:solidFill>
+                  <a:srgbClr val="0B3D59"/>
+                </a:solidFill>
+              </a:rPr>
+              <a:t>Proposed Solution &amp; Methodology</a:t>
             </a:r>
-            <a:endParaRPr/>
+            <a:endParaRPr>
+              <a:solidFill>
+                <a:srgbClr val="0B3D59"/>
+              </a:solidFill>
+            </a:endParaRPr>
           </a:p>
           <a:p>
             <a:pPr indent="-342900" lvl="0" marL="342900" rtl="0" algn="l">
@@ -18219,14 +23564,25 @@
               <a:spcAft>
                 <a:spcPts val="0"/>
               </a:spcAft>
+              <a:buClr>
+                <a:srgbClr val="0B3D59"/>
+              </a:buClr>
               <a:buSzPts val="3200"/>
               <a:buChar char="•"/>
             </a:pPr>
             <a:r>
-              <a:rPr lang="en-US"/>
-              <a:t>Work Breakdown Structure</a:t>
+              <a:rPr lang="en-US">
+                <a:solidFill>
+                  <a:srgbClr val="0B3D59"/>
+                </a:solidFill>
+              </a:rPr>
+              <a:t>Project Scope</a:t>
             </a:r>
-            <a:endParaRPr/>
+            <a:endParaRPr>
+              <a:solidFill>
+                <a:srgbClr val="0B3D59"/>
+              </a:solidFill>
+            </a:endParaRPr>
           </a:p>
           <a:p>
             <a:pPr indent="-342900" lvl="0" marL="342900" rtl="0" algn="l">
@@ -18239,14 +23595,56 @@
               <a:spcAft>
                 <a:spcPts val="0"/>
               </a:spcAft>
+              <a:buClr>
+                <a:srgbClr val="0B3D59"/>
+              </a:buClr>
               <a:buSzPts val="3200"/>
               <a:buChar char="•"/>
             </a:pPr>
             <a:r>
-              <a:rPr lang="en-US"/>
+              <a:rPr lang="en-US">
+                <a:solidFill>
+                  <a:srgbClr val="0B3D59"/>
+                </a:solidFill>
+              </a:rPr>
+              <a:t>Work Breakdown Structure</a:t>
+            </a:r>
+            <a:endParaRPr>
+              <a:solidFill>
+                <a:srgbClr val="0B3D59"/>
+              </a:solidFill>
+            </a:endParaRPr>
+          </a:p>
+          <a:p>
+            <a:pPr indent="-342900" lvl="0" marL="342900" rtl="0" algn="l">
+              <a:lnSpc>
+                <a:spcPct val="100000"/>
+              </a:lnSpc>
+              <a:spcBef>
+                <a:spcPts val="640"/>
+              </a:spcBef>
+              <a:spcAft>
+                <a:spcPts val="0"/>
+              </a:spcAft>
+              <a:buClr>
+                <a:srgbClr val="0B3D59"/>
+              </a:buClr>
+              <a:buSzPts val="3200"/>
+              <a:buChar char="•"/>
+            </a:pPr>
+            <a:r>
+              <a:rPr lang="en-US">
+                <a:solidFill>
+                  <a:srgbClr val="0B3D59"/>
+                </a:solidFill>
+              </a:rPr>
               <a:t>Roles and Responsibilities</a:t>
             </a:r>
-            <a:endParaRPr/>
+            <a:endParaRPr>
+              <a:solidFill>
+                <a:srgbClr val="0B3D59"/>
+              </a:solidFill>
+            </a:endParaRPr>
           </a:p>
         </p:txBody>
       </p:sp>
@@ -18316,10 +23714,18 @@
               <a:buNone/>
             </a:pPr>
             <a:r>
-              <a:rPr lang="en-US"/>
+              <a:rPr lang="en-US">
+                <a:solidFill>
+                  <a:srgbClr val="0B3D59"/>
+                </a:solidFill>
+              </a:rPr>
               <a:t>INTRODUCTION AND BACKGROUND</a:t>
             </a:r>
-            <a:endParaRPr/>
+            <a:endParaRPr>
+              <a:solidFill>
+                <a:srgbClr val="0B3D59"/>
+              </a:solidFill>
+            </a:endParaRPr>
           </a:p>
         </p:txBody>
       </p:sp>
@@ -18437,10 +23843,18 @@
               <a:buNone/>
             </a:pPr>
             <a:r>
-              <a:rPr b="1" lang="en-US" sz="4000"/>
+              <a:rPr b="1" lang="en-US" sz="4000">
+                <a:solidFill>
+                  <a:srgbClr val="0B3D59"/>
+                </a:solidFill>
+              </a:rPr>
               <a:t>INTRODUCTION AND BACKGROUND</a:t>
             </a:r>
-            <a:endParaRPr/>
+            <a:endParaRPr>
+              <a:solidFill>
+                <a:srgbClr val="0B3D59"/>
+              </a:solidFill>
+            </a:endParaRPr>
           </a:p>
         </p:txBody>
       </p:sp>
@@ -18452,7 +23866,7 @@
         </p:nvSpPr>
         <p:spPr>
           <a:xfrm>
-            <a:off x="548653" y="1678619"/>
+            <a:off x="548653" y="1580406"/>
             <a:ext cx="164700" cy="164700"/>
           </a:xfrm>
           <a:prstGeom prst="ellipse">
@@ -18503,7 +23917,7 @@
         </p:nvSpPr>
         <p:spPr>
           <a:xfrm>
-            <a:off x="924980" y="1572777"/>
+            <a:off x="896165" y="1443109"/>
             <a:ext cx="7761900" cy="411600"/>
           </a:xfrm>
           <a:prstGeom prst="rect">
@@ -18537,7 +23951,7 @@
             <a:r>
               <a:rPr b="1" i="0" lang="en-US" sz="2058" u="none" cap="none" strike="noStrike">
                 <a:solidFill>
-                  <a:schemeClr val="dk1"/>
+                  <a:srgbClr val="0B3D59"/>
                 </a:solidFill>
                 <a:latin typeface="Calibri"/>
                 <a:ea typeface="Calibri"/>
@@ -18548,7 +23962,7 @@
             </a:r>
             <a:endParaRPr i="0" sz="2058" u="none" cap="none" strike="noStrike">
               <a:solidFill>
-                <a:schemeClr val="dk1"/>
+                <a:srgbClr val="0B3D59"/>
               </a:solidFill>
               <a:latin typeface="Calibri"/>
               <a:ea typeface="Calibri"/>
@@ -18566,7 +23980,7 @@
         </p:nvSpPr>
         <p:spPr>
           <a:xfrm>
-            <a:off x="924980" y="1890346"/>
+            <a:off x="924980" y="1775085"/>
             <a:ext cx="7761900" cy="764400"/>
           </a:xfrm>
           <a:prstGeom prst="rect">
@@ -18584,6 +23998,9 @@
           <a:lstStyle/>
           <a:p>
             <a:pPr indent="0" lvl="0" marL="0" marR="0" rtl="0" algn="l">
+              <a:lnSpc>
+                <a:spcPct val="115000"/>
+              </a:lnSpc>
               <a:spcBef>
                 <a:spcPts val="0"/>
               </a:spcBef>
@@ -18677,7 +24094,7 @@
         </p:nvSpPr>
         <p:spPr>
           <a:xfrm>
-            <a:off x="548653" y="3031048"/>
+            <a:off x="548653" y="3088678"/>
             <a:ext cx="164700" cy="164700"/>
           </a:xfrm>
           <a:prstGeom prst="ellipse">
@@ -18762,7 +24179,7 @@
             <a:r>
               <a:rPr b="1" i="0" lang="en-US" sz="2058" u="none" cap="none" strike="noStrike">
                 <a:solidFill>
-                  <a:schemeClr val="dk1"/>
+                  <a:srgbClr val="0B3D59"/>
                 </a:solidFill>
                 <a:latin typeface="Calibri"/>
                 <a:ea typeface="Calibri"/>
@@ -18773,7 +24190,7 @@
             </a:r>
             <a:endParaRPr i="0" sz="2058" u="none" cap="none" strike="noStrike">
               <a:solidFill>
-                <a:schemeClr val="dk1"/>
+                <a:srgbClr val="0B3D59"/>
               </a:solidFill>
               <a:latin typeface="Calibri"/>
               <a:ea typeface="Calibri"/>
@@ -18809,6 +24226,9 @@
           <a:lstStyle/>
           <a:p>
             <a:pPr indent="0" lvl="0" marL="0" marR="0" rtl="0" algn="l">
+              <a:lnSpc>
+                <a:spcPct val="115000"/>
+              </a:lnSpc>
               <a:spcBef>
                 <a:spcPts val="0"/>
               </a:spcBef>
@@ -18854,7 +24274,7 @@
         </p:nvSpPr>
         <p:spPr>
           <a:xfrm>
-            <a:off x="548653" y="4383476"/>
+            <a:off x="548653" y="4513144"/>
             <a:ext cx="164700" cy="164700"/>
           </a:xfrm>
           <a:prstGeom prst="ellipse">
@@ -18905,7 +24325,7 @@
         </p:nvSpPr>
         <p:spPr>
           <a:xfrm>
-            <a:off x="924980" y="4277634"/>
+            <a:off x="881757" y="4378487"/>
             <a:ext cx="7761900" cy="411600"/>
           </a:xfrm>
           <a:prstGeom prst="rect">
@@ -18939,7 +24359,7 @@
             <a:r>
               <a:rPr b="1" i="0" lang="en-US" sz="2058" u="none" cap="none" strike="noStrike">
                 <a:solidFill>
-                  <a:schemeClr val="dk1"/>
+                  <a:srgbClr val="0B3D59"/>
                 </a:solidFill>
                 <a:latin typeface="Calibri"/>
                 <a:ea typeface="Calibri"/>
@@ -18950,7 +24370,7 @@
             </a:r>
             <a:endParaRPr i="0" sz="2058" u="none" cap="none" strike="noStrike">
               <a:solidFill>
-                <a:schemeClr val="dk1"/>
+                <a:srgbClr val="0B3D59"/>
               </a:solidFill>
               <a:latin typeface="Calibri"/>
               <a:ea typeface="Calibri"/>
@@ -18968,7 +24388,7 @@
         </p:nvSpPr>
         <p:spPr>
           <a:xfrm>
-            <a:off x="924980" y="4665722"/>
+            <a:off x="924980" y="4737760"/>
             <a:ext cx="7761900" cy="764400"/>
           </a:xfrm>
           <a:prstGeom prst="rect">
@@ -18986,6 +24406,9 @@
           <a:lstStyle/>
           <a:p>
             <a:pPr indent="0" lvl="0" marL="0" marR="0" rtl="0" algn="l">
+              <a:lnSpc>
+                <a:spcPct val="115000"/>
+              </a:lnSpc>
               <a:spcBef>
                 <a:spcPts val="0"/>
               </a:spcBef>
@@ -19028,6 +24451,405 @@
   <p:clrMapOvr>
     <a:masterClrMapping/>
   </p:clrMapOvr>
+  <p:timing>
+    <p:tnLst>
+      <p:par>
+        <p:cTn dur="indefinite" nodeType="tmRoot" restart="never">
+          <p:childTnLst>
+            <p:seq concurrent="1" nextAc="seek">
+              <p:cTn dur="indefinite" id="2" nodeType="mainSeq">
+                <p:childTnLst>
+                  <p:par>
+                    <p:cTn fill="hold">
+                      <p:stCondLst>
+                        <p:cond delay="indefinite"/>
+                      </p:stCondLst>
+                      <p:childTnLst>
+                        <p:par>
+                          <p:cTn fill="hold">
+                            <p:stCondLst>
+                              <p:cond delay="0"/>
+                            </p:stCondLst>
+                            <p:childTnLst>
+                              <p:par>
+                                <p:cTn fill="hold" nodeType="clickEffect" presetClass="entr" presetID="10" presetSubtype="0">
+                                  <p:stCondLst>
+                                    <p:cond delay="0"/>
+                                  </p:stCondLst>
+                                  <p:childTnLst>
+                                    <p:set>
+                                      <p:cBhvr>
+                                        <p:cTn dur="1" fill="hold">
+                                          <p:stCondLst>
+                                            <p:cond delay="0"/>
+                                          </p:stCondLst>
+                                        </p:cTn>
+                                        <p:tgtEl>
+                                          <p:spTgt spid="110"/>
+                                        </p:tgtEl>
+                                        <p:attrNameLst>
+                                          <p:attrName>style.visibility</p:attrName>
+                                        </p:attrNameLst>
+                                      </p:cBhvr>
+                                      <p:to>
+                                        <p:strVal val="visible"/>
+                                      </p:to>
+                                    </p:set>
+                                    <p:animEffect filter="fade" transition="in">
+                                      <p:cBhvr>
+                                        <p:cTn dur="1000"/>
+                                        <p:tgtEl>
+                                          <p:spTgt spid="110"/>
+                                        </p:tgtEl>
+                                      </p:cBhvr>
+                                    </p:animEffect>
+                                  </p:childTnLst>
+                                </p:cTn>
+                              </p:par>
+                              <p:par>
+                                <p:cTn fill="hold" nodeType="withEffect" presetClass="entr" presetID="10" presetSubtype="0">
+                                  <p:stCondLst>
+                                    <p:cond delay="0"/>
+                                  </p:stCondLst>
+                                  <p:childTnLst>
+                                    <p:set>
+                                      <p:cBhvr>
+                                        <p:cTn dur="1" fill="hold">
+                                          <p:stCondLst>
+                                            <p:cond delay="0"/>
+                                          </p:stCondLst>
+                                        </p:cTn>
+                                        <p:tgtEl>
+                                          <p:spTgt spid="111"/>
+                                        </p:tgtEl>
+                                        <p:attrNameLst>
+                                          <p:attrName>style.visibility</p:attrName>
+                                        </p:attrNameLst>
+                                      </p:cBhvr>
+                                      <p:to>
+                                        <p:strVal val="visible"/>
+                                      </p:to>
+                                    </p:set>
+                                    <p:animEffect filter="fade" transition="in">
+                                      <p:cBhvr>
+                                        <p:cTn dur="1000"/>
+                                        <p:tgtEl>
+                                          <p:spTgt spid="111"/>
+                                        </p:tgtEl>
+                                      </p:cBhvr>
+                                    </p:animEffect>
+                                  </p:childTnLst>
+                                </p:cTn>
+                              </p:par>
+                              <p:par>
+                                <p:cTn fill="hold" nodeType="withEffect" presetClass="entr" presetID="10" presetSubtype="0">
+                                  <p:stCondLst>
+                                    <p:cond delay="0"/>
+                                  </p:stCondLst>
+                                  <p:childTnLst>
+                                    <p:set>
+                                      <p:cBhvr>
+                                        <p:cTn dur="1" fill="hold">
+                                          <p:stCondLst>
+                                            <p:cond delay="0"/>
+                                          </p:stCondLst>
+                                        </p:cTn>
+                                        <p:tgtEl>
+                                          <p:spTgt spid="112"/>
+                                        </p:tgtEl>
+                                        <p:attrNameLst>
+                                          <p:attrName>style.visibility</p:attrName>
+                                        </p:attrNameLst>
+                                      </p:cBhvr>
+                                      <p:to>
+                                        <p:strVal val="visible"/>
+                                      </p:to>
+                                    </p:set>
+                                    <p:animEffect filter="fade" transition="in">
+                                      <p:cBhvr>
+                                        <p:cTn dur="1000"/>
+                                        <p:tgtEl>
+                                          <p:spTgt spid="112"/>
+                                        </p:tgtEl>
+                                      </p:cBhvr>
+                                    </p:animEffect>
+                                  </p:childTnLst>
+                                </p:cTn>
+                              </p:par>
+                            </p:childTnLst>
+                          </p:cTn>
+                        </p:par>
+                      </p:childTnLst>
+                    </p:cTn>
+                  </p:par>
+                  <p:par>
+                    <p:cTn fill="hold">
+                      <p:stCondLst>
+                        <p:cond delay="indefinite"/>
+                      </p:stCondLst>
+                      <p:childTnLst>
+                        <p:par>
+                          <p:cTn fill="hold">
+                            <p:stCondLst>
+                              <p:cond delay="0"/>
+                            </p:stCondLst>
+                            <p:childTnLst>
+                              <p:par>
+                                <p:cTn fill="hold" nodeType="clickEffect" presetClass="entr" presetID="10" presetSubtype="0">
+                                  <p:stCondLst>
+                                    <p:cond delay="0"/>
+                                  </p:stCondLst>
+                                  <p:childTnLst>
+                                    <p:set>
+                                      <p:cBhvr>
+                                        <p:cTn dur="1" fill="hold">
+                                          <p:stCondLst>
+                                            <p:cond delay="0"/>
+                                          </p:stCondLst>
+                                        </p:cTn>
+                                        <p:tgtEl>
+                                          <p:spTgt spid="113"/>
+                                        </p:tgtEl>
+                                        <p:attrNameLst>
+                                          <p:attrName>style.visibility</p:attrName>
+                                        </p:attrNameLst>
+                                      </p:cBhvr>
+                                      <p:to>
+                                        <p:strVal val="visible"/>
+                                      </p:to>
+                                    </p:set>
+                                    <p:animEffect filter="fade" transition="in">
+                                      <p:cBhvr>
+                                        <p:cTn dur="1000"/>
+                                        <p:tgtEl>
+                                          <p:spTgt spid="113"/>
+                                        </p:tgtEl>
+                                      </p:cBhvr>
+                                    </p:animEffect>
+                                  </p:childTnLst>
+                                </p:cTn>
+                              </p:par>
+                              <p:par>
+                                <p:cTn fill="hold" nodeType="withEffect" presetClass="entr" presetID="10" presetSubtype="0">
+                                  <p:stCondLst>
+                                    <p:cond delay="0"/>
+                                  </p:stCondLst>
+                                  <p:childTnLst>
+                                    <p:set>
+                                      <p:cBhvr>
+                                        <p:cTn dur="1" fill="hold">
+                                          <p:stCondLst>
+                                            <p:cond delay="0"/>
+                                          </p:stCondLst>
+                                        </p:cTn>
+                                        <p:tgtEl>
+                                          <p:spTgt spid="114"/>
+                                        </p:tgtEl>
+                                        <p:attrNameLst>
+                                          <p:attrName>style.visibility</p:attrName>
+                                        </p:attrNameLst>
+                                      </p:cBhvr>
+                                      <p:to>
+                                        <p:strVal val="visible"/>
+                                      </p:to>
+                                    </p:set>
+                                    <p:animEffect filter="fade" transition="in">
+                                      <p:cBhvr>
+                                        <p:cTn dur="1000"/>
+                                        <p:tgtEl>
+                                          <p:spTgt spid="114"/>
+                                        </p:tgtEl>
+                                      </p:cBhvr>
+                                    </p:animEffect>
+                                  </p:childTnLst>
+                                </p:cTn>
+                              </p:par>
+                              <p:par>
+                                <p:cTn fill="hold" nodeType="withEffect" presetClass="entr" presetID="10" presetSubtype="0">
+                                  <p:stCondLst>
+                                    <p:cond delay="0"/>
+                                  </p:stCondLst>
+                                  <p:childTnLst>
+                                    <p:set>
+                                      <p:cBhvr>
+                                        <p:cTn dur="1" fill="hold">
+                                          <p:stCondLst>
+                                            <p:cond delay="0"/>
+                                          </p:stCondLst>
+                                        </p:cTn>
+                                        <p:tgtEl>
+                                          <p:spTgt spid="115"/>
+                                        </p:tgtEl>
+                                        <p:attrNameLst>
+                                          <p:attrName>style.visibility</p:attrName>
+                                        </p:attrNameLst>
+                                      </p:cBhvr>
+                                      <p:to>
+                                        <p:strVal val="visible"/>
+                                      </p:to>
+                                    </p:set>
+                                    <p:animEffect filter="fade" transition="in">
+                                      <p:cBhvr>
+                                        <p:cTn dur="1000"/>
+                                        <p:tgtEl>
+                                          <p:spTgt spid="115"/>
+                                        </p:tgtEl>
+                                      </p:cBhvr>
+                                    </p:animEffect>
+                                  </p:childTnLst>
+                                </p:cTn>
+                              </p:par>
+                            </p:childTnLst>
+                          </p:cTn>
+                        </p:par>
+                      </p:childTnLst>
+                    </p:cTn>
+                  </p:par>
+                  <p:par>
+                    <p:cTn fill="hold">
+                      <p:stCondLst>
+                        <p:cond delay="indefinite"/>
+                      </p:stCondLst>
+                      <p:childTnLst>
+                        <p:par>
+                          <p:cTn fill="hold">
+                            <p:stCondLst>
+                              <p:cond delay="0"/>
+                            </p:stCondLst>
+                            <p:childTnLst>
+                              <p:par>
+                                <p:cTn fill="hold" nodeType="clickEffect" presetClass="entr" presetID="10" presetSubtype="0">
+                                  <p:stCondLst>
+                                    <p:cond delay="0"/>
+                                  </p:stCondLst>
+                                  <p:childTnLst>
+                                    <p:set>
+                                      <p:cBhvr>
+                                        <p:cTn dur="1" fill="hold">
+                                          <p:stCondLst>
+                                            <p:cond delay="0"/>
+                                          </p:stCondLst>
+                                        </p:cTn>
+                                        <p:tgtEl>
+                                          <p:spTgt spid="116"/>
+                                        </p:tgtEl>
+                                        <p:attrNameLst>
+                                          <p:attrName>style.visibility</p:attrName>
+                                        </p:attrNameLst>
+                                      </p:cBhvr>
+                                      <p:to>
+                                        <p:strVal val="visible"/>
+                                      </p:to>
+                                    </p:set>
+                                    <p:animEffect filter="fade" transition="in">
+                                      <p:cBhvr>
+                                        <p:cTn dur="1000"/>
+                                        <p:tgtEl>
+                                          <p:spTgt spid="116"/>
+                                        </p:tgtEl>
+                                      </p:cBhvr>
+                                    </p:animEffect>
+                                  </p:childTnLst>
+                                </p:cTn>
+                              </p:par>
+                              <p:par>
+                                <p:cTn fill="hold" nodeType="withEffect" presetClass="entr" presetID="10" presetSubtype="0">
+                                  <p:stCondLst>
+                                    <p:cond delay="0"/>
+                                  </p:stCondLst>
+                                  <p:childTnLst>
+                                    <p:set>
+                                      <p:cBhvr>
+                                        <p:cTn dur="1" fill="hold">
+                                          <p:stCondLst>
+                                            <p:cond delay="0"/>
+                                          </p:stCondLst>
+                                        </p:cTn>
+                                        <p:tgtEl>
+                                          <p:spTgt spid="117"/>
+                                        </p:tgtEl>
+                                        <p:attrNameLst>
+                                          <p:attrName>style.visibility</p:attrName>
+                                        </p:attrNameLst>
+                                      </p:cBhvr>
+                                      <p:to>
+                                        <p:strVal val="visible"/>
+                                      </p:to>
+                                    </p:set>
+                                    <p:animEffect filter="fade" transition="in">
+                                      <p:cBhvr>
+                                        <p:cTn dur="1000"/>
+                                        <p:tgtEl>
+                                          <p:spTgt spid="117"/>
+                                        </p:tgtEl>
+                                      </p:cBhvr>
+                                    </p:animEffect>
+                                  </p:childTnLst>
+                                </p:cTn>
+                              </p:par>
+                              <p:par>
+                                <p:cTn fill="hold" nodeType="withEffect" presetClass="entr" presetID="10" presetSubtype="0">
+                                  <p:stCondLst>
+                                    <p:cond delay="0"/>
+                                  </p:stCondLst>
+                                  <p:childTnLst>
+                                    <p:set>
+                                      <p:cBhvr>
+                                        <p:cTn dur="1" fill="hold">
+                                          <p:stCondLst>
+                                            <p:cond delay="0"/>
+                                          </p:stCondLst>
+                                        </p:cTn>
+                                        <p:tgtEl>
+                                          <p:spTgt spid="118"/>
+                                        </p:tgtEl>
+                                        <p:attrNameLst>
+                                          <p:attrName>style.visibility</p:attrName>
+                                        </p:attrNameLst>
+                                      </p:cBhvr>
+                                      <p:to>
+                                        <p:strVal val="visible"/>
+                                      </p:to>
+                                    </p:set>
+                                    <p:animEffect filter="fade" transition="in">
+                                      <p:cBhvr>
+                                        <p:cTn dur="1000"/>
+                                        <p:tgtEl>
+                                          <p:spTgt spid="118"/>
+                                        </p:tgtEl>
+                                      </p:cBhvr>
+                                    </p:animEffect>
+                                  </p:childTnLst>
+                                </p:cTn>
+                              </p:par>
+                            </p:childTnLst>
+                          </p:cTn>
+                        </p:par>
+                      </p:childTnLst>
+                    </p:cTn>
+                  </p:par>
+                </p:childTnLst>
+              </p:cTn>
+              <p:prevCondLst>
+                <p:cond evt="onPrev">
+                  <p:tgtEl>
+                    <p:sldTgt/>
+                  </p:tgtEl>
+                </p:cond>
+              </p:prevCondLst>
+              <p:nextCondLst>
+                <p:cond evt="onNext">
+                  <p:tgtEl>
+                    <p:sldTgt/>
+                  </p:tgtEl>
+                </p:cond>
+              </p:nextCondLst>
+            </p:seq>
+          </p:childTnLst>
+        </p:cTn>
+      </p:par>
+    </p:tnLst>
+  </p:timing>
 </p:sld>
 </file>
 
@@ -19089,10 +24911,18 @@
               <a:buNone/>
             </a:pPr>
             <a:r>
-              <a:rPr lang="en-US"/>
+              <a:rPr lang="en-US">
+                <a:solidFill>
+                  <a:srgbClr val="0B3D59"/>
+                </a:solidFill>
+              </a:rPr>
               <a:t>LITERATURE REVIEW</a:t>
             </a:r>
-            <a:endParaRPr/>
+            <a:endParaRPr>
+              <a:solidFill>
+                <a:srgbClr val="0B3D59"/>
+              </a:solidFill>
+            </a:endParaRPr>
           </a:p>
         </p:txBody>
       </p:sp>
@@ -19232,7 +25062,7 @@
             <a:tbl>
               <a:tblPr>
                 <a:noFill/>
-                <a:tableStyleId>{55E94970-25BA-4ACD-85B8-0799969456D3}</a:tableStyleId>
+                <a:tableStyleId>{A86E29F2-8678-437A-8A81-A00D8066E49F}</a:tableStyleId>
               </a:tblPr>
               <a:tblGrid>
                 <a:gridCol w="2057400"/>
@@ -19240,7 +25070,7 @@
                 <a:gridCol w="2057400"/>
                 <a:gridCol w="2057400"/>
               </a:tblGrid>
-              <a:tr h="601400">
+              <a:tr h="562475">
                 <a:tc>
                   <a:txBody>
                     <a:bodyPr/>
@@ -19257,6 +25087,9 @@
                       </a:pPr>
                       <a:r>
                         <a:rPr b="1" lang="en-US" sz="2000">
+                          <a:solidFill>
+                            <a:schemeClr val="lt1"/>
+                          </a:solidFill>
                           <a:latin typeface="Calibri"/>
                           <a:ea typeface="Calibri"/>
                           <a:cs typeface="Calibri"/>
@@ -19265,6 +25098,9 @@
                         <a:t>Source</a:t>
                       </a:r>
                       <a:endParaRPr b="1" sz="2000">
+                        <a:solidFill>
+                          <a:schemeClr val="lt1"/>
+                        </a:solidFill>
                         <a:latin typeface="Calibri"/>
                         <a:ea typeface="Calibri"/>
                         <a:cs typeface="Calibri"/>
@@ -19274,7 +25110,7 @@
                   </a:txBody>
                   <a:tcPr marT="91425" marB="91425" marR="91425" marL="91425">
                     <a:solidFill>
-                      <a:srgbClr val="E1E9EA"/>
+                      <a:srgbClr val="1C7293"/>
                     </a:solidFill>
                   </a:tcPr>
                 </a:tc>
@@ -19294,6 +25130,9 @@
                       </a:pPr>
                       <a:r>
                         <a:rPr b="1" lang="en-US" sz="2000">
+                          <a:solidFill>
+                            <a:schemeClr val="lt1"/>
+                          </a:solidFill>
                           <a:latin typeface="Calibri"/>
                           <a:ea typeface="Calibri"/>
                           <a:cs typeface="Calibri"/>
@@ -19302,6 +25141,9 @@
                         <a:t>Modality</a:t>
                       </a:r>
                       <a:endParaRPr b="1" sz="2000">
+                        <a:solidFill>
+                          <a:schemeClr val="lt1"/>
+                        </a:solidFill>
                         <a:latin typeface="Calibri"/>
                         <a:ea typeface="Calibri"/>
                         <a:cs typeface="Calibri"/>
@@ -19311,7 +25153,7 @@
                   </a:txBody>
                   <a:tcPr marT="91425" marB="91425" marR="91425" marL="91425">
                     <a:solidFill>
-                      <a:srgbClr val="E1E9EA"/>
+                      <a:srgbClr val="1C7293"/>
                     </a:solidFill>
                   </a:tcPr>
                 </a:tc>
@@ -19331,6 +25173,9 @@
                       </a:pPr>
                       <a:r>
                         <a:rPr b="1" lang="en-US" sz="2000">
+                          <a:solidFill>
+                            <a:schemeClr val="lt1"/>
+                          </a:solidFill>
                           <a:latin typeface="Calibri"/>
                           <a:ea typeface="Calibri"/>
                           <a:cs typeface="Calibri"/>
@@ -19339,6 +25184,9 @@
                         <a:t>Method</a:t>
                       </a:r>
                       <a:endParaRPr b="1" sz="2000">
+                        <a:solidFill>
+                          <a:schemeClr val="lt1"/>
+                        </a:solidFill>
                         <a:latin typeface="Calibri"/>
                         <a:ea typeface="Calibri"/>
                         <a:cs typeface="Calibri"/>
@@ -19348,7 +25196,7 @@
                   </a:txBody>
                   <a:tcPr marT="91425" marB="91425" marR="91425" marL="91425">
                     <a:solidFill>
-                      <a:srgbClr val="E1E9EA"/>
+                      <a:srgbClr val="1C7293"/>
                     </a:solidFill>
                   </a:tcPr>
                 </a:tc>
@@ -19368,6 +25216,9 @@
                       </a:pPr>
                       <a:r>
                         <a:rPr b="1" lang="en-US" sz="2000">
+                          <a:solidFill>
+                            <a:schemeClr val="lt1"/>
+                          </a:solidFill>
                           <a:latin typeface="Calibri"/>
                           <a:ea typeface="Calibri"/>
                           <a:cs typeface="Calibri"/>
@@ -19376,6 +25227,9 @@
                         <a:t>Key Limitation</a:t>
                       </a:r>
                       <a:endParaRPr b="1" sz="2000">
+                        <a:solidFill>
+                          <a:schemeClr val="lt1"/>
+                        </a:solidFill>
                         <a:latin typeface="Calibri"/>
                         <a:ea typeface="Calibri"/>
                         <a:cs typeface="Calibri"/>
@@ -19385,12 +25239,12 @@
                   </a:txBody>
                   <a:tcPr marT="91425" marB="91425" marR="91425" marL="91425">
                     <a:solidFill>
-                      <a:srgbClr val="E1E9EA"/>
+                      <a:srgbClr val="1C7293"/>
                     </a:solidFill>
                   </a:tcPr>
                 </a:tc>
               </a:tr>
-              <a:tr h="918725">
+              <a:tr h="1076550">
                 <a:tc>
                   <a:txBody>
                     <a:bodyPr/>
@@ -19580,7 +25434,7 @@
                   <a:tcPr marT="91425" marB="91425" marR="91425" marL="91425"/>
                 </a:tc>
               </a:tr>
-              <a:tr h="918725">
+              <a:tr h="1076550">
                 <a:tc>
                   <a:txBody>
                     <a:bodyPr/>
@@ -19612,7 +25466,11 @@
                       </a:endParaRPr>
                     </a:p>
                   </a:txBody>
-                  <a:tcPr marT="91425" marB="91425" marR="91425" marL="91425"/>
+                  <a:tcPr marT="91425" marB="91425" marR="91425" marL="91425">
+                    <a:solidFill>
+                      <a:srgbClr val="E1E9EA"/>
+                    </a:solidFill>
+                  </a:tcPr>
                 </a:tc>
                 <a:tc>
                   <a:txBody>
@@ -19653,7 +25511,11 @@
                       </a:endParaRPr>
                     </a:p>
                   </a:txBody>
-                  <a:tcPr marT="91425" marB="91425" marR="91425" marL="91425"/>
+                  <a:tcPr marT="91425" marB="91425" marR="91425" marL="91425">
+                    <a:solidFill>
+                      <a:srgbClr val="E1E9EA"/>
+                    </a:solidFill>
+                  </a:tcPr>
                 </a:tc>
                 <a:tc>
                   <a:txBody>
@@ -19706,7 +25568,11 @@
                       </a:endParaRPr>
                     </a:p>
                   </a:txBody>
-                  <a:tcPr marT="91425" marB="91425" marR="91425" marL="91425"/>
+                  <a:tcPr marT="91425" marB="91425" marR="91425" marL="91425">
+                    <a:solidFill>
+                      <a:srgbClr val="E1E9EA"/>
+                    </a:solidFill>
+                  </a:tcPr>
                 </a:tc>
                 <a:tc>
                   <a:txBody>
@@ -19754,10 +25620,14 @@
                       </a:endParaRPr>
                     </a:p>
                   </a:txBody>
-                  <a:tcPr marT="91425" marB="91425" marR="91425" marL="91425"/>
+                  <a:tcPr marT="91425" marB="91425" marR="91425" marL="91425">
+                    <a:solidFill>
+                      <a:srgbClr val="E1E9EA"/>
+                    </a:solidFill>
+                  </a:tcPr>
                 </a:tc>
               </a:tr>
-              <a:tr h="918725">
+              <a:tr h="1179525">
                 <a:tc>
                   <a:txBody>
                     <a:bodyPr/>
@@ -19959,6 +25829,81 @@
   <p:clrMapOvr>
     <a:masterClrMapping/>
   </p:clrMapOvr>
+  <p:timing>
+    <p:tnLst>
+      <p:par>
+        <p:cTn dur="indefinite" nodeType="tmRoot" restart="never">
+          <p:childTnLst>
+            <p:seq concurrent="1" nextAc="seek">
+              <p:cTn dur="indefinite" id="2" nodeType="mainSeq">
+                <p:childTnLst>
+                  <p:par>
+                    <p:cTn fill="hold">
+                      <p:stCondLst>
+                        <p:cond delay="indefinite"/>
+                      </p:stCondLst>
+                      <p:childTnLst>
+                        <p:par>
+                          <p:cTn fill="hold">
+                            <p:stCondLst>
+                              <p:cond delay="0"/>
+                            </p:stCondLst>
+                            <p:childTnLst>
+                              <p:par>
+                                <p:cTn fill="hold" nodeType="clickEffect" presetClass="entr" presetID="1" presetSubtype="0">
+                                  <p:stCondLst>
+                                    <p:cond delay="0"/>
+                                  </p:stCondLst>
+                                  <p:childTnLst>
+                                    <p:set>
+                                      <p:cBhvr>
+                                        <p:cTn dur="1" fill="hold">
+                                          <p:stCondLst>
+                                            <p:cond delay="0"/>
+                                          </p:stCondLst>
+                                        </p:cTn>
+                                        <p:tgtEl>
+                                          <p:spTgt spid="130"/>
+                                        </p:tgtEl>
+                                        <p:attrNameLst>
+                                          <p:attrName>style.visibility</p:attrName>
+                                        </p:attrNameLst>
+                                      </p:cBhvr>
+                                      <p:to>
+                                        <p:strVal val="visible"/>
+                                      </p:to>
+                                    </p:set>
+                                  </p:childTnLst>
+                                </p:cTn>
+                              </p:par>
+                            </p:childTnLst>
+                          </p:cTn>
+                        </p:par>
+                      </p:childTnLst>
+                    </p:cTn>
+                  </p:par>
+                </p:childTnLst>
+              </p:cTn>
+              <p:prevCondLst>
+                <p:cond evt="onPrev">
+                  <p:tgtEl>
+                    <p:sldTgt/>
+                  </p:tgtEl>
+                </p:cond>
+              </p:prevCondLst>
+              <p:nextCondLst>
+                <p:cond evt="onNext">
+                  <p:tgtEl>
+                    <p:sldTgt/>
+                  </p:tgtEl>
+                </p:cond>
+              </p:nextCondLst>
+            </p:seq>
+          </p:childTnLst>
+        </p:cTn>
+      </p:par>
+    </p:tnLst>
+  </p:timing>
 </p:sld>
 </file>
 
@@ -20017,10 +25962,18 @@
               <a:buNone/>
             </a:pPr>
             <a:r>
-              <a:rPr b="1" lang="en-US" sz="4000"/>
+              <a:rPr b="1" lang="en-US" sz="4000">
+                <a:solidFill>
+                  <a:srgbClr val="0B3D59"/>
+                </a:solidFill>
+              </a:rPr>
               <a:t>LITERATURE REVIEW</a:t>
             </a:r>
-            <a:endParaRPr sz="2000"/>
+            <a:endParaRPr sz="2000">
+              <a:solidFill>
+                <a:srgbClr val="0B3D59"/>
+              </a:solidFill>
+            </a:endParaRPr>
           </a:p>
         </p:txBody>
       </p:sp>
@@ -20039,7 +25992,7 @@
             <a:tbl>
               <a:tblPr>
                 <a:noFill/>
-                <a:tableStyleId>{55E94970-25BA-4ACD-85B8-0799969456D3}</a:tableStyleId>
+                <a:tableStyleId>{A86E29F2-8678-437A-8A81-A00D8066E49F}</a:tableStyleId>
               </a:tblPr>
               <a:tblGrid>
                 <a:gridCol w="2057400"/>
@@ -20047,7 +26000,7 @@
                 <a:gridCol w="2057400"/>
                 <a:gridCol w="2057400"/>
               </a:tblGrid>
-              <a:tr h="601400">
+              <a:tr h="524750">
                 <a:tc>
                   <a:txBody>
                     <a:bodyPr/>
@@ -20064,6 +26017,9 @@
                       </a:pPr>
                       <a:r>
                         <a:rPr b="1" lang="en-US" sz="2000">
+                          <a:solidFill>
+                            <a:schemeClr val="lt1"/>
+                          </a:solidFill>
                           <a:latin typeface="Calibri"/>
                           <a:ea typeface="Calibri"/>
                           <a:cs typeface="Calibri"/>
@@ -20072,6 +26028,9 @@
                         <a:t>Source</a:t>
                       </a:r>
                       <a:endParaRPr b="1" sz="2000">
+                        <a:solidFill>
+                          <a:schemeClr val="lt1"/>
+                        </a:solidFill>
                         <a:latin typeface="Calibri"/>
                         <a:ea typeface="Calibri"/>
                         <a:cs typeface="Calibri"/>
@@ -20081,7 +26040,7 @@
                   </a:txBody>
                   <a:tcPr marT="91425" marB="91425" marR="91425" marL="91425">
                     <a:solidFill>
-                      <a:srgbClr val="E1E9EA"/>
+                      <a:srgbClr val="1C7293"/>
                     </a:solidFill>
                   </a:tcPr>
                 </a:tc>
@@ -20101,6 +26060,9 @@
                       </a:pPr>
                       <a:r>
                         <a:rPr b="1" lang="en-US" sz="2000">
+                          <a:solidFill>
+                            <a:schemeClr val="lt1"/>
+                          </a:solidFill>
                           <a:latin typeface="Calibri"/>
                           <a:ea typeface="Calibri"/>
                           <a:cs typeface="Calibri"/>
@@ -20109,6 +26071,9 @@
                         <a:t>Modality</a:t>
                       </a:r>
                       <a:endParaRPr b="1" sz="2000">
+                        <a:solidFill>
+                          <a:schemeClr val="lt1"/>
+                        </a:solidFill>
                         <a:latin typeface="Calibri"/>
                         <a:ea typeface="Calibri"/>
                         <a:cs typeface="Calibri"/>
@@ -20118,7 +26083,7 @@
                   </a:txBody>
                   <a:tcPr marT="91425" marB="91425" marR="91425" marL="91425">
                     <a:solidFill>
-                      <a:srgbClr val="E1E9EA"/>
+                      <a:srgbClr val="1C7293"/>
                     </a:solidFill>
                   </a:tcPr>
                 </a:tc>
@@ -20138,6 +26103,9 @@
                       </a:pPr>
                       <a:r>
                         <a:rPr b="1" lang="en-US" sz="2000">
+                          <a:solidFill>
+                            <a:schemeClr val="lt1"/>
+                          </a:solidFill>
                           <a:latin typeface="Calibri"/>
                           <a:ea typeface="Calibri"/>
                           <a:cs typeface="Calibri"/>
@@ -20146,6 +26114,9 @@
                         <a:t>Method</a:t>
                       </a:r>
                       <a:endParaRPr b="1" sz="2000">
+                        <a:solidFill>
+                          <a:schemeClr val="lt1"/>
+                        </a:solidFill>
                         <a:latin typeface="Calibri"/>
                         <a:ea typeface="Calibri"/>
                         <a:cs typeface="Calibri"/>
@@ -20155,7 +26126,7 @@
                   </a:txBody>
                   <a:tcPr marT="91425" marB="91425" marR="91425" marL="91425">
                     <a:solidFill>
-                      <a:srgbClr val="E1E9EA"/>
+                      <a:srgbClr val="1C7293"/>
                     </a:solidFill>
                   </a:tcPr>
                 </a:tc>
@@ -20175,6 +26146,9 @@
                       </a:pPr>
                       <a:r>
                         <a:rPr b="1" lang="en-US" sz="2000">
+                          <a:solidFill>
+                            <a:schemeClr val="lt1"/>
+                          </a:solidFill>
                           <a:latin typeface="Calibri"/>
                           <a:ea typeface="Calibri"/>
                           <a:cs typeface="Calibri"/>
@@ -20183,6 +26157,9 @@
                         <a:t>Key Limitation</a:t>
                       </a:r>
                       <a:endParaRPr b="1" sz="2000">
+                        <a:solidFill>
+                          <a:schemeClr val="lt1"/>
+                        </a:solidFill>
                         <a:latin typeface="Calibri"/>
                         <a:ea typeface="Calibri"/>
                         <a:cs typeface="Calibri"/>
@@ -20192,12 +26169,12 @@
                   </a:txBody>
                   <a:tcPr marT="91425" marB="91425" marR="91425" marL="91425">
                     <a:solidFill>
-                      <a:srgbClr val="E1E9EA"/>
+                      <a:srgbClr val="1C7293"/>
                     </a:solidFill>
                   </a:tcPr>
                 </a:tc>
               </a:tr>
-              <a:tr h="918725">
+              <a:tr h="1385475">
                 <a:tc>
                   <a:txBody>
                     <a:bodyPr/>
@@ -20340,7 +26317,7 @@
                   <a:tcPr marT="91425" marB="91425" marR="91425" marL="91425"/>
                 </a:tc>
               </a:tr>
-              <a:tr h="918725">
+              <a:tr h="1084275">
                 <a:tc>
                   <a:txBody>
                     <a:bodyPr/>
@@ -20372,7 +26349,11 @@
                       </a:endParaRPr>
                     </a:p>
                   </a:txBody>
-                  <a:tcPr marT="91425" marB="91425" marR="91425" marL="91425"/>
+                  <a:tcPr marT="91425" marB="91425" marR="91425" marL="91425">
+                    <a:solidFill>
+                      <a:srgbClr val="E1E9EA"/>
+                    </a:solidFill>
+                  </a:tcPr>
                 </a:tc>
                 <a:tc>
                   <a:txBody>
@@ -20408,7 +26389,11 @@
                       </a:endParaRPr>
                     </a:p>
                   </a:txBody>
-                  <a:tcPr marT="91425" marB="91425" marR="91425" marL="91425"/>
+                  <a:tcPr marT="91425" marB="91425" marR="91425" marL="91425">
+                    <a:solidFill>
+                      <a:srgbClr val="E1E9EA"/>
+                    </a:solidFill>
+                  </a:tcPr>
                 </a:tc>
                 <a:tc>
                   <a:txBody>
@@ -20444,7 +26429,11 @@
                       </a:endParaRPr>
                     </a:p>
                   </a:txBody>
-                  <a:tcPr marT="91425" marB="91425" marR="91425" marL="91425"/>
+                  <a:tcPr marT="91425" marB="91425" marR="91425" marL="91425">
+                    <a:solidFill>
+                      <a:srgbClr val="E1E9EA"/>
+                    </a:solidFill>
+                  </a:tcPr>
                 </a:tc>
                 <a:tc>
                   <a:txBody>
@@ -20480,10 +26469,14 @@
                       </a:endParaRPr>
                     </a:p>
                   </a:txBody>
-                  <a:tcPr marT="91425" marB="91425" marR="91425" marL="91425"/>
+                  <a:tcPr marT="91425" marB="91425" marR="91425" marL="91425">
+                    <a:solidFill>
+                      <a:srgbClr val="E1E9EA"/>
+                    </a:solidFill>
+                  </a:tcPr>
                 </a:tc>
               </a:tr>
-              <a:tr h="918725">
+              <a:tr h="1385475">
                 <a:tc>
                   <a:txBody>
                     <a:bodyPr/>
@@ -20719,10 +26712,18 @@
               <a:buNone/>
             </a:pPr>
             <a:r>
-              <a:rPr lang="en-US"/>
+              <a:rPr lang="en-US">
+                <a:solidFill>
+                  <a:srgbClr val="0B3D59"/>
+                </a:solidFill>
+              </a:rPr>
               <a:t>Gap Analysis</a:t>
             </a:r>
-            <a:endParaRPr/>
+            <a:endParaRPr>
+              <a:solidFill>
+                <a:srgbClr val="0B3D59"/>
+              </a:solidFill>
+            </a:endParaRPr>
           </a:p>
         </p:txBody>
       </p:sp>
@@ -20786,6 +26787,285 @@
 </file>
 
 <file path=ppt/theme/theme1.xml><?xml version="1.0" encoding="utf-8"?>
+<a:theme xmlns:a="http://schemas.openxmlformats.org/drawingml/2006/main" xmlns:r="http://schemas.openxmlformats.org/officeDocument/2006/relationships">
+  <a:themeElements>
+    <a:clrScheme name="Default">
+      <a:dk1>
+        <a:srgbClr val="000000"/>
+      </a:dk1>
+      <a:lt1>
+        <a:srgbClr val="FFFFFF"/>
+      </a:lt1>
+      <a:dk2>
+        <a:srgbClr val="158158"/>
+      </a:dk2>
+      <a:lt2>
+        <a:srgbClr val="F3F3F3"/>
+      </a:lt2>
+      <a:accent1>
+        <a:srgbClr val="058DC7"/>
+      </a:accent1>
+      <a:accent2>
+        <a:srgbClr val="50B432"/>
+      </a:accent2>
+      <a:accent3>
+        <a:srgbClr val="ED561B"/>
+      </a:accent3>
+      <a:accent4>
+        <a:srgbClr val="EDEF00"/>
+      </a:accent4>
+      <a:accent5>
+        <a:srgbClr val="24CBE5"/>
+      </a:accent5>
+      <a:accent6>
+        <a:srgbClr val="64E572"/>
+      </a:accent6>
+      <a:hlink>
+        <a:srgbClr val="2200CC"/>
+      </a:hlink>
+      <a:folHlink>
+        <a:srgbClr val="551A8B"/>
+      </a:folHlink>
+    </a:clrScheme>
+    <a:fontScheme name="Office">
+      <a:majorFont>
+        <a:latin typeface="Arial"/>
+        <a:ea typeface=""/>
+        <a:cs typeface=""/>
+        <a:font script="Jpan" typeface="ＭＳ Ｐゴシック"/>
+        <a:font script="Hang" typeface="맑은 고딕"/>
+        <a:font script="Hans" typeface="宋体"/>
+        <a:font script="Hant" typeface="新細明體"/>
+        <a:font script="Arab" typeface="Times New Roman"/>
+        <a:font script="Hebr" typeface="Times New Roman"/>
+        <a:font script="Thai" typeface="Angsana New"/>
+        <a:font script="Ethi" typeface="Nyala"/>
+        <a:font script="Beng" typeface="Vrinda"/>
+        <a:font script="Gujr" typeface="Shruti"/>
+        <a:font script="Khmr" typeface="MoolBoran"/>
+        <a:font script="Knda" typeface="Tunga"/>
+        <a:font script="Guru" typeface="Raavi"/>
+        <a:font script="Cans" typeface="Euphemia"/>
+        <a:font script="Cher" typeface="Plantagenet Cherokee"/>
+        <a:font script="Yiii" typeface="Microsoft Yi Baiti"/>
+        <a:font script="Tibt" typeface="Microsoft Himalaya"/>
+        <a:font script="Thaa" typeface="MV Boli"/>
+        <a:font script="Deva" typeface="Mangal"/>
+        <a:font script="Telu" typeface="Gautami"/>
+        <a:font script="Taml" typeface="Latha"/>
+        <a:font script="Syrc" typeface="Estrangelo Edessa"/>
+        <a:font script="Orya" typeface="Kalinga"/>
+        <a:font script="Mlym" typeface="Kartika"/>
+        <a:font script="Laoo" typeface="DokChampa"/>
+        <a:font script="Sinh" typeface="Iskoola Pota"/>
+        <a:font script="Mong" typeface="Mongolian Baiti"/>
+        <a:font script="Viet" typeface="Times New Roman"/>
+        <a:font script="Uigh" typeface="Microsoft Uighur"/>
+        <a:font script="Geor" typeface="Sylfaen"/>
+      </a:majorFont>
+      <a:minorFont>
+        <a:latin typeface="Arial"/>
+        <a:ea typeface=""/>
+        <a:cs typeface=""/>
+        <a:font script="Jpan" typeface="ＭＳ Ｐゴシック"/>
+        <a:font script="Hang" typeface="맑은 고딕"/>
+        <a:font script="Hans" typeface="宋体"/>
+        <a:font script="Hant" typeface="新細明體"/>
+        <a:font script="Arab" typeface="Arial"/>
+        <a:font script="Hebr" typeface="Arial"/>
+        <a:font script="Thai" typeface="Cordia New"/>
+        <a:font script="Ethi" typeface="Nyala"/>
+        <a:font script="Beng" typeface="Vrinda"/>
+        <a:font script="Gujr" typeface="Shruti"/>
+        <a:font script="Khmr" typeface="DaunPenh"/>
+        <a:font script="Knda" typeface="Tunga"/>
+        <a:font script="Guru" typeface="Raavi"/>
+        <a:font script="Cans" typeface="Euphemia"/>
+        <a:font script="Cher" typeface="Plantagenet Cherokee"/>
+        <a:font script="Yiii" typeface="Microsoft Yi Baiti"/>
+        <a:font script="Tibt" typeface="Microsoft Himalaya"/>
+        <a:font script="Thaa" typeface="MV Boli"/>
+        <a:font script="Deva" typeface="Mangal"/>
+        <a:font script="Telu" typeface="Gautami"/>
+        <a:font script="Taml" typeface="Latha"/>
+        <a:font script="Syrc" typeface="Estrangelo Edessa"/>
+        <a:font script="Orya" typeface="Kalinga"/>
+        <a:font script="Mlym" typeface="Kartika"/>
+        <a:font script="Laoo" typeface="DokChampa"/>
+        <a:font script="Sinh" typeface="Iskoola Pota"/>
+        <a:font script="Mong" typeface="Mongolian Baiti"/>
+        <a:font script="Viet" typeface="Arial"/>
+        <a:font script="Uigh" typeface="Microsoft Uighur"/>
+        <a:font script="Geor" typeface="Sylfaen"/>
+      </a:minorFont>
+    </a:fontScheme>
+    <a:fmtScheme name="Office">
+      <a:fillStyleLst>
+        <a:solidFill>
+          <a:schemeClr val="phClr"/>
+        </a:solidFill>
+        <a:gradFill rotWithShape="1">
+          <a:gsLst>
+            <a:gs pos="0">
+              <a:schemeClr val="phClr">
+                <a:tint val="50000"/>
+                <a:satMod val="300000"/>
+              </a:schemeClr>
+            </a:gs>
+            <a:gs pos="35000">
+              <a:schemeClr val="phClr">
+                <a:tint val="37000"/>
+                <a:satMod val="300000"/>
+              </a:schemeClr>
+            </a:gs>
+            <a:gs pos="100000">
+              <a:schemeClr val="phClr">
+                <a:tint val="15000"/>
+                <a:satMod val="350000"/>
+              </a:schemeClr>
+            </a:gs>
+          </a:gsLst>
+          <a:lin ang="16200000" scaled="1"/>
+        </a:gradFill>
+        <a:gradFill rotWithShape="1">
+          <a:gsLst>
+            <a:gs pos="0">
+              <a:schemeClr val="phClr">
+                <a:tint val="100000"/>
+                <a:shade val="100000"/>
+                <a:satMod val="130000"/>
+              </a:schemeClr>
+            </a:gs>
+            <a:gs pos="100000">
+              <a:schemeClr val="phClr">
+                <a:tint val="50000"/>
+                <a:shade val="100000"/>
+                <a:satMod val="350000"/>
+              </a:schemeClr>
+            </a:gs>
+          </a:gsLst>
+          <a:lin ang="16200000" scaled="0"/>
+        </a:gradFill>
+      </a:fillStyleLst>
+      <a:lnStyleLst>
+        <a:ln w="9525" cap="flat" cmpd="sng" algn="ctr">
+          <a:solidFill>
+            <a:schemeClr val="phClr">
+              <a:shade val="95000"/>
+              <a:satMod val="105000"/>
+            </a:schemeClr>
+          </a:solidFill>
+          <a:prstDash val="solid"/>
+        </a:ln>
+        <a:ln w="25400" cap="flat" cmpd="sng" algn="ctr">
+          <a:solidFill>
+            <a:schemeClr val="phClr"/>
+          </a:solidFill>
+          <a:prstDash val="solid"/>
+        </a:ln>
+        <a:ln w="38100" cap="flat" cmpd="sng" algn="ctr">
+          <a:solidFill>
+            <a:schemeClr val="phClr"/>
+          </a:solidFill>
+          <a:prstDash val="solid"/>
+        </a:ln>
+      </a:lnStyleLst>
+      <a:effectStyleLst>
+        <a:effectStyle>
+          <a:effectLst>
+            <a:outerShdw blurRad="40000" dist="20000" dir="5400000" rotWithShape="0">
+              <a:srgbClr val="000000">
+                <a:alpha val="38000"/>
+              </a:srgbClr>
+            </a:outerShdw>
+          </a:effectLst>
+        </a:effectStyle>
+        <a:effectStyle>
+          <a:effectLst>
+            <a:outerShdw blurRad="40000" dist="23000" dir="5400000" rotWithShape="0">
+              <a:srgbClr val="000000">
+                <a:alpha val="35000"/>
+              </a:srgbClr>
+            </a:outerShdw>
+          </a:effectLst>
+        </a:effectStyle>
+        <a:effectStyle>
+          <a:effectLst>
+            <a:outerShdw blurRad="40000" dist="23000" dir="5400000" rotWithShape="0">
+              <a:srgbClr val="000000">
+                <a:alpha val="35000"/>
+              </a:srgbClr>
+            </a:outerShdw>
+          </a:effectLst>
+          <a:scene3d>
+            <a:camera prst="orthographicFront">
+              <a:rot lat="0" lon="0" rev="0"/>
+            </a:camera>
+            <a:lightRig rig="threePt" dir="t">
+              <a:rot lat="0" lon="0" rev="1200000"/>
+            </a:lightRig>
+          </a:scene3d>
+          <a:sp3d>
+            <a:bevelT w="63500" h="25400"/>
+          </a:sp3d>
+        </a:effectStyle>
+      </a:effectStyleLst>
+      <a:bgFillStyleLst>
+        <a:solidFill>
+          <a:schemeClr val="phClr"/>
+        </a:solidFill>
+        <a:gradFill rotWithShape="1">
+          <a:gsLst>
+            <a:gs pos="0">
+              <a:schemeClr val="phClr">
+                <a:tint val="40000"/>
+                <a:satMod val="350000"/>
+              </a:schemeClr>
+            </a:gs>
+            <a:gs pos="40000">
+              <a:schemeClr val="phClr">
+                <a:tint val="45000"/>
+                <a:shade val="99000"/>
+                <a:satMod val="350000"/>
+              </a:schemeClr>
+            </a:gs>
+            <a:gs pos="100000">
+              <a:schemeClr val="phClr">
+                <a:shade val="20000"/>
+                <a:satMod val="255000"/>
+              </a:schemeClr>
+            </a:gs>
+          </a:gsLst>
+          <a:path path="circle">
+            <a:fillToRect l="50000" t="-80000" r="50000" b="180000"/>
+          </a:path>
+        </a:gradFill>
+        <a:gradFill rotWithShape="1">
+          <a:gsLst>
+            <a:gs pos="0">
+              <a:schemeClr val="phClr">
+                <a:tint val="80000"/>
+                <a:satMod val="300000"/>
+              </a:schemeClr>
+            </a:gs>
+            <a:gs pos="100000">
+              <a:schemeClr val="phClr">
+                <a:shade val="30000"/>
+                <a:satMod val="200000"/>
+              </a:schemeClr>
+            </a:gs>
+          </a:gsLst>
+          <a:path path="circle">
+            <a:fillToRect l="50000" t="50000" r="50000" b="50000"/>
+          </a:path>
+        </a:gradFill>
+      </a:bgFillStyleLst>
+    </a:fmtScheme>
+  </a:themeElements>
+</a:theme>
+</file>
+
+<file path=ppt/theme/theme2.xml><?xml version="1.0" encoding="utf-8"?>
 <a:theme xmlns:a="http://schemas.openxmlformats.org/drawingml/2006/main" xmlns:r="http://schemas.openxmlformats.org/officeDocument/2006/relationships" name="Office Theme">
   <a:themeElements>
     <a:clrScheme name="Office">
@@ -21062,283 +27342,4 @@
     </a:fmtScheme>
   </a:themeElements>
 </a:theme>
-</file>
-
-<file path=ppt/theme/theme2.xml><?xml version="1.0" encoding="utf-8"?>
-<a:theme xmlns:a="http://schemas.openxmlformats.org/drawingml/2006/main" xmlns:r="http://schemas.openxmlformats.org/officeDocument/2006/relationships">
-  <a:themeElements>
-    <a:clrScheme name="Default">
-      <a:dk1>
-        <a:srgbClr val="000000"/>
-      </a:dk1>
-      <a:lt1>
-        <a:srgbClr val="FFFFFF"/>
-      </a:lt1>
-      <a:dk2>
-        <a:srgbClr val="158158"/>
-      </a:dk2>
-      <a:lt2>
-        <a:srgbClr val="F3F3F3"/>
-      </a:lt2>
-      <a:accent1>
-        <a:srgbClr val="058DC7"/>
-      </a:accent1>
-      <a:accent2>
-        <a:srgbClr val="50B432"/>
-      </a:accent2>
-      <a:accent3>
-        <a:srgbClr val="ED561B"/>
-      </a:accent3>
-      <a:accent4>
-        <a:srgbClr val="EDEF00"/>
-      </a:accent4>
-      <a:accent5>
-        <a:srgbClr val="24CBE5"/>
-      </a:accent5>
-      <a:accent6>
-        <a:srgbClr val="64E572"/>
-      </a:accent6>
-      <a:hlink>
-        <a:srgbClr val="2200CC"/>
-      </a:hlink>
-      <a:folHlink>
-        <a:srgbClr val="551A8B"/>
-      </a:folHlink>
-    </a:clrScheme>
-    <a:fontScheme name="Office">
-      <a:majorFont>
-        <a:latin typeface="Arial"/>
-        <a:ea typeface=""/>
-        <a:cs typeface=""/>
-        <a:font script="Jpan" typeface="ＭＳ Ｐゴシック"/>
-        <a:font script="Hang" typeface="맑은 고딕"/>
-        <a:font script="Hans" typeface="宋体"/>
-        <a:font script="Hant" typeface="新細明體"/>
-        <a:font script="Arab" typeface="Times New Roman"/>
-        <a:font script="Hebr" typeface="Times New Roman"/>
-        <a:font script="Thai" typeface="Angsana New"/>
-        <a:font script="Ethi" typeface="Nyala"/>
-        <a:font script="Beng" typeface="Vrinda"/>
-        <a:font script="Gujr" typeface="Shruti"/>
-        <a:font script="Khmr" typeface="MoolBoran"/>
-        <a:font script="Knda" typeface="Tunga"/>
-        <a:font script="Guru" typeface="Raavi"/>
-        <a:font script="Cans" typeface="Euphemia"/>
-        <a:font script="Cher" typeface="Plantagenet Cherokee"/>
-        <a:font script="Yiii" typeface="Microsoft Yi Baiti"/>
-        <a:font script="Tibt" typeface="Microsoft Himalaya"/>
-        <a:font script="Thaa" typeface="MV Boli"/>
-        <a:font script="Deva" typeface="Mangal"/>
-        <a:font script="Telu" typeface="Gautami"/>
-        <a:font script="Taml" typeface="Latha"/>
-        <a:font script="Syrc" typeface="Estrangelo Edessa"/>
-        <a:font script="Orya" typeface="Kalinga"/>
-        <a:font script="Mlym" typeface="Kartika"/>
-        <a:font script="Laoo" typeface="DokChampa"/>
-        <a:font script="Sinh" typeface="Iskoola Pota"/>
-        <a:font script="Mong" typeface="Mongolian Baiti"/>
-        <a:font script="Viet" typeface="Times New Roman"/>
-        <a:font script="Uigh" typeface="Microsoft Uighur"/>
-        <a:font script="Geor" typeface="Sylfaen"/>
-      </a:majorFont>
-      <a:minorFont>
-        <a:latin typeface="Arial"/>
-        <a:ea typeface=""/>
-        <a:cs typeface=""/>
-        <a:font script="Jpan" typeface="ＭＳ Ｐゴシック"/>
-        <a:font script="Hang" typeface="맑은 고딕"/>
-        <a:font script="Hans" typeface="宋体"/>
-        <a:font script="Hant" typeface="新細明體"/>
-        <a:font script="Arab" typeface="Arial"/>
-        <a:font script="Hebr" typeface="Arial"/>
-        <a:font script="Thai" typeface="Cordia New"/>
-        <a:font script="Ethi" typeface="Nyala"/>
-        <a:font script="Beng" typeface="Vrinda"/>
-        <a:font script="Gujr" typeface="Shruti"/>
-        <a:font script="Khmr" typeface="DaunPenh"/>
-        <a:font script="Knda" typeface="Tunga"/>
-        <a:font script="Guru" typeface="Raavi"/>
-        <a:font script="Cans" typeface="Euphemia"/>
-        <a:font script="Cher" typeface="Plantagenet Cherokee"/>
-        <a:font script="Yiii" typeface="Microsoft Yi Baiti"/>
-        <a:font script="Tibt" typeface="Microsoft Himalaya"/>
-        <a:font script="Thaa" typeface="MV Boli"/>
-        <a:font script="Deva" typeface="Mangal"/>
-        <a:font script="Telu" typeface="Gautami"/>
-        <a:font script="Taml" typeface="Latha"/>
-        <a:font script="Syrc" typeface="Estrangelo Edessa"/>
-        <a:font script="Orya" typeface="Kalinga"/>
-        <a:font script="Mlym" typeface="Kartika"/>
-        <a:font script="Laoo" typeface="DokChampa"/>
-        <a:font script="Sinh" typeface="Iskoola Pota"/>
-        <a:font script="Mong" typeface="Mongolian Baiti"/>
-        <a:font script="Viet" typeface="Arial"/>
-        <a:font script="Uigh" typeface="Microsoft Uighur"/>
-        <a:font script="Geor" typeface="Sylfaen"/>
-      </a:minorFont>
-    </a:fontScheme>
-    <a:fmtScheme name="Office">
-      <a:fillStyleLst>
-        <a:solidFill>
-          <a:schemeClr val="phClr"/>
-        </a:solidFill>
-        <a:gradFill rotWithShape="1">
-          <a:gsLst>
-            <a:gs pos="0">
-              <a:schemeClr val="phClr">
-                <a:tint val="50000"/>
-                <a:satMod val="300000"/>
-              </a:schemeClr>
-            </a:gs>
-            <a:gs pos="35000">
-              <a:schemeClr val="phClr">
-                <a:tint val="37000"/>
-                <a:satMod val="300000"/>
-              </a:schemeClr>
-            </a:gs>
-            <a:gs pos="100000">
-              <a:schemeClr val="phClr">
-                <a:tint val="15000"/>
-                <a:satMod val="350000"/>
-              </a:schemeClr>
-            </a:gs>
-          </a:gsLst>
-          <a:lin ang="16200000" scaled="1"/>
-        </a:gradFill>
-        <a:gradFill rotWithShape="1">
-          <a:gsLst>
-            <a:gs pos="0">
-              <a:schemeClr val="phClr">
-                <a:tint val="100000"/>
-                <a:shade val="100000"/>
-                <a:satMod val="130000"/>
-              </a:schemeClr>
-            </a:gs>
-            <a:gs pos="100000">
-              <a:schemeClr val="phClr">
-                <a:tint val="50000"/>
-                <a:shade val="100000"/>
-                <a:satMod val="350000"/>
-              </a:schemeClr>
-            </a:gs>
-          </a:gsLst>
-          <a:lin ang="16200000" scaled="0"/>
-        </a:gradFill>
-      </a:fillStyleLst>
-      <a:lnStyleLst>
-        <a:ln w="9525" cap="flat" cmpd="sng" algn="ctr">
-          <a:solidFill>
-            <a:schemeClr val="phClr">
-              <a:shade val="95000"/>
-              <a:satMod val="105000"/>
-            </a:schemeClr>
-          </a:solidFill>
-          <a:prstDash val="solid"/>
-        </a:ln>
-        <a:ln w="25400" cap="flat" cmpd="sng" algn="ctr">
-          <a:solidFill>
-            <a:schemeClr val="phClr"/>
-          </a:solidFill>
-          <a:prstDash val="solid"/>
-        </a:ln>
-        <a:ln w="38100" cap="flat" cmpd="sng" algn="ctr">
-          <a:solidFill>
-            <a:schemeClr val="phClr"/>
-          </a:solidFill>
-          <a:prstDash val="solid"/>
-        </a:ln>
-      </a:lnStyleLst>
-      <a:effectStyleLst>
-        <a:effectStyle>
-          <a:effectLst>
-            <a:outerShdw blurRad="40000" dist="20000" dir="5400000" rotWithShape="0">
-              <a:srgbClr val="000000">
-                <a:alpha val="38000"/>
-              </a:srgbClr>
-            </a:outerShdw>
-          </a:effectLst>
-        </a:effectStyle>
-        <a:effectStyle>
-          <a:effectLst>
-            <a:outerShdw blurRad="40000" dist="23000" dir="5400000" rotWithShape="0">
-              <a:srgbClr val="000000">
-                <a:alpha val="35000"/>
-              </a:srgbClr>
-            </a:outerShdw>
-          </a:effectLst>
-        </a:effectStyle>
-        <a:effectStyle>
-          <a:effectLst>
-            <a:outerShdw blurRad="40000" dist="23000" dir="5400000" rotWithShape="0">
-              <a:srgbClr val="000000">
-                <a:alpha val="35000"/>
-              </a:srgbClr>
-            </a:outerShdw>
-          </a:effectLst>
-          <a:scene3d>
-            <a:camera prst="orthographicFront">
-              <a:rot lat="0" lon="0" rev="0"/>
-            </a:camera>
-            <a:lightRig rig="threePt" dir="t">
-              <a:rot lat="0" lon="0" rev="1200000"/>
-            </a:lightRig>
-          </a:scene3d>
-          <a:sp3d>
-            <a:bevelT w="63500" h="25400"/>
-          </a:sp3d>
-        </a:effectStyle>
-      </a:effectStyleLst>
-      <a:bgFillStyleLst>
-        <a:solidFill>
-          <a:schemeClr val="phClr"/>
-        </a:solidFill>
-        <a:gradFill rotWithShape="1">
-          <a:gsLst>
-            <a:gs pos="0">
-              <a:schemeClr val="phClr">
-                <a:tint val="40000"/>
-                <a:satMod val="350000"/>
-              </a:schemeClr>
-            </a:gs>
-            <a:gs pos="40000">
-              <a:schemeClr val="phClr">
-                <a:tint val="45000"/>
-                <a:shade val="99000"/>
-                <a:satMod val="350000"/>
-              </a:schemeClr>
-            </a:gs>
-            <a:gs pos="100000">
-              <a:schemeClr val="phClr">
-                <a:shade val="20000"/>
-                <a:satMod val="255000"/>
-              </a:schemeClr>
-            </a:gs>
-          </a:gsLst>
-          <a:path path="circle">
-            <a:fillToRect l="50000" t="-80000" r="50000" b="180000"/>
-          </a:path>
-        </a:gradFill>
-        <a:gradFill rotWithShape="1">
-          <a:gsLst>
-            <a:gs pos="0">
-              <a:schemeClr val="phClr">
-                <a:tint val="80000"/>
-                <a:satMod val="300000"/>
-              </a:schemeClr>
-            </a:gs>
-            <a:gs pos="100000">
-              <a:schemeClr val="phClr">
-                <a:shade val="30000"/>
-                <a:satMod val="200000"/>
-              </a:schemeClr>
-            </a:gs>
-          </a:gsLst>
-          <a:path path="circle">
-            <a:fillToRect l="50000" t="50000" r="50000" b="50000"/>
-          </a:path>
-        </a:gradFill>
-      </a:bgFillStyleLst>
-    </a:fmtScheme>
-  </a:themeElements>
-</a:theme>
 </file>